--- a/Reverse Engineering 101.pptx
+++ b/Reverse Engineering 101.pptx
@@ -3465,41 +3465,6 @@
       </p:sp>
       <p:sp>
         <p:nvSpPr>
-          <p:cNvPr id="4" name="TextBox 3"/>
-          <p:cNvSpPr txBox="1"/>
-          <p:nvPr/>
-        </p:nvSpPr>
-        <p:spPr>
-          <a:xfrm>
-            <a:off x="457200" y="960120"/>
-            <a:ext cx="11247120" cy="365760"/>
-          </a:xfrm>
-          <a:prstGeom prst="rect">
-            <a:avLst/>
-          </a:prstGeom>
-          <a:noFill/>
-        </p:spPr>
-        <p:txBody>
-          <a:bodyPr wrap="square">
-            <a:spAutoFit/>
-          </a:bodyPr>
-          <a:lstStyle/>
-          <a:p>
-            <a:pPr algn="l"/>
-            <a:r>
-              <a:rPr sz="1700" b="0">
-                <a:solidFill>
-                  <a:srgbClr val="B0B0B0"/>
-                </a:solidFill>
-                <a:latin typeface="Calibri"/>
-              </a:rPr>
-              <a:t>Debian / Ubuntu / WSL. New terminal after GEF so it loads.</a:t>
-            </a:r>
-          </a:p>
-        </p:txBody>
-      </p:sp>
-      <p:sp>
-        <p:nvSpPr>
           <p:cNvPr id="5" name="Rectangle 4"/>
           <p:cNvSpPr/>
           <p:nvPr/>
@@ -3889,41 +3854,6 @@
       </p:sp>
       <p:sp>
         <p:nvSpPr>
-          <p:cNvPr id="4" name="TextBox 3"/>
-          <p:cNvSpPr txBox="1"/>
-          <p:nvPr/>
-        </p:nvSpPr>
-        <p:spPr>
-          <a:xfrm>
-            <a:off x="457200" y="960120"/>
-            <a:ext cx="11247120" cy="365760"/>
-          </a:xfrm>
-          <a:prstGeom prst="rect">
-            <a:avLst/>
-          </a:prstGeom>
-          <a:noFill/>
-        </p:spPr>
-        <p:txBody>
-          <a:bodyPr wrap="square">
-            <a:spAutoFit/>
-          </a:bodyPr>
-          <a:lstStyle/>
-          <a:p>
-            <a:pPr algn="l"/>
-            <a:r>
-              <a:rPr sz="1700" b="0">
-                <a:solidFill>
-                  <a:srgbClr val="B0B0B0"/>
-                </a:solidFill>
-                <a:latin typeface="Calibri"/>
-              </a:rPr>
-              <a:t>32-bit. If gcc complains about -m32, you missed gcc-multilib.</a:t>
-            </a:r>
-          </a:p>
-        </p:txBody>
-      </p:sp>
-      <p:sp>
-        <p:nvSpPr>
           <p:cNvPr id="5" name="Rectangle 4"/>
           <p:cNvSpPr/>
           <p:nvPr/>
@@ -4454,41 +4384,6 @@
       </p:sp>
       <p:sp>
         <p:nvSpPr>
-          <p:cNvPr id="4" name="TextBox 3"/>
-          <p:cNvSpPr txBox="1"/>
-          <p:nvPr/>
-        </p:nvSpPr>
-        <p:spPr>
-          <a:xfrm>
-            <a:off x="457200" y="914400"/>
-            <a:ext cx="11247120" cy="411480"/>
-          </a:xfrm>
-          <a:prstGeom prst="rect">
-            <a:avLst/>
-          </a:prstGeom>
-          <a:noFill/>
-        </p:spPr>
-        <p:txBody>
-          <a:bodyPr wrap="square">
-            <a:spAutoFit/>
-          </a:bodyPr>
-          <a:lstStyle/>
-          <a:p>
-            <a:pPr algn="l"/>
-            <a:r>
-              <a:rPr sz="1700" b="0">
-                <a:solidFill>
-                  <a:srgbClr val="B0B0B0"/>
-                </a:solidFill>
-                <a:latin typeface="Calibri"/>
-              </a:rPr>
-              <a:t>Terminal: hexedit. GUI: Bless.  sudo apt install hexedit bless</a:t>
-            </a:r>
-          </a:p>
-        </p:txBody>
-      </p:sp>
-      <p:sp>
-        <p:nvSpPr>
           <p:cNvPr id="5" name="Rectangle 4"/>
           <p:cNvSpPr/>
           <p:nvPr/>
@@ -5104,30 +4999,45 @@
         </p:nvSpPr>
         <p:spPr>
           <a:xfrm>
-            <a:off x="457200" y="1051560"/>
-            <a:ext cx="11247120" cy="640080"/>
-          </a:xfrm>
-          <a:prstGeom prst="rect">
-            <a:avLst/>
-          </a:prstGeom>
-          <a:noFill/>
-        </p:spPr>
-        <p:txBody>
-          <a:bodyPr wrap="square">
-            <a:spAutoFit/>
-          </a:bodyPr>
-          <a:lstStyle/>
-          <a:p>
-            <a:pPr algn="l"/>
-            <a:r>
-              <a:rPr sz="2000" b="0">
+            <a:off x="365760" y="1097280"/>
+            <a:ext cx="11247120" cy="400110"/>
+          </a:xfrm>
+          <a:prstGeom prst="rect">
+            <a:avLst/>
+          </a:prstGeom>
+          <a:noFill/>
+        </p:spPr>
+        <p:txBody>
+          <a:bodyPr wrap="square">
+            <a:spAutoFit/>
+          </a:bodyPr>
+          <a:lstStyle/>
+          <a:p>
+            <a:pPr algn="l"/>
+            <a:r>
+              <a:rPr sz="2000" b="0" dirty="0">
                 <a:solidFill>
                   <a:srgbClr val="F2F2F2"/>
                 </a:solidFill>
                 <a:latin typeface="Calibri"/>
               </a:rPr>
-              <a:t>Each instruction does one small thing: move, add, compare, jump.</a:t>
-            </a:r>
+              <a:t>Each instruction does one small thing</a:t>
+            </a:r>
+            <a:r>
+              <a:rPr lang="en-IN" sz="2000" dirty="0">
+                <a:solidFill>
+                  <a:srgbClr val="F2F2F2"/>
+                </a:solidFill>
+                <a:latin typeface="Calibri"/>
+              </a:rPr>
+              <a:t>.</a:t>
+            </a:r>
+            <a:endParaRPr sz="2000" b="0" dirty="0">
+              <a:solidFill>
+                <a:srgbClr val="F2F2F2"/>
+              </a:solidFill>
+              <a:latin typeface="Calibri"/>
+            </a:endParaRPr>
           </a:p>
         </p:txBody>
       </p:sp>
@@ -5722,41 +5632,6 @@
           </a:p>
         </p:txBody>
       </p:sp>
-      <p:sp>
-        <p:nvSpPr>
-          <p:cNvPr id="4" name="TextBox 3"/>
-          <p:cNvSpPr txBox="1"/>
-          <p:nvPr/>
-        </p:nvSpPr>
-        <p:spPr>
-          <a:xfrm>
-            <a:off x="457200" y="914400"/>
-            <a:ext cx="11247120" cy="365760"/>
-          </a:xfrm>
-          <a:prstGeom prst="rect">
-            <a:avLst/>
-          </a:prstGeom>
-          <a:noFill/>
-        </p:spPr>
-        <p:txBody>
-          <a:bodyPr wrap="square">
-            <a:spAutoFit/>
-          </a:bodyPr>
-          <a:lstStyle/>
-          <a:p>
-            <a:pPr algn="l"/>
-            <a:r>
-              <a:rPr sz="1800" b="0">
-                <a:solidFill>
-                  <a:srgbClr val="B0B0B0"/>
-                </a:solidFill>
-                <a:latin typeface="Calibri"/>
-              </a:rPr>
-              <a:t>Fast storage inside the CPU. Most work happens here.</a:t>
-            </a:r>
-          </a:p>
-        </p:txBody>
-      </p:sp>
       <p:pic>
         <p:nvPicPr>
           <p:cNvPr id="5" name="Picture 4" descr="x86_registers.png"/>
@@ -6452,6 +6327,41 @@
                 <a:latin typeface="Calibri"/>
               </a:rPr>
               <a:t>14 / 27</a:t>
+            </a:r>
+          </a:p>
+        </p:txBody>
+      </p:sp>
+      <p:sp>
+        <p:nvSpPr>
+          <p:cNvPr id="25" name="TextBox 24"/>
+          <p:cNvSpPr txBox="1"/>
+          <p:nvPr/>
+        </p:nvSpPr>
+        <p:spPr>
+          <a:xfrm>
+            <a:off x="411480" y="841248"/>
+            <a:ext cx="11338560" cy="411480"/>
+          </a:xfrm>
+          <a:prstGeom prst="rect">
+            <a:avLst/>
+          </a:prstGeom>
+          <a:noFill/>
+        </p:spPr>
+        <p:txBody>
+          <a:bodyPr wrap="square">
+            <a:spAutoFit/>
+          </a:bodyPr>
+          <a:lstStyle/>
+          <a:p>
+            <a:pPr algn="l"/>
+            <a:r>
+              <a:rPr sz="1800" b="0">
+                <a:solidFill>
+                  <a:srgbClr val="B0B0B0"/>
+                </a:solidFill>
+                <a:latin typeface="Calibri"/>
+              </a:rPr>
+              <a:t>Small storage inside the CPU. Instructions use these instead of hitting memory every time.</a:t>
             </a:r>
           </a:p>
         </p:txBody>
@@ -21342,13 +21252,40 @@
           <a:p>
             <a:pPr algn="l"/>
             <a:r>
-              <a:rPr sz="1800" b="0">
+              <a:rPr sz="1800" b="0" dirty="0" err="1">
                 <a:solidFill>
                   <a:srgbClr val="B0B0B0"/>
                 </a:solidFill>
                 <a:latin typeface="Calibri"/>
               </a:rPr>
-              <a:t>objdump / Ghidra / IDA / Binary Ninja all start by turning bytes into instructions.</a:t>
+              <a:t>objdump</a:t>
+            </a:r>
+            <a:r>
+              <a:rPr sz="1800" b="0" dirty="0">
+                <a:solidFill>
+                  <a:srgbClr val="B0B0B0"/>
+                </a:solidFill>
+                <a:latin typeface="Calibri"/>
+              </a:rPr>
+              <a:t> / </a:t>
+            </a:r>
+            <a:r>
+              <a:rPr sz="1800" b="0" dirty="0" err="1">
+                <a:solidFill>
+                  <a:srgbClr val="B0B0B0"/>
+                </a:solidFill>
+                <a:latin typeface="Calibri"/>
+              </a:rPr>
+              <a:t>Ghidra</a:t>
+            </a:r>
+            <a:r>
+              <a:rPr sz="1800" b="0" dirty="0">
+                <a:solidFill>
+                  <a:srgbClr val="B0B0B0"/>
+                </a:solidFill>
+                <a:latin typeface="Calibri"/>
+              </a:rPr>
+              <a:t> / IDA / Binary Ninja all start by turning bytes into instructions.</a:t>
             </a:r>
           </a:p>
         </p:txBody>
@@ -22168,56 +22105,6 @@
               </a:rPr>
               <a:t>Tools</a:t>
             </a:r>
-          </a:p>
-        </p:txBody>
-      </p:sp>
-      <p:sp>
-        <p:nvSpPr>
-          <p:cNvPr id="4" name="TextBox 3"/>
-          <p:cNvSpPr txBox="1"/>
-          <p:nvPr/>
-        </p:nvSpPr>
-        <p:spPr>
-          <a:xfrm>
-            <a:off x="457200" y="914400"/>
-            <a:ext cx="11247120" cy="369332"/>
-          </a:xfrm>
-          <a:prstGeom prst="rect">
-            <a:avLst/>
-          </a:prstGeom>
-          <a:noFill/>
-        </p:spPr>
-        <p:txBody>
-          <a:bodyPr wrap="square">
-            <a:spAutoFit/>
-          </a:bodyPr>
-          <a:lstStyle/>
-          <a:p>
-            <a:pPr algn="l"/>
-            <a:r>
-              <a:rPr sz="1800" b="0" dirty="0">
-                <a:solidFill>
-                  <a:srgbClr val="B0B0B0"/>
-                </a:solidFill>
-                <a:latin typeface="Calibri"/>
-              </a:rPr>
-              <a:t>Today is 32-bit </a:t>
-            </a:r>
-            <a:r>
-              <a:rPr sz="1800" b="0">
-                <a:solidFill>
-                  <a:srgbClr val="B0B0B0"/>
-                </a:solidFill>
-                <a:latin typeface="Calibri"/>
-              </a:rPr>
-              <a:t>Linux ELF.</a:t>
-            </a:r>
-            <a:endParaRPr sz="1800" b="0" dirty="0">
-              <a:solidFill>
-                <a:srgbClr val="B0B0B0"/>
-              </a:solidFill>
-              <a:latin typeface="Calibri"/>
-            </a:endParaRPr>
           </a:p>
         </p:txBody>
       </p:sp>

--- a/Reverse Engineering 101.pptx
+++ b/Reverse Engineering 101.pptx
@@ -328,7 +328,7 @@
           <a:p>
             <a:fld id="{5BCAD085-E8A6-8845-BD4E-CB4CCA059FC4}" type="datetimeFigureOut">
               <a:rPr lang="en-US" smtClean="0"/>
-              <a:t>9/12/2026</a:t>
+              <a:t>9/13/2026</a:t>
             </a:fld>
             <a:endParaRPr lang="en-US"/>
           </a:p>
@@ -496,7 +496,7 @@
           <a:p>
             <a:fld id="{5BCAD085-E8A6-8845-BD4E-CB4CCA059FC4}" type="datetimeFigureOut">
               <a:rPr lang="en-US" smtClean="0"/>
-              <a:t>9/12/2026</a:t>
+              <a:t>9/13/2026</a:t>
             </a:fld>
             <a:endParaRPr lang="en-US"/>
           </a:p>
@@ -674,7 +674,7 @@
           <a:p>
             <a:fld id="{5BCAD085-E8A6-8845-BD4E-CB4CCA059FC4}" type="datetimeFigureOut">
               <a:rPr lang="en-US" smtClean="0"/>
-              <a:t>9/12/2026</a:t>
+              <a:t>9/13/2026</a:t>
             </a:fld>
             <a:endParaRPr lang="en-US"/>
           </a:p>
@@ -842,7 +842,7 @@
           <a:p>
             <a:fld id="{5BCAD085-E8A6-8845-BD4E-CB4CCA059FC4}" type="datetimeFigureOut">
               <a:rPr lang="en-US" smtClean="0"/>
-              <a:t>9/12/2026</a:t>
+              <a:t>9/13/2026</a:t>
             </a:fld>
             <a:endParaRPr lang="en-US"/>
           </a:p>
@@ -1087,7 +1087,7 @@
           <a:p>
             <a:fld id="{5BCAD085-E8A6-8845-BD4E-CB4CCA059FC4}" type="datetimeFigureOut">
               <a:rPr lang="en-US" smtClean="0"/>
-              <a:t>9/12/2026</a:t>
+              <a:t>9/13/2026</a:t>
             </a:fld>
             <a:endParaRPr lang="en-US"/>
           </a:p>
@@ -1372,7 +1372,7 @@
           <a:p>
             <a:fld id="{5BCAD085-E8A6-8845-BD4E-CB4CCA059FC4}" type="datetimeFigureOut">
               <a:rPr lang="en-US" smtClean="0"/>
-              <a:t>9/12/2026</a:t>
+              <a:t>9/13/2026</a:t>
             </a:fld>
             <a:endParaRPr lang="en-US"/>
           </a:p>
@@ -1791,7 +1791,7 @@
           <a:p>
             <a:fld id="{5BCAD085-E8A6-8845-BD4E-CB4CCA059FC4}" type="datetimeFigureOut">
               <a:rPr lang="en-US" smtClean="0"/>
-              <a:t>9/12/2026</a:t>
+              <a:t>9/13/2026</a:t>
             </a:fld>
             <a:endParaRPr lang="en-US"/>
           </a:p>
@@ -1908,7 +1908,7 @@
           <a:p>
             <a:fld id="{5BCAD085-E8A6-8845-BD4E-CB4CCA059FC4}" type="datetimeFigureOut">
               <a:rPr lang="en-US" smtClean="0"/>
-              <a:t>9/12/2026</a:t>
+              <a:t>9/13/2026</a:t>
             </a:fld>
             <a:endParaRPr lang="en-US"/>
           </a:p>
@@ -2003,7 +2003,7 @@
           <a:p>
             <a:fld id="{5BCAD085-E8A6-8845-BD4E-CB4CCA059FC4}" type="datetimeFigureOut">
               <a:rPr lang="en-US" smtClean="0"/>
-              <a:t>9/12/2026</a:t>
+              <a:t>9/13/2026</a:t>
             </a:fld>
             <a:endParaRPr lang="en-US"/>
           </a:p>
@@ -2278,7 +2278,7 @@
           <a:p>
             <a:fld id="{5BCAD085-E8A6-8845-BD4E-CB4CCA059FC4}" type="datetimeFigureOut">
               <a:rPr lang="en-US" smtClean="0"/>
-              <a:t>9/12/2026</a:t>
+              <a:t>9/13/2026</a:t>
             </a:fld>
             <a:endParaRPr lang="en-US"/>
           </a:p>
@@ -2530,7 +2530,7 @@
           <a:p>
             <a:fld id="{5BCAD085-E8A6-8845-BD4E-CB4CCA059FC4}" type="datetimeFigureOut">
               <a:rPr lang="en-US" smtClean="0"/>
-              <a:t>9/12/2026</a:t>
+              <a:t>9/13/2026</a:t>
             </a:fld>
             <a:endParaRPr lang="en-US"/>
           </a:p>
@@ -2741,7 +2741,7 @@
           <a:p>
             <a:fld id="{5BCAD085-E8A6-8845-BD4E-CB4CCA059FC4}" type="datetimeFigureOut">
               <a:rPr lang="en-US" smtClean="0"/>
-              <a:t>9/12/2026</a:t>
+              <a:t>9/13/2026</a:t>
             </a:fld>
             <a:endParaRPr lang="en-US"/>
           </a:p>
@@ -3517,7 +3517,7 @@
         <p:spPr>
           <a:xfrm>
             <a:off x="685800" y="1600200"/>
-            <a:ext cx="10789920" cy="4572000"/>
+            <a:ext cx="10789920" cy="3657411"/>
           </a:xfrm>
           <a:prstGeom prst="rect">
             <a:avLst/>
@@ -3535,14 +3535,39 @@
                 <a:spcPts val="1000"/>
               </a:spcAft>
             </a:pPr>
-            <a:r>
-              <a:rPr sz="2000" b="1">
+            <a:br>
+              <a:rPr lang="en-IN" sz="2000" b="1" dirty="0">
                 <a:solidFill>
                   <a:srgbClr val="7CDA6A"/>
                 </a:solidFill>
                 <a:latin typeface="Consolas"/>
               </a:rPr>
-              <a:t>sudo apt update</a:t>
+            </a:br>
+            <a:br>
+              <a:rPr lang="en-IN" sz="2000" b="1" dirty="0">
+                <a:solidFill>
+                  <a:srgbClr val="7CDA6A"/>
+                </a:solidFill>
+                <a:latin typeface="Consolas"/>
+              </a:rPr>
+            </a:br>
+            <a:r>
+              <a:rPr sz="2000" b="1" dirty="0" err="1">
+                <a:solidFill>
+                  <a:srgbClr val="7CDA6A"/>
+                </a:solidFill>
+                <a:latin typeface="Consolas"/>
+              </a:rPr>
+              <a:t>sudo</a:t>
+            </a:r>
+            <a:r>
+              <a:rPr sz="2000" b="1" dirty="0">
+                <a:solidFill>
+                  <a:srgbClr val="7CDA6A"/>
+                </a:solidFill>
+                <a:latin typeface="Consolas"/>
+              </a:rPr>
+              <a:t> apt update</a:t>
             </a:r>
           </a:p>
           <a:p>
@@ -3552,13 +3577,76 @@
               </a:spcAft>
             </a:pPr>
             <a:r>
-              <a:rPr sz="1800" b="1">
+              <a:rPr sz="1800" b="1" dirty="0" err="1">
                 <a:solidFill>
                   <a:srgbClr val="7CDA6A"/>
                 </a:solidFill>
                 <a:latin typeface="Consolas"/>
               </a:rPr>
-              <a:t>sudo apt install -y build-essential gcc-multilib gdb python3 hexedit bless</a:t>
+              <a:t>sudo</a:t>
+            </a:r>
+            <a:r>
+              <a:rPr sz="1800" b="1" dirty="0">
+                <a:solidFill>
+                  <a:srgbClr val="7CDA6A"/>
+                </a:solidFill>
+                <a:latin typeface="Consolas"/>
+              </a:rPr>
+              <a:t> apt install -y build-essential </a:t>
+            </a:r>
+            <a:r>
+              <a:rPr sz="1800" b="1" dirty="0" err="1">
+                <a:solidFill>
+                  <a:srgbClr val="7CDA6A"/>
+                </a:solidFill>
+                <a:latin typeface="Consolas"/>
+              </a:rPr>
+              <a:t>gcc-multilib</a:t>
+            </a:r>
+            <a:r>
+              <a:rPr sz="1800" b="1" dirty="0">
+                <a:solidFill>
+                  <a:srgbClr val="7CDA6A"/>
+                </a:solidFill>
+                <a:latin typeface="Consolas"/>
+              </a:rPr>
+              <a:t> </a:t>
+            </a:r>
+            <a:r>
+              <a:rPr sz="1800" b="1" dirty="0" err="1">
+                <a:solidFill>
+                  <a:srgbClr val="7CDA6A"/>
+                </a:solidFill>
+                <a:latin typeface="Consolas"/>
+              </a:rPr>
+              <a:t>gdb</a:t>
+            </a:r>
+            <a:r>
+              <a:rPr sz="1800" b="1" dirty="0">
+                <a:solidFill>
+                  <a:srgbClr val="7CDA6A"/>
+                </a:solidFill>
+                <a:latin typeface="Consolas"/>
+              </a:rPr>
+              <a:t> python3 </a:t>
+            </a:r>
+            <a:r>
+              <a:rPr sz="1800" b="1" dirty="0" err="1">
+                <a:solidFill>
+                  <a:srgbClr val="7CDA6A"/>
+                </a:solidFill>
+                <a:latin typeface="Consolas"/>
+              </a:rPr>
+              <a:t>hexedit</a:t>
+            </a:r>
+            <a:r>
+              <a:rPr sz="1800" b="1" dirty="0">
+                <a:solidFill>
+                  <a:srgbClr val="7CDA6A"/>
+                </a:solidFill>
+                <a:latin typeface="Consolas"/>
+              </a:rPr>
+              <a:t> bless</a:t>
             </a:r>
           </a:p>
           <a:p>
@@ -3568,13 +3656,31 @@
               </a:spcAft>
             </a:pPr>
             <a:r>
-              <a:rPr sz="2000" b="1">
+              <a:rPr sz="2000" b="1" dirty="0">
                 <a:solidFill>
                   <a:srgbClr val="7CDA6A"/>
                 </a:solidFill>
                 <a:latin typeface="Consolas"/>
               </a:rPr>
-              <a:t>bash -c "$(curl -fsSL https://gef.blah.cat/sh)"</a:t>
+              <a:t>bash -c "$(curl -</a:t>
+            </a:r>
+            <a:r>
+              <a:rPr sz="2000" b="1" dirty="0" err="1">
+                <a:solidFill>
+                  <a:srgbClr val="7CDA6A"/>
+                </a:solidFill>
+                <a:latin typeface="Consolas"/>
+              </a:rPr>
+              <a:t>fsSL</a:t>
+            </a:r>
+            <a:r>
+              <a:rPr sz="2000" b="1" dirty="0">
+                <a:solidFill>
+                  <a:srgbClr val="7CDA6A"/>
+                </a:solidFill>
+                <a:latin typeface="Consolas"/>
+              </a:rPr>
+              <a:t> https://gef.blah.cat/sh)"</a:t>
             </a:r>
           </a:p>
           <a:p>
@@ -3583,7 +3689,7 @@
                 <a:spcPts val="1000"/>
               </a:spcAft>
             </a:pPr>
-            <a:endParaRPr sz="2000" b="1">
+            <a:endParaRPr sz="2000" b="1" dirty="0">
               <a:solidFill>
                 <a:srgbClr val="7CDA6A"/>
               </a:solidFill>
@@ -3597,14 +3703,29 @@
               </a:spcAft>
             </a:pPr>
             <a:r>
-              <a:rPr sz="1800" b="0">
+              <a:rPr sz="1800" b="0" dirty="0">
                 <a:solidFill>
                   <a:srgbClr val="B0B0B0"/>
                 </a:solidFill>
                 <a:latin typeface="Calibri"/>
               </a:rPr>
-              <a:t>Then open a new terminal and run:   gdb</a:t>
-            </a:r>
+              <a:t>Then open a new terminal and run:   </a:t>
+            </a:r>
+            <a:r>
+              <a:rPr sz="1800" b="0" dirty="0" err="1">
+                <a:solidFill>
+                  <a:srgbClr val="B0B0B0"/>
+                </a:solidFill>
+                <a:latin typeface="Calibri"/>
+              </a:rPr>
+              <a:t>gdb</a:t>
+            </a:r>
+            <a:endParaRPr sz="1800" b="0" dirty="0">
+              <a:solidFill>
+                <a:srgbClr val="B0B0B0"/>
+              </a:solidFill>
+              <a:latin typeface="Calibri"/>
+            </a:endParaRPr>
           </a:p>
           <a:p>
             <a:pPr>
@@ -3613,7 +3734,7 @@
               </a:spcAft>
             </a:pPr>
             <a:r>
-              <a:rPr sz="1800" b="0">
+              <a:rPr sz="1800" b="0" dirty="0">
                 <a:solidFill>
                   <a:srgbClr val="B0B0B0"/>
                 </a:solidFill>
@@ -3621,6 +3742,34 @@
               </a:rPr>
               <a:t>You should see a GEF banner. Same commands as vanilla GDB.</a:t>
             </a:r>
+            <a:br>
+              <a:rPr lang="en-IN">
+                <a:solidFill>
+                  <a:srgbClr val="B0B0B0"/>
+                </a:solidFill>
+              </a:rPr>
+            </a:br>
+            <a:br>
+              <a:rPr lang="en-IN">
+                <a:solidFill>
+                  <a:srgbClr val="B0B0B0"/>
+                </a:solidFill>
+              </a:rPr>
+            </a:br>
+            <a:r>
+              <a:rPr lang="en-IN">
+                <a:solidFill>
+                  <a:srgbClr val="B0B0B0"/>
+                </a:solidFill>
+              </a:rPr>
+              <a:t>Please go here : https://github.com/DERE-ad2001/reverse-engineering-101/tree/main</a:t>
+            </a:r>
+            <a:endParaRPr sz="1800" b="0" dirty="0">
+              <a:solidFill>
+                <a:srgbClr val="B0B0B0"/>
+              </a:solidFill>
+              <a:latin typeface="Calibri"/>
+            </a:endParaRPr>
           </a:p>
         </p:txBody>
       </p:sp>
@@ -9839,7 +9988,6 @@
           <a:lstStyle/>
           <a:p>
             <a:pPr algn="ctr"/>
-            <a:endParaRPr/>
           </a:p>
         </p:txBody>
       </p:sp>
@@ -9921,8 +10069,8 @@
         </p:nvSpPr>
         <p:spPr>
           <a:xfrm>
-            <a:off x="457200" y="1188720"/>
-            <a:ext cx="5943600" cy="3200400"/>
+            <a:off x="457200" y="1234440"/>
+            <a:ext cx="5943600" cy="5029200"/>
           </a:xfrm>
           <a:prstGeom prst="rect">
             <a:avLst/>
@@ -9954,7 +10102,6 @@
           <a:lstStyle/>
           <a:p>
             <a:pPr algn="ctr"/>
-            <a:endParaRPr/>
           </a:p>
         </p:txBody>
       </p:sp>
@@ -9966,7 +10113,7 @@
         </p:nvSpPr>
         <p:spPr>
           <a:xfrm>
-            <a:off x="594360" y="1280160"/>
+            <a:off x="594360" y="1353312"/>
             <a:ext cx="5577840" cy="256032"/>
           </a:xfrm>
           <a:prstGeom prst="rect">
@@ -9982,26 +10129,61 @@
           <a:p>
             <a:pPr algn="l"/>
             <a:r>
+              <a:rPr sz="1300" b="1">
+                <a:solidFill>
+                  <a:srgbClr val="E8A23A"/>
+                </a:solidFill>
+                <a:latin typeface="Calibri"/>
+              </a:rPr>
+              <a:t>example  (01_mov)</a:t>
+            </a:r>
+          </a:p>
+        </p:txBody>
+      </p:sp>
+      <p:sp>
+        <p:nvSpPr>
+          <p:cNvPr id="7" name="TextBox 6"/>
+          <p:cNvSpPr txBox="1"/>
+          <p:nvPr/>
+        </p:nvSpPr>
+        <p:spPr>
+          <a:xfrm>
+            <a:off x="594360" y="1664208"/>
+            <a:ext cx="2743200" cy="228600"/>
+          </a:xfrm>
+          <a:prstGeom prst="rect">
+            <a:avLst/>
+          </a:prstGeom>
+          <a:noFill/>
+        </p:spPr>
+        <p:txBody>
+          <a:bodyPr wrap="square">
+            <a:spAutoFit/>
+          </a:bodyPr>
+          <a:lstStyle/>
+          <a:p>
+            <a:pPr algn="l"/>
+            <a:r>
               <a:rPr sz="1200" b="1">
                 <a:solidFill>
-                  <a:srgbClr val="E8A23A"/>
-                </a:solidFill>
-                <a:latin typeface="Calibri"/>
-              </a:rPr>
-              <a:t>example  (01_mov)</a:t>
-            </a:r>
-          </a:p>
-        </p:txBody>
-      </p:sp>
-      <p:sp>
-        <p:nvSpPr>
-          <p:cNvPr id="7" name="TextBox 6"/>
-          <p:cNvSpPr txBox="1"/>
-          <p:nvPr/>
-        </p:nvSpPr>
-        <p:spPr>
-          <a:xfrm>
-            <a:off x="594360" y="1554480"/>
+                  <a:srgbClr val="B0B0B0"/>
+                </a:solidFill>
+                <a:latin typeface="Calibri"/>
+              </a:rPr>
+              <a:t>asm</a:t>
+            </a:r>
+          </a:p>
+        </p:txBody>
+      </p:sp>
+      <p:sp>
+        <p:nvSpPr>
+          <p:cNvPr id="8" name="TextBox 7"/>
+          <p:cNvSpPr txBox="1"/>
+          <p:nvPr/>
+        </p:nvSpPr>
+        <p:spPr>
+          <a:xfrm>
+            <a:off x="3383280" y="1664208"/>
             <a:ext cx="2743200" cy="228600"/>
           </a:xfrm>
           <a:prstGeom prst="rect">
@@ -10017,47 +10199,12 @@
           <a:p>
             <a:pPr algn="l"/>
             <a:r>
-              <a:rPr sz="1100" b="1">
+              <a:rPr sz="1200" b="1">
                 <a:solidFill>
                   <a:srgbClr val="B0B0B0"/>
                 </a:solidFill>
                 <a:latin typeface="Calibri"/>
               </a:rPr>
-              <a:t>asm</a:t>
-            </a:r>
-          </a:p>
-        </p:txBody>
-      </p:sp>
-      <p:sp>
-        <p:nvSpPr>
-          <p:cNvPr id="8" name="TextBox 7"/>
-          <p:cNvSpPr txBox="1"/>
-          <p:nvPr/>
-        </p:nvSpPr>
-        <p:spPr>
-          <a:xfrm>
-            <a:off x="3383280" y="1554480"/>
-            <a:ext cx="2743200" cy="228600"/>
-          </a:xfrm>
-          <a:prstGeom prst="rect">
-            <a:avLst/>
-          </a:prstGeom>
-          <a:noFill/>
-        </p:spPr>
-        <p:txBody>
-          <a:bodyPr wrap="square">
-            <a:spAutoFit/>
-          </a:bodyPr>
-          <a:lstStyle/>
-          <a:p>
-            <a:pPr algn="l"/>
-            <a:r>
-              <a:rPr sz="1100" b="1">
-                <a:solidFill>
-                  <a:srgbClr val="B0B0B0"/>
-                </a:solidFill>
-                <a:latin typeface="Calibri"/>
-              </a:rPr>
               <a:t>closest C</a:t>
             </a:r>
           </a:p>
@@ -10071,23 +10218,23 @@
         </p:nvSpPr>
         <p:spPr>
           <a:xfrm>
-            <a:off x="594360" y="1874519"/>
-            <a:ext cx="2743200" cy="411480"/>
-          </a:xfrm>
-          <a:prstGeom prst="rect">
-            <a:avLst/>
-          </a:prstGeom>
-          <a:noFill/>
-        </p:spPr>
-        <p:txBody>
-          <a:bodyPr wrap="square">
-            <a:spAutoFit/>
-          </a:bodyPr>
-          <a:lstStyle/>
-          <a:p>
-            <a:pPr algn="l"/>
-            <a:r>
-              <a:rPr sz="1500" b="1">
+            <a:off x="594360" y="2011680"/>
+            <a:ext cx="2743200" cy="457200"/>
+          </a:xfrm>
+          <a:prstGeom prst="rect">
+            <a:avLst/>
+          </a:prstGeom>
+          <a:noFill/>
+        </p:spPr>
+        <p:txBody>
+          <a:bodyPr wrap="square">
+            <a:spAutoFit/>
+          </a:bodyPr>
+          <a:lstStyle/>
+          <a:p>
+            <a:pPr algn="l"/>
+            <a:r>
+              <a:rPr sz="1600" b="1">
                 <a:solidFill>
                   <a:srgbClr val="7CDA6A"/>
                 </a:solidFill>
@@ -10106,23 +10253,23 @@
         </p:nvSpPr>
         <p:spPr>
           <a:xfrm>
-            <a:off x="3383280" y="1874519"/>
-            <a:ext cx="2834640" cy="411480"/>
-          </a:xfrm>
-          <a:prstGeom prst="rect">
-            <a:avLst/>
-          </a:prstGeom>
-          <a:noFill/>
-        </p:spPr>
-        <p:txBody>
-          <a:bodyPr wrap="square">
-            <a:spAutoFit/>
-          </a:bodyPr>
-          <a:lstStyle/>
-          <a:p>
-            <a:pPr algn="l"/>
-            <a:r>
-              <a:rPr sz="1400" b="0">
+            <a:off x="3383280" y="2011680"/>
+            <a:ext cx="2834640" cy="457200"/>
+          </a:xfrm>
+          <a:prstGeom prst="rect">
+            <a:avLst/>
+          </a:prstGeom>
+          <a:noFill/>
+        </p:spPr>
+        <p:txBody>
+          <a:bodyPr wrap="square">
+            <a:spAutoFit/>
+          </a:bodyPr>
+          <a:lstStyle/>
+          <a:p>
+            <a:pPr algn="l"/>
+            <a:r>
+              <a:rPr sz="1500" b="0">
                 <a:solidFill>
                   <a:srgbClr val="F2F2F2"/>
                 </a:solidFill>
@@ -10141,28 +10288,98 @@
         </p:nvSpPr>
         <p:spPr>
           <a:xfrm>
-            <a:off x="594360" y="2441448"/>
-            <a:ext cx="2743200" cy="411480"/>
-          </a:xfrm>
-          <a:prstGeom prst="rect">
-            <a:avLst/>
-          </a:prstGeom>
-          <a:noFill/>
-        </p:spPr>
-        <p:txBody>
-          <a:bodyPr wrap="square">
-            <a:spAutoFit/>
-          </a:bodyPr>
-          <a:lstStyle/>
-          <a:p>
-            <a:pPr algn="l"/>
-            <a:r>
-              <a:rPr sz="1500" b="1">
+            <a:off x="594360" y="2633472"/>
+            <a:ext cx="2743200" cy="457200"/>
+          </a:xfrm>
+          <a:prstGeom prst="rect">
+            <a:avLst/>
+          </a:prstGeom>
+          <a:noFill/>
+        </p:spPr>
+        <p:txBody>
+          <a:bodyPr wrap="square">
+            <a:spAutoFit/>
+          </a:bodyPr>
+          <a:lstStyle/>
+          <a:p>
+            <a:pPr algn="l"/>
+            <a:r>
+              <a:rPr sz="1600" b="1">
                 <a:solidFill>
                   <a:srgbClr val="7CDA6A"/>
                 </a:solidFill>
                 <a:latin typeface="Consolas"/>
               </a:rPr>
+              <a:t>mov ebx, 0x41</a:t>
+            </a:r>
+          </a:p>
+        </p:txBody>
+      </p:sp>
+      <p:sp>
+        <p:nvSpPr>
+          <p:cNvPr id="12" name="TextBox 11"/>
+          <p:cNvSpPr txBox="1"/>
+          <p:nvPr/>
+        </p:nvSpPr>
+        <p:spPr>
+          <a:xfrm>
+            <a:off x="3383280" y="2633472"/>
+            <a:ext cx="2834640" cy="457200"/>
+          </a:xfrm>
+          <a:prstGeom prst="rect">
+            <a:avLst/>
+          </a:prstGeom>
+          <a:noFill/>
+        </p:spPr>
+        <p:txBody>
+          <a:bodyPr wrap="square">
+            <a:spAutoFit/>
+          </a:bodyPr>
+          <a:lstStyle/>
+          <a:p>
+            <a:pPr algn="l"/>
+            <a:r>
+              <a:rPr sz="1500" b="0">
+                <a:solidFill>
+                  <a:srgbClr val="F2F2F2"/>
+                </a:solidFill>
+                <a:latin typeface="Consolas"/>
+              </a:rPr>
+              <a:t>ebx = 0x41;</a:t>
+            </a:r>
+          </a:p>
+        </p:txBody>
+      </p:sp>
+      <p:sp>
+        <p:nvSpPr>
+          <p:cNvPr id="13" name="TextBox 12"/>
+          <p:cNvSpPr txBox="1"/>
+          <p:nvPr/>
+        </p:nvSpPr>
+        <p:spPr>
+          <a:xfrm>
+            <a:off x="594360" y="3255264"/>
+            <a:ext cx="2743200" cy="457200"/>
+          </a:xfrm>
+          <a:prstGeom prst="rect">
+            <a:avLst/>
+          </a:prstGeom>
+          <a:noFill/>
+        </p:spPr>
+        <p:txBody>
+          <a:bodyPr wrap="square">
+            <a:spAutoFit/>
+          </a:bodyPr>
+          <a:lstStyle/>
+          <a:p>
+            <a:pPr algn="l"/>
+            <a:r>
+              <a:rPr sz="1600" b="1">
+                <a:solidFill>
+                  <a:srgbClr val="7CDA6A"/>
+                </a:solidFill>
+                <a:latin typeface="Consolas"/>
+              </a:rPr>
               <a:t>mov eax, ebx</a:t>
             </a:r>
           </a:p>
@@ -10170,29 +10387,29 @@
       </p:sp>
       <p:sp>
         <p:nvSpPr>
-          <p:cNvPr id="12" name="TextBox 11"/>
-          <p:cNvSpPr txBox="1"/>
-          <p:nvPr/>
-        </p:nvSpPr>
-        <p:spPr>
-          <a:xfrm>
-            <a:off x="3383280" y="2441448"/>
-            <a:ext cx="2834640" cy="411480"/>
-          </a:xfrm>
-          <a:prstGeom prst="rect">
-            <a:avLst/>
-          </a:prstGeom>
-          <a:noFill/>
-        </p:spPr>
-        <p:txBody>
-          <a:bodyPr wrap="square">
-            <a:spAutoFit/>
-          </a:bodyPr>
-          <a:lstStyle/>
-          <a:p>
-            <a:pPr algn="l"/>
-            <a:r>
-              <a:rPr sz="1400" b="0">
+          <p:cNvPr id="14" name="TextBox 13"/>
+          <p:cNvSpPr txBox="1"/>
+          <p:nvPr/>
+        </p:nvSpPr>
+        <p:spPr>
+          <a:xfrm>
+            <a:off x="3383280" y="3255264"/>
+            <a:ext cx="2834640" cy="457200"/>
+          </a:xfrm>
+          <a:prstGeom prst="rect">
+            <a:avLst/>
+          </a:prstGeom>
+          <a:noFill/>
+        </p:spPr>
+        <p:txBody>
+          <a:bodyPr wrap="square">
+            <a:spAutoFit/>
+          </a:bodyPr>
+          <a:lstStyle/>
+          <a:p>
+            <a:pPr algn="l"/>
+            <a:r>
+              <a:rPr sz="1500" b="0">
                 <a:solidFill>
                   <a:srgbClr val="F2F2F2"/>
                 </a:solidFill>
@@ -10205,154 +10422,154 @@
       </p:sp>
       <p:sp>
         <p:nvSpPr>
-          <p:cNvPr id="13" name="TextBox 12"/>
-          <p:cNvSpPr txBox="1"/>
-          <p:nvPr/>
-        </p:nvSpPr>
-        <p:spPr>
-          <a:xfrm>
-            <a:off x="594360" y="3008376"/>
-            <a:ext cx="2743200" cy="411480"/>
-          </a:xfrm>
-          <a:prstGeom prst="rect">
-            <a:avLst/>
-          </a:prstGeom>
-          <a:noFill/>
-        </p:spPr>
-        <p:txBody>
-          <a:bodyPr wrap="square">
-            <a:spAutoFit/>
-          </a:bodyPr>
-          <a:lstStyle/>
-          <a:p>
-            <a:pPr algn="l"/>
-            <a:r>
-              <a:rPr sz="1500" b="1">
+          <p:cNvPr id="15" name="TextBox 14"/>
+          <p:cNvSpPr txBox="1"/>
+          <p:nvPr/>
+        </p:nvSpPr>
+        <p:spPr>
+          <a:xfrm>
+            <a:off x="594360" y="3877056"/>
+            <a:ext cx="2743200" cy="457200"/>
+          </a:xfrm>
+          <a:prstGeom prst="rect">
+            <a:avLst/>
+          </a:prstGeom>
+          <a:noFill/>
+        </p:spPr>
+        <p:txBody>
+          <a:bodyPr wrap="square">
+            <a:spAutoFit/>
+          </a:bodyPr>
+          <a:lstStyle/>
+          <a:p>
+            <a:pPr algn="l"/>
+            <a:r>
+              <a:rPr sz="1600" b="1">
                 <a:solidFill>
                   <a:srgbClr val="7CDA6A"/>
                 </a:solidFill>
                 <a:latin typeface="Consolas"/>
               </a:rPr>
-              <a:t>mov eax, [ebx]</a:t>
-            </a:r>
-          </a:p>
-        </p:txBody>
-      </p:sp>
-      <p:sp>
-        <p:nvSpPr>
-          <p:cNvPr id="14" name="TextBox 13"/>
-          <p:cNvSpPr txBox="1"/>
-          <p:nvPr/>
-        </p:nvSpPr>
-        <p:spPr>
-          <a:xfrm>
-            <a:off x="3383280" y="3008376"/>
-            <a:ext cx="2834640" cy="411480"/>
-          </a:xfrm>
-          <a:prstGeom prst="rect">
-            <a:avLst/>
-          </a:prstGeom>
-          <a:noFill/>
-        </p:spPr>
-        <p:txBody>
-          <a:bodyPr wrap="square">
-            <a:spAutoFit/>
-          </a:bodyPr>
-          <a:lstStyle/>
-          <a:p>
-            <a:pPr algn="l"/>
-            <a:r>
-              <a:rPr sz="1400" b="0">
+              <a:t>mov [ebp-4], eax</a:t>
+            </a:r>
+          </a:p>
+        </p:txBody>
+      </p:sp>
+      <p:sp>
+        <p:nvSpPr>
+          <p:cNvPr id="16" name="TextBox 15"/>
+          <p:cNvSpPr txBox="1"/>
+          <p:nvPr/>
+        </p:nvSpPr>
+        <p:spPr>
+          <a:xfrm>
+            <a:off x="3383280" y="3877056"/>
+            <a:ext cx="2834640" cy="457200"/>
+          </a:xfrm>
+          <a:prstGeom prst="rect">
+            <a:avLst/>
+          </a:prstGeom>
+          <a:noFill/>
+        </p:spPr>
+        <p:txBody>
+          <a:bodyPr wrap="square">
+            <a:spAutoFit/>
+          </a:bodyPr>
+          <a:lstStyle/>
+          <a:p>
+            <a:pPr algn="l"/>
+            <a:r>
+              <a:rPr sz="1500" b="0">
                 <a:solidFill>
                   <a:srgbClr val="F2F2F2"/>
                 </a:solidFill>
                 <a:latin typeface="Consolas"/>
               </a:rPr>
-              <a:t>eax = *ebx;</a:t>
-            </a:r>
-          </a:p>
-        </p:txBody>
-      </p:sp>
-      <p:sp>
-        <p:nvSpPr>
-          <p:cNvPr id="15" name="TextBox 14"/>
-          <p:cNvSpPr txBox="1"/>
-          <p:nvPr/>
-        </p:nvSpPr>
-        <p:spPr>
-          <a:xfrm>
-            <a:off x="594360" y="3575303"/>
-            <a:ext cx="2743200" cy="411480"/>
-          </a:xfrm>
-          <a:prstGeom prst="rect">
-            <a:avLst/>
-          </a:prstGeom>
-          <a:noFill/>
-        </p:spPr>
-        <p:txBody>
-          <a:bodyPr wrap="square">
-            <a:spAutoFit/>
-          </a:bodyPr>
-          <a:lstStyle/>
-          <a:p>
-            <a:pPr algn="l"/>
-            <a:r>
-              <a:rPr sz="1500" b="1">
+              <a:t>local = eax;</a:t>
+            </a:r>
+          </a:p>
+        </p:txBody>
+      </p:sp>
+      <p:sp>
+        <p:nvSpPr>
+          <p:cNvPr id="17" name="TextBox 16"/>
+          <p:cNvSpPr txBox="1"/>
+          <p:nvPr/>
+        </p:nvSpPr>
+        <p:spPr>
+          <a:xfrm>
+            <a:off x="594360" y="4498848"/>
+            <a:ext cx="2743200" cy="457200"/>
+          </a:xfrm>
+          <a:prstGeom prst="rect">
+            <a:avLst/>
+          </a:prstGeom>
+          <a:noFill/>
+        </p:spPr>
+        <p:txBody>
+          <a:bodyPr wrap="square">
+            <a:spAutoFit/>
+          </a:bodyPr>
+          <a:lstStyle/>
+          <a:p>
+            <a:pPr algn="l"/>
+            <a:r>
+              <a:rPr sz="1600" b="1">
                 <a:solidFill>
                   <a:srgbClr val="7CDA6A"/>
                 </a:solidFill>
                 <a:latin typeface="Consolas"/>
               </a:rPr>
-              <a:t>mov [ebx], eax</a:t>
-            </a:r>
-          </a:p>
-        </p:txBody>
-      </p:sp>
-      <p:sp>
-        <p:nvSpPr>
-          <p:cNvPr id="16" name="TextBox 15"/>
-          <p:cNvSpPr txBox="1"/>
-          <p:nvPr/>
-        </p:nvSpPr>
-        <p:spPr>
-          <a:xfrm>
-            <a:off x="3383280" y="3575303"/>
-            <a:ext cx="2834640" cy="411480"/>
-          </a:xfrm>
-          <a:prstGeom prst="rect">
-            <a:avLst/>
-          </a:prstGeom>
-          <a:noFill/>
-        </p:spPr>
-        <p:txBody>
-          <a:bodyPr wrap="square">
-            <a:spAutoFit/>
-          </a:bodyPr>
-          <a:lstStyle/>
-          <a:p>
-            <a:pPr algn="l"/>
-            <a:r>
-              <a:rPr sz="1400" b="0">
+              <a:t>mov ecx, [ebp-4]</a:t>
+            </a:r>
+          </a:p>
+        </p:txBody>
+      </p:sp>
+      <p:sp>
+        <p:nvSpPr>
+          <p:cNvPr id="18" name="TextBox 17"/>
+          <p:cNvSpPr txBox="1"/>
+          <p:nvPr/>
+        </p:nvSpPr>
+        <p:spPr>
+          <a:xfrm>
+            <a:off x="3383280" y="4498848"/>
+            <a:ext cx="2834640" cy="457200"/>
+          </a:xfrm>
+          <a:prstGeom prst="rect">
+            <a:avLst/>
+          </a:prstGeom>
+          <a:noFill/>
+        </p:spPr>
+        <p:txBody>
+          <a:bodyPr wrap="square">
+            <a:spAutoFit/>
+          </a:bodyPr>
+          <a:lstStyle/>
+          <a:p>
+            <a:pPr algn="l"/>
+            <a:r>
+              <a:rPr sz="1500" b="0">
                 <a:solidFill>
                   <a:srgbClr val="F2F2F2"/>
                 </a:solidFill>
                 <a:latin typeface="Consolas"/>
               </a:rPr>
-              <a:t>*ebx = eax;</a:t>
-            </a:r>
-          </a:p>
-        </p:txBody>
-      </p:sp>
-      <p:sp>
-        <p:nvSpPr>
-          <p:cNvPr id="17" name="Rectangle 16"/>
+              <a:t>ecx = local;</a:t>
+            </a:r>
+          </a:p>
+        </p:txBody>
+      </p:sp>
+      <p:sp>
+        <p:nvSpPr>
+          <p:cNvPr id="19" name="Rectangle 18"/>
           <p:cNvSpPr/>
           <p:nvPr/>
         </p:nvSpPr>
         <p:spPr>
           <a:xfrm>
-            <a:off x="6583680" y="1188720"/>
-            <a:ext cx="5166360" cy="3200400"/>
+            <a:off x="6583680" y="1234440"/>
+            <a:ext cx="5166360" cy="5029200"/>
           </a:xfrm>
           <a:prstGeom prst="rect">
             <a:avLst/>
@@ -10384,19 +10601,18 @@
           <a:lstStyle/>
           <a:p>
             <a:pPr algn="ctr"/>
-            <a:endParaRPr/>
-          </a:p>
-        </p:txBody>
-      </p:sp>
-      <p:sp>
-        <p:nvSpPr>
-          <p:cNvPr id="18" name="TextBox 17"/>
-          <p:cNvSpPr txBox="1"/>
-          <p:nvPr/>
-        </p:nvSpPr>
-        <p:spPr>
-          <a:xfrm>
-            <a:off x="6766560" y="1280160"/>
+          </a:p>
+        </p:txBody>
+      </p:sp>
+      <p:sp>
+        <p:nvSpPr>
+          <p:cNvPr id="20" name="TextBox 19"/>
+          <p:cNvSpPr txBox="1"/>
+          <p:nvPr/>
+        </p:nvSpPr>
+        <p:spPr>
+          <a:xfrm>
+            <a:off x="6766560" y="1353312"/>
             <a:ext cx="4800600" cy="256032"/>
           </a:xfrm>
           <a:prstGeom prst="rect">
@@ -10412,7 +10628,7 @@
           <a:p>
             <a:pPr algn="l"/>
             <a:r>
-              <a:rPr sz="1200" b="1">
+              <a:rPr sz="1300" b="1">
                 <a:solidFill>
                   <a:srgbClr val="E8A23A"/>
                 </a:solidFill>
@@ -10425,166 +10641,46 @@
       </p:sp>
       <p:sp>
         <p:nvSpPr>
-          <p:cNvPr id="19" name="TextBox 18"/>
-          <p:cNvSpPr txBox="1"/>
-          <p:nvPr/>
-        </p:nvSpPr>
-        <p:spPr>
-          <a:xfrm>
-            <a:off x="6766560" y="1645920"/>
-            <a:ext cx="4800600" cy="2468880"/>
-          </a:xfrm>
-          <a:prstGeom prst="rect">
-            <a:avLst/>
-          </a:prstGeom>
-          <a:noFill/>
-        </p:spPr>
-        <p:txBody>
-          <a:bodyPr wrap="square">
-            <a:spAutoFit/>
-          </a:bodyPr>
-          <a:lstStyle/>
-          <a:p>
-            <a:pPr algn="l"/>
-            <a:r>
-              <a:rPr sz="1500" b="0">
+          <p:cNvPr id="21" name="TextBox 20"/>
+          <p:cNvSpPr txBox="1"/>
+          <p:nvPr/>
+        </p:nvSpPr>
+        <p:spPr>
+          <a:xfrm>
+            <a:off x="6766560" y="1783080"/>
+            <a:ext cx="4800600" cy="4206240"/>
+          </a:xfrm>
+          <a:prstGeom prst="rect">
+            <a:avLst/>
+          </a:prstGeom>
+          <a:noFill/>
+        </p:spPr>
+        <p:txBody>
+          <a:bodyPr wrap="square">
+            <a:spAutoFit/>
+          </a:bodyPr>
+          <a:lstStyle/>
+          <a:p>
+            <a:pPr algn="l"/>
+            <a:r>
+              <a:rPr sz="1600" b="0">
                 <a:solidFill>
                   <a:srgbClr val="F2F2F2"/>
                 </a:solidFill>
                 <a:latin typeface="Calibri"/>
               </a:rPr>
-              <a:t>Different numbers than the example.
-At label check:
+              <a:t>Same pattern, different numbers.
+Stores a value to a local, then loads it.
+break check
   eax = ?
-  ecx = ?
-Use gdb. Do not guess from this slide.</a:t>
-            </a:r>
-          </a:p>
-        </p:txBody>
-      </p:sp>
-      <p:sp>
-        <p:nvSpPr>
-          <p:cNvPr id="20" name="Rectangle 19"/>
-          <p:cNvSpPr/>
-          <p:nvPr/>
-        </p:nvSpPr>
-        <p:spPr>
-          <a:xfrm>
-            <a:off x="457200" y="4572000"/>
-            <a:ext cx="11292840" cy="1691640"/>
-          </a:xfrm>
-          <a:prstGeom prst="rect">
-            <a:avLst/>
-          </a:prstGeom>
-          <a:solidFill>
-            <a:srgbClr val="242424"/>
-          </a:solidFill>
-          <a:ln>
-            <a:noFill/>
-          </a:ln>
-          <a:effectLst/>
-        </p:spPr>
-        <p:style>
-          <a:lnRef idx="1">
-            <a:schemeClr val="accent1"/>
-          </a:lnRef>
-          <a:fillRef idx="3">
-            <a:schemeClr val="accent1"/>
-          </a:fillRef>
-          <a:effectRef idx="2">
-            <a:schemeClr val="accent1"/>
-          </a:effectRef>
-          <a:fontRef idx="minor">
-            <a:schemeClr val="lt1"/>
-          </a:fontRef>
-        </p:style>
-        <p:txBody>
-          <a:bodyPr rtlCol="0" anchor="ctr"/>
-          <a:lstStyle/>
-          <a:p>
-            <a:pPr algn="ctr"/>
-            <a:endParaRPr/>
-          </a:p>
-        </p:txBody>
-      </p:sp>
-      <p:sp>
-        <p:nvSpPr>
-          <p:cNvPr id="21" name="TextBox 20"/>
-          <p:cNvSpPr txBox="1"/>
-          <p:nvPr/>
-        </p:nvSpPr>
-        <p:spPr>
-          <a:xfrm>
-            <a:off x="640080" y="4663440"/>
-            <a:ext cx="10972800" cy="256032"/>
-          </a:xfrm>
-          <a:prstGeom prst="rect">
-            <a:avLst/>
-          </a:prstGeom>
-          <a:noFill/>
-        </p:spPr>
-        <p:txBody>
-          <a:bodyPr wrap="square">
-            <a:spAutoFit/>
-          </a:bodyPr>
-          <a:lstStyle/>
-          <a:p>
-            <a:pPr algn="l"/>
-            <a:r>
-              <a:rPr sz="1300" b="1">
-                <a:solidFill>
-                  <a:srgbClr val="E8A23A"/>
-                </a:solidFill>
-                <a:latin typeface="Calibri"/>
-              </a:rPr>
-              <a:t>gdb on the challenge binary (not the example)</a:t>
-            </a:r>
-          </a:p>
-        </p:txBody>
-      </p:sp>
-      <p:sp>
-        <p:nvSpPr>
-          <p:cNvPr id="22" name="TextBox 21"/>
-          <p:cNvSpPr txBox="1"/>
-          <p:nvPr/>
-        </p:nvSpPr>
-        <p:spPr>
-          <a:xfrm>
-            <a:off x="640080" y="4983480"/>
-            <a:ext cx="10972800" cy="1143000"/>
-          </a:xfrm>
-          <a:prstGeom prst="rect">
-            <a:avLst/>
-          </a:prstGeom>
-          <a:noFill/>
-        </p:spPr>
-        <p:txBody>
-          <a:bodyPr wrap="square">
-            <a:spAutoFit/>
-          </a:bodyPr>
-          <a:lstStyle/>
-          <a:p>
-            <a:pPr algn="l"/>
-            <a:r>
-              <a:rPr sz="1500" b="1">
-                <a:solidFill>
-                  <a:srgbClr val="7CDA6A"/>
-                </a:solidFill>
-                <a:latin typeface="Consolas"/>
-              </a:rPr>
-              <a:t>make challenges
-gdb ./ch_mov
-break check
-run
-print /x $eax
-print /x $ecx</a:t>
-            </a:r>
-          </a:p>
-        </p:txBody>
-      </p:sp>
-      <p:sp>
-        <p:nvSpPr>
-          <p:cNvPr id="23" name="Rectangle 22"/>
+  ecx = ?</a:t>
+            </a:r>
+          </a:p>
+        </p:txBody>
+      </p:sp>
+      <p:sp>
+        <p:nvSpPr>
+          <p:cNvPr id="22" name="Rectangle 21"/>
           <p:cNvSpPr/>
           <p:nvPr/>
         </p:nvSpPr>
@@ -10623,13 +10719,12 @@
           <a:lstStyle/>
           <a:p>
             <a:pPr algn="ctr"/>
-            <a:endParaRPr/>
-          </a:p>
-        </p:txBody>
-      </p:sp>
-      <p:sp>
-        <p:nvSpPr>
-          <p:cNvPr id="24" name="TextBox 23"/>
+          </a:p>
+        </p:txBody>
+      </p:sp>
+      <p:sp>
+        <p:nvSpPr>
+          <p:cNvPr id="23" name="TextBox 22"/>
           <p:cNvSpPr txBox="1"/>
           <p:nvPr/>
         </p:nvSpPr>
@@ -10664,7 +10759,7 @@
       </p:sp>
       <p:sp>
         <p:nvSpPr>
-          <p:cNvPr id="25" name="TextBox 24"/>
+          <p:cNvPr id="24" name="TextBox 23"/>
           <p:cNvSpPr txBox="1"/>
           <p:nvPr/>
         </p:nvSpPr>
@@ -10771,7 +10866,6 @@
           <a:lstStyle/>
           <a:p>
             <a:pPr algn="ctr"/>
-            <a:endParaRPr/>
           </a:p>
         </p:txBody>
       </p:sp>
@@ -10853,8 +10947,8 @@
         </p:nvSpPr>
         <p:spPr>
           <a:xfrm>
-            <a:off x="457200" y="1188720"/>
-            <a:ext cx="5943600" cy="3200400"/>
+            <a:off x="457200" y="1234440"/>
+            <a:ext cx="5943600" cy="5029200"/>
           </a:xfrm>
           <a:prstGeom prst="rect">
             <a:avLst/>
@@ -10886,7 +10980,6 @@
           <a:lstStyle/>
           <a:p>
             <a:pPr algn="ctr"/>
-            <a:endParaRPr/>
           </a:p>
         </p:txBody>
       </p:sp>
@@ -10898,7 +10991,7 @@
         </p:nvSpPr>
         <p:spPr>
           <a:xfrm>
-            <a:off x="594360" y="1280160"/>
+            <a:off x="594360" y="1353312"/>
             <a:ext cx="5577840" cy="256032"/>
           </a:xfrm>
           <a:prstGeom prst="rect">
@@ -10914,26 +11007,61 @@
           <a:p>
             <a:pPr algn="l"/>
             <a:r>
+              <a:rPr sz="1300" b="1">
+                <a:solidFill>
+                  <a:srgbClr val="E8A23A"/>
+                </a:solidFill>
+                <a:latin typeface="Calibri"/>
+              </a:rPr>
+              <a:t>example  (02_arith)</a:t>
+            </a:r>
+          </a:p>
+        </p:txBody>
+      </p:sp>
+      <p:sp>
+        <p:nvSpPr>
+          <p:cNvPr id="7" name="TextBox 6"/>
+          <p:cNvSpPr txBox="1"/>
+          <p:nvPr/>
+        </p:nvSpPr>
+        <p:spPr>
+          <a:xfrm>
+            <a:off x="594360" y="1664208"/>
+            <a:ext cx="2743200" cy="228600"/>
+          </a:xfrm>
+          <a:prstGeom prst="rect">
+            <a:avLst/>
+          </a:prstGeom>
+          <a:noFill/>
+        </p:spPr>
+        <p:txBody>
+          <a:bodyPr wrap="square">
+            <a:spAutoFit/>
+          </a:bodyPr>
+          <a:lstStyle/>
+          <a:p>
+            <a:pPr algn="l"/>
+            <a:r>
               <a:rPr sz="1200" b="1">
                 <a:solidFill>
-                  <a:srgbClr val="E8A23A"/>
-                </a:solidFill>
-                <a:latin typeface="Calibri"/>
-              </a:rPr>
-              <a:t>example  (02_arith)</a:t>
-            </a:r>
-          </a:p>
-        </p:txBody>
-      </p:sp>
-      <p:sp>
-        <p:nvSpPr>
-          <p:cNvPr id="7" name="TextBox 6"/>
-          <p:cNvSpPr txBox="1"/>
-          <p:nvPr/>
-        </p:nvSpPr>
-        <p:spPr>
-          <a:xfrm>
-            <a:off x="594360" y="1554480"/>
+                  <a:srgbClr val="B0B0B0"/>
+                </a:solidFill>
+                <a:latin typeface="Calibri"/>
+              </a:rPr>
+              <a:t>asm</a:t>
+            </a:r>
+          </a:p>
+        </p:txBody>
+      </p:sp>
+      <p:sp>
+        <p:nvSpPr>
+          <p:cNvPr id="8" name="TextBox 7"/>
+          <p:cNvSpPr txBox="1"/>
+          <p:nvPr/>
+        </p:nvSpPr>
+        <p:spPr>
+          <a:xfrm>
+            <a:off x="3383280" y="1664208"/>
             <a:ext cx="2743200" cy="228600"/>
           </a:xfrm>
           <a:prstGeom prst="rect">
@@ -10949,47 +11077,12 @@
           <a:p>
             <a:pPr algn="l"/>
             <a:r>
-              <a:rPr sz="1100" b="1">
+              <a:rPr sz="1200" b="1">
                 <a:solidFill>
                   <a:srgbClr val="B0B0B0"/>
                 </a:solidFill>
                 <a:latin typeface="Calibri"/>
               </a:rPr>
-              <a:t>asm</a:t>
-            </a:r>
-          </a:p>
-        </p:txBody>
-      </p:sp>
-      <p:sp>
-        <p:nvSpPr>
-          <p:cNvPr id="8" name="TextBox 7"/>
-          <p:cNvSpPr txBox="1"/>
-          <p:nvPr/>
-        </p:nvSpPr>
-        <p:spPr>
-          <a:xfrm>
-            <a:off x="3383280" y="1554480"/>
-            <a:ext cx="2743200" cy="228600"/>
-          </a:xfrm>
-          <a:prstGeom prst="rect">
-            <a:avLst/>
-          </a:prstGeom>
-          <a:noFill/>
-        </p:spPr>
-        <p:txBody>
-          <a:bodyPr wrap="square">
-            <a:spAutoFit/>
-          </a:bodyPr>
-          <a:lstStyle/>
-          <a:p>
-            <a:pPr algn="l"/>
-            <a:r>
-              <a:rPr sz="1100" b="1">
-                <a:solidFill>
-                  <a:srgbClr val="B0B0B0"/>
-                </a:solidFill>
-                <a:latin typeface="Calibri"/>
-              </a:rPr>
               <a:t>closest C</a:t>
             </a:r>
           </a:p>
@@ -11003,28 +11096,98 @@
         </p:nvSpPr>
         <p:spPr>
           <a:xfrm>
-            <a:off x="594360" y="1874519"/>
-            <a:ext cx="2743200" cy="411480"/>
-          </a:xfrm>
-          <a:prstGeom prst="rect">
-            <a:avLst/>
-          </a:prstGeom>
-          <a:noFill/>
-        </p:spPr>
-        <p:txBody>
-          <a:bodyPr wrap="square">
-            <a:spAutoFit/>
-          </a:bodyPr>
-          <a:lstStyle/>
-          <a:p>
-            <a:pPr algn="l"/>
-            <a:r>
-              <a:rPr sz="1500" b="1">
+            <a:off x="594360" y="2011680"/>
+            <a:ext cx="2743200" cy="457200"/>
+          </a:xfrm>
+          <a:prstGeom prst="rect">
+            <a:avLst/>
+          </a:prstGeom>
+          <a:noFill/>
+        </p:spPr>
+        <p:txBody>
+          <a:bodyPr wrap="square">
+            <a:spAutoFit/>
+          </a:bodyPr>
+          <a:lstStyle/>
+          <a:p>
+            <a:pPr algn="l"/>
+            <a:r>
+              <a:rPr sz="1600" b="1">
                 <a:solidFill>
                   <a:srgbClr val="7CDA6A"/>
                 </a:solidFill>
                 <a:latin typeface="Consolas"/>
               </a:rPr>
+              <a:t>mov eax, 10</a:t>
+            </a:r>
+          </a:p>
+        </p:txBody>
+      </p:sp>
+      <p:sp>
+        <p:nvSpPr>
+          <p:cNvPr id="10" name="TextBox 9"/>
+          <p:cNvSpPr txBox="1"/>
+          <p:nvPr/>
+        </p:nvSpPr>
+        <p:spPr>
+          <a:xfrm>
+            <a:off x="3383280" y="2011680"/>
+            <a:ext cx="2834640" cy="457200"/>
+          </a:xfrm>
+          <a:prstGeom prst="rect">
+            <a:avLst/>
+          </a:prstGeom>
+          <a:noFill/>
+        </p:spPr>
+        <p:txBody>
+          <a:bodyPr wrap="square">
+            <a:spAutoFit/>
+          </a:bodyPr>
+          <a:lstStyle/>
+          <a:p>
+            <a:pPr algn="l"/>
+            <a:r>
+              <a:rPr sz="1500" b="0">
+                <a:solidFill>
+                  <a:srgbClr val="F2F2F2"/>
+                </a:solidFill>
+                <a:latin typeface="Consolas"/>
+              </a:rPr>
+              <a:t>eax = 10;</a:t>
+            </a:r>
+          </a:p>
+        </p:txBody>
+      </p:sp>
+      <p:sp>
+        <p:nvSpPr>
+          <p:cNvPr id="11" name="TextBox 10"/>
+          <p:cNvSpPr txBox="1"/>
+          <p:nvPr/>
+        </p:nvSpPr>
+        <p:spPr>
+          <a:xfrm>
+            <a:off x="594360" y="2633472"/>
+            <a:ext cx="2743200" cy="457200"/>
+          </a:xfrm>
+          <a:prstGeom prst="rect">
+            <a:avLst/>
+          </a:prstGeom>
+          <a:noFill/>
+        </p:spPr>
+        <p:txBody>
+          <a:bodyPr wrap="square">
+            <a:spAutoFit/>
+          </a:bodyPr>
+          <a:lstStyle/>
+          <a:p>
+            <a:pPr algn="l"/>
+            <a:r>
+              <a:rPr sz="1600" b="1">
+                <a:solidFill>
+                  <a:srgbClr val="7CDA6A"/>
+                </a:solidFill>
+                <a:latin typeface="Consolas"/>
+              </a:rPr>
               <a:t>add eax, 5</a:t>
             </a:r>
           </a:p>
@@ -11032,29 +11195,29 @@
       </p:sp>
       <p:sp>
         <p:nvSpPr>
-          <p:cNvPr id="10" name="TextBox 9"/>
-          <p:cNvSpPr txBox="1"/>
-          <p:nvPr/>
-        </p:nvSpPr>
-        <p:spPr>
-          <a:xfrm>
-            <a:off x="3383280" y="1874519"/>
-            <a:ext cx="2834640" cy="411480"/>
-          </a:xfrm>
-          <a:prstGeom prst="rect">
-            <a:avLst/>
-          </a:prstGeom>
-          <a:noFill/>
-        </p:spPr>
-        <p:txBody>
-          <a:bodyPr wrap="square">
-            <a:spAutoFit/>
-          </a:bodyPr>
-          <a:lstStyle/>
-          <a:p>
-            <a:pPr algn="l"/>
-            <a:r>
-              <a:rPr sz="1400" b="0">
+          <p:cNvPr id="12" name="TextBox 11"/>
+          <p:cNvSpPr txBox="1"/>
+          <p:nvPr/>
+        </p:nvSpPr>
+        <p:spPr>
+          <a:xfrm>
+            <a:off x="3383280" y="2633472"/>
+            <a:ext cx="2834640" cy="457200"/>
+          </a:xfrm>
+          <a:prstGeom prst="rect">
+            <a:avLst/>
+          </a:prstGeom>
+          <a:noFill/>
+        </p:spPr>
+        <p:txBody>
+          <a:bodyPr wrap="square">
+            <a:spAutoFit/>
+          </a:bodyPr>
+          <a:lstStyle/>
+          <a:p>
+            <a:pPr algn="l"/>
+            <a:r>
+              <a:rPr sz="1500" b="0">
                 <a:solidFill>
                   <a:srgbClr val="F2F2F2"/>
                 </a:solidFill>
@@ -11067,29 +11230,29 @@
       </p:sp>
       <p:sp>
         <p:nvSpPr>
-          <p:cNvPr id="11" name="TextBox 10"/>
-          <p:cNvSpPr txBox="1"/>
-          <p:nvPr/>
-        </p:nvSpPr>
-        <p:spPr>
-          <a:xfrm>
-            <a:off x="594360" y="2441448"/>
-            <a:ext cx="2743200" cy="411480"/>
-          </a:xfrm>
-          <a:prstGeom prst="rect">
-            <a:avLst/>
-          </a:prstGeom>
-          <a:noFill/>
-        </p:spPr>
-        <p:txBody>
-          <a:bodyPr wrap="square">
-            <a:spAutoFit/>
-          </a:bodyPr>
-          <a:lstStyle/>
-          <a:p>
-            <a:pPr algn="l"/>
-            <a:r>
-              <a:rPr sz="1500" b="1">
+          <p:cNvPr id="13" name="TextBox 12"/>
+          <p:cNvSpPr txBox="1"/>
+          <p:nvPr/>
+        </p:nvSpPr>
+        <p:spPr>
+          <a:xfrm>
+            <a:off x="594360" y="3255264"/>
+            <a:ext cx="2743200" cy="457200"/>
+          </a:xfrm>
+          <a:prstGeom prst="rect">
+            <a:avLst/>
+          </a:prstGeom>
+          <a:noFill/>
+        </p:spPr>
+        <p:txBody>
+          <a:bodyPr wrap="square">
+            <a:spAutoFit/>
+          </a:bodyPr>
+          <a:lstStyle/>
+          <a:p>
+            <a:pPr algn="l"/>
+            <a:r>
+              <a:rPr sz="1600" b="1">
                 <a:solidFill>
                   <a:srgbClr val="7CDA6A"/>
                 </a:solidFill>
@@ -11102,29 +11265,29 @@
       </p:sp>
       <p:sp>
         <p:nvSpPr>
-          <p:cNvPr id="12" name="TextBox 11"/>
-          <p:cNvSpPr txBox="1"/>
-          <p:nvPr/>
-        </p:nvSpPr>
-        <p:spPr>
-          <a:xfrm>
-            <a:off x="3383280" y="2441448"/>
-            <a:ext cx="2834640" cy="411480"/>
-          </a:xfrm>
-          <a:prstGeom prst="rect">
-            <a:avLst/>
-          </a:prstGeom>
-          <a:noFill/>
-        </p:spPr>
-        <p:txBody>
-          <a:bodyPr wrap="square">
-            <a:spAutoFit/>
-          </a:bodyPr>
-          <a:lstStyle/>
-          <a:p>
-            <a:pPr algn="l"/>
-            <a:r>
-              <a:rPr sz="1400" b="0">
+          <p:cNvPr id="14" name="TextBox 13"/>
+          <p:cNvSpPr txBox="1"/>
+          <p:nvPr/>
+        </p:nvSpPr>
+        <p:spPr>
+          <a:xfrm>
+            <a:off x="3383280" y="3255264"/>
+            <a:ext cx="2834640" cy="457200"/>
+          </a:xfrm>
+          <a:prstGeom prst="rect">
+            <a:avLst/>
+          </a:prstGeom>
+          <a:noFill/>
+        </p:spPr>
+        <p:txBody>
+          <a:bodyPr wrap="square">
+            <a:spAutoFit/>
+          </a:bodyPr>
+          <a:lstStyle/>
+          <a:p>
+            <a:pPr algn="l"/>
+            <a:r>
+              <a:rPr sz="1500" b="0">
                 <a:solidFill>
                   <a:srgbClr val="F2F2F2"/>
                 </a:solidFill>
@@ -11137,29 +11300,29 @@
       </p:sp>
       <p:sp>
         <p:nvSpPr>
-          <p:cNvPr id="13" name="TextBox 12"/>
-          <p:cNvSpPr txBox="1"/>
-          <p:nvPr/>
-        </p:nvSpPr>
-        <p:spPr>
-          <a:xfrm>
-            <a:off x="594360" y="3008376"/>
-            <a:ext cx="2743200" cy="411480"/>
-          </a:xfrm>
-          <a:prstGeom prst="rect">
-            <a:avLst/>
-          </a:prstGeom>
-          <a:noFill/>
-        </p:spPr>
-        <p:txBody>
-          <a:bodyPr wrap="square">
-            <a:spAutoFit/>
-          </a:bodyPr>
-          <a:lstStyle/>
-          <a:p>
-            <a:pPr algn="l"/>
-            <a:r>
-              <a:rPr sz="1500" b="1">
+          <p:cNvPr id="15" name="TextBox 14"/>
+          <p:cNvSpPr txBox="1"/>
+          <p:nvPr/>
+        </p:nvSpPr>
+        <p:spPr>
+          <a:xfrm>
+            <a:off x="594360" y="3877056"/>
+            <a:ext cx="2743200" cy="457200"/>
+          </a:xfrm>
+          <a:prstGeom prst="rect">
+            <a:avLst/>
+          </a:prstGeom>
+          <a:noFill/>
+        </p:spPr>
+        <p:txBody>
+          <a:bodyPr wrap="square">
+            <a:spAutoFit/>
+          </a:bodyPr>
+          <a:lstStyle/>
+          <a:p>
+            <a:pPr algn="l"/>
+            <a:r>
+              <a:rPr sz="1600" b="1">
                 <a:solidFill>
                   <a:srgbClr val="7CDA6A"/>
                 </a:solidFill>
@@ -11172,29 +11335,29 @@
       </p:sp>
       <p:sp>
         <p:nvSpPr>
-          <p:cNvPr id="14" name="TextBox 13"/>
-          <p:cNvSpPr txBox="1"/>
-          <p:nvPr/>
-        </p:nvSpPr>
-        <p:spPr>
-          <a:xfrm>
-            <a:off x="3383280" y="3008376"/>
-            <a:ext cx="2834640" cy="411480"/>
-          </a:xfrm>
-          <a:prstGeom prst="rect">
-            <a:avLst/>
-          </a:prstGeom>
-          <a:noFill/>
-        </p:spPr>
-        <p:txBody>
-          <a:bodyPr wrap="square">
-            <a:spAutoFit/>
-          </a:bodyPr>
-          <a:lstStyle/>
-          <a:p>
-            <a:pPr algn="l"/>
-            <a:r>
-              <a:rPr sz="1400" b="0">
+          <p:cNvPr id="16" name="TextBox 15"/>
+          <p:cNvSpPr txBox="1"/>
+          <p:nvPr/>
+        </p:nvSpPr>
+        <p:spPr>
+          <a:xfrm>
+            <a:off x="3383280" y="3877056"/>
+            <a:ext cx="2834640" cy="457200"/>
+          </a:xfrm>
+          <a:prstGeom prst="rect">
+            <a:avLst/>
+          </a:prstGeom>
+          <a:noFill/>
+        </p:spPr>
+        <p:txBody>
+          <a:bodyPr wrap="square">
+            <a:spAutoFit/>
+          </a:bodyPr>
+          <a:lstStyle/>
+          <a:p>
+            <a:pPr algn="l"/>
+            <a:r>
+              <a:rPr sz="1500" b="0">
                 <a:solidFill>
                   <a:srgbClr val="F2F2F2"/>
                 </a:solidFill>
@@ -11207,29 +11370,29 @@
       </p:sp>
       <p:sp>
         <p:nvSpPr>
-          <p:cNvPr id="15" name="TextBox 14"/>
-          <p:cNvSpPr txBox="1"/>
-          <p:nvPr/>
-        </p:nvSpPr>
-        <p:spPr>
-          <a:xfrm>
-            <a:off x="594360" y="3575303"/>
-            <a:ext cx="2743200" cy="411480"/>
-          </a:xfrm>
-          <a:prstGeom prst="rect">
-            <a:avLst/>
-          </a:prstGeom>
-          <a:noFill/>
-        </p:spPr>
-        <p:txBody>
-          <a:bodyPr wrap="square">
-            <a:spAutoFit/>
-          </a:bodyPr>
-          <a:lstStyle/>
-          <a:p>
-            <a:pPr algn="l"/>
-            <a:r>
-              <a:rPr sz="1500" b="1">
+          <p:cNvPr id="17" name="TextBox 16"/>
+          <p:cNvSpPr txBox="1"/>
+          <p:nvPr/>
+        </p:nvSpPr>
+        <p:spPr>
+          <a:xfrm>
+            <a:off x="594360" y="4498848"/>
+            <a:ext cx="2743200" cy="457200"/>
+          </a:xfrm>
+          <a:prstGeom prst="rect">
+            <a:avLst/>
+          </a:prstGeom>
+          <a:noFill/>
+        </p:spPr>
+        <p:txBody>
+          <a:bodyPr wrap="square">
+            <a:spAutoFit/>
+          </a:bodyPr>
+          <a:lstStyle/>
+          <a:p>
+            <a:pPr algn="l"/>
+            <a:r>
+              <a:rPr sz="1600" b="1">
                 <a:solidFill>
                   <a:srgbClr val="7CDA6A"/>
                 </a:solidFill>
@@ -11242,29 +11405,29 @@
       </p:sp>
       <p:sp>
         <p:nvSpPr>
-          <p:cNvPr id="16" name="TextBox 15"/>
-          <p:cNvSpPr txBox="1"/>
-          <p:nvPr/>
-        </p:nvSpPr>
-        <p:spPr>
-          <a:xfrm>
-            <a:off x="3383280" y="3575303"/>
-            <a:ext cx="2834640" cy="411480"/>
-          </a:xfrm>
-          <a:prstGeom prst="rect">
-            <a:avLst/>
-          </a:prstGeom>
-          <a:noFill/>
-        </p:spPr>
-        <p:txBody>
-          <a:bodyPr wrap="square">
-            <a:spAutoFit/>
-          </a:bodyPr>
-          <a:lstStyle/>
-          <a:p>
-            <a:pPr algn="l"/>
-            <a:r>
-              <a:rPr sz="1400" b="0">
+          <p:cNvPr id="18" name="TextBox 17"/>
+          <p:cNvSpPr txBox="1"/>
+          <p:nvPr/>
+        </p:nvSpPr>
+        <p:spPr>
+          <a:xfrm>
+            <a:off x="3383280" y="4498848"/>
+            <a:ext cx="2834640" cy="457200"/>
+          </a:xfrm>
+          <a:prstGeom prst="rect">
+            <a:avLst/>
+          </a:prstGeom>
+          <a:noFill/>
+        </p:spPr>
+        <p:txBody>
+          <a:bodyPr wrap="square">
+            <a:spAutoFit/>
+          </a:bodyPr>
+          <a:lstStyle/>
+          <a:p>
+            <a:pPr algn="l"/>
+            <a:r>
+              <a:rPr sz="1500" b="0">
                 <a:solidFill>
                   <a:srgbClr val="F2F2F2"/>
                 </a:solidFill>
@@ -11277,14 +11440,84 @@
       </p:sp>
       <p:sp>
         <p:nvSpPr>
-          <p:cNvPr id="17" name="Rectangle 16"/>
+          <p:cNvPr id="19" name="TextBox 18"/>
+          <p:cNvSpPr txBox="1"/>
+          <p:nvPr/>
+        </p:nvSpPr>
+        <p:spPr>
+          <a:xfrm>
+            <a:off x="594360" y="5120640"/>
+            <a:ext cx="2743200" cy="457200"/>
+          </a:xfrm>
+          <a:prstGeom prst="rect">
+            <a:avLst/>
+          </a:prstGeom>
+          <a:noFill/>
+        </p:spPr>
+        <p:txBody>
+          <a:bodyPr wrap="square">
+            <a:spAutoFit/>
+          </a:bodyPr>
+          <a:lstStyle/>
+          <a:p>
+            <a:pPr algn="l"/>
+            <a:r>
+              <a:rPr sz="1600" b="1">
+                <a:solidFill>
+                  <a:srgbClr val="7CDA6A"/>
+                </a:solidFill>
+                <a:latin typeface="Consolas"/>
+              </a:rPr>
+              <a:t>add eax, ebx</a:t>
+            </a:r>
+          </a:p>
+        </p:txBody>
+      </p:sp>
+      <p:sp>
+        <p:nvSpPr>
+          <p:cNvPr id="20" name="TextBox 19"/>
+          <p:cNvSpPr txBox="1"/>
+          <p:nvPr/>
+        </p:nvSpPr>
+        <p:spPr>
+          <a:xfrm>
+            <a:off x="3383280" y="5120640"/>
+            <a:ext cx="2834640" cy="457200"/>
+          </a:xfrm>
+          <a:prstGeom prst="rect">
+            <a:avLst/>
+          </a:prstGeom>
+          <a:noFill/>
+        </p:spPr>
+        <p:txBody>
+          <a:bodyPr wrap="square">
+            <a:spAutoFit/>
+          </a:bodyPr>
+          <a:lstStyle/>
+          <a:p>
+            <a:pPr algn="l"/>
+            <a:r>
+              <a:rPr sz="1500" b="0">
+                <a:solidFill>
+                  <a:srgbClr val="F2F2F2"/>
+                </a:solidFill>
+                <a:latin typeface="Consolas"/>
+              </a:rPr>
+              <a:t>eax += ebx;   // ebx=4</a:t>
+            </a:r>
+          </a:p>
+        </p:txBody>
+      </p:sp>
+      <p:sp>
+        <p:nvSpPr>
+          <p:cNvPr id="21" name="Rectangle 20"/>
           <p:cNvSpPr/>
           <p:nvPr/>
         </p:nvSpPr>
         <p:spPr>
           <a:xfrm>
-            <a:off x="6583680" y="1188720"/>
-            <a:ext cx="5166360" cy="3200400"/>
+            <a:off x="6583680" y="1234440"/>
+            <a:ext cx="5166360" cy="5029200"/>
           </a:xfrm>
           <a:prstGeom prst="rect">
             <a:avLst/>
@@ -11316,19 +11549,18 @@
           <a:lstStyle/>
           <a:p>
             <a:pPr algn="ctr"/>
-            <a:endParaRPr/>
-          </a:p>
-        </p:txBody>
-      </p:sp>
-      <p:sp>
-        <p:nvSpPr>
-          <p:cNvPr id="18" name="TextBox 17"/>
-          <p:cNvSpPr txBox="1"/>
-          <p:nvPr/>
-        </p:nvSpPr>
-        <p:spPr>
-          <a:xfrm>
-            <a:off x="6766560" y="1280160"/>
+          </a:p>
+        </p:txBody>
+      </p:sp>
+      <p:sp>
+        <p:nvSpPr>
+          <p:cNvPr id="22" name="TextBox 21"/>
+          <p:cNvSpPr txBox="1"/>
+          <p:nvPr/>
+        </p:nvSpPr>
+        <p:spPr>
+          <a:xfrm>
+            <a:off x="6766560" y="1353312"/>
             <a:ext cx="4800600" cy="256032"/>
           </a:xfrm>
           <a:prstGeom prst="rect">
@@ -11344,7 +11576,7 @@
           <a:p>
             <a:pPr algn="l"/>
             <a:r>
-              <a:rPr sz="1200" b="1">
+              <a:rPr sz="1300" b="1">
                 <a:solidFill>
                   <a:srgbClr val="E8A23A"/>
                 </a:solidFill>
@@ -11357,36 +11589,36 @@
       </p:sp>
       <p:sp>
         <p:nvSpPr>
-          <p:cNvPr id="19" name="TextBox 18"/>
-          <p:cNvSpPr txBox="1"/>
-          <p:nvPr/>
-        </p:nvSpPr>
-        <p:spPr>
-          <a:xfrm>
-            <a:off x="6766560" y="1645920"/>
-            <a:ext cx="4800600" cy="2468880"/>
-          </a:xfrm>
-          <a:prstGeom prst="rect">
-            <a:avLst/>
-          </a:prstGeom>
-          <a:noFill/>
-        </p:spPr>
-        <p:txBody>
-          <a:bodyPr wrap="square">
-            <a:spAutoFit/>
-          </a:bodyPr>
-          <a:lstStyle/>
-          <a:p>
-            <a:pPr algn="l"/>
-            <a:r>
-              <a:rPr sz="1500" b="0">
+          <p:cNvPr id="23" name="TextBox 22"/>
+          <p:cNvSpPr txBox="1"/>
+          <p:nvPr/>
+        </p:nvSpPr>
+        <p:spPr>
+          <a:xfrm>
+            <a:off x="6766560" y="1783080"/>
+            <a:ext cx="4800600" cy="4206240"/>
+          </a:xfrm>
+          <a:prstGeom prst="rect">
+            <a:avLst/>
+          </a:prstGeom>
+          <a:noFill/>
+        </p:spPr>
+        <p:txBody>
+          <a:bodyPr wrap="square">
+            <a:spAutoFit/>
+          </a:bodyPr>
+          <a:lstStyle/>
+          <a:p>
+            <a:pPr algn="l"/>
+            <a:r>
+              <a:rPr sz="1600" b="0">
                 <a:solidFill>
                   <a:srgbClr val="F2F2F2"/>
                 </a:solidFill>
                 <a:latin typeface="Calibri"/>
               </a:rPr>
-              <a:t>Different sequence than the example.
-At label check:
+              <a:t>Same ops, different start value and an extra inc.
+break check
   eax = ?</a:t>
             </a:r>
           </a:p>
@@ -11394,125 +11626,7 @@
       </p:sp>
       <p:sp>
         <p:nvSpPr>
-          <p:cNvPr id="20" name="Rectangle 19"/>
-          <p:cNvSpPr/>
-          <p:nvPr/>
-        </p:nvSpPr>
-        <p:spPr>
-          <a:xfrm>
-            <a:off x="457200" y="4572000"/>
-            <a:ext cx="11292840" cy="1691640"/>
-          </a:xfrm>
-          <a:prstGeom prst="rect">
-            <a:avLst/>
-          </a:prstGeom>
-          <a:solidFill>
-            <a:srgbClr val="242424"/>
-          </a:solidFill>
-          <a:ln>
-            <a:noFill/>
-          </a:ln>
-          <a:effectLst/>
-        </p:spPr>
-        <p:style>
-          <a:lnRef idx="1">
-            <a:schemeClr val="accent1"/>
-          </a:lnRef>
-          <a:fillRef idx="3">
-            <a:schemeClr val="accent1"/>
-          </a:fillRef>
-          <a:effectRef idx="2">
-            <a:schemeClr val="accent1"/>
-          </a:effectRef>
-          <a:fontRef idx="minor">
-            <a:schemeClr val="lt1"/>
-          </a:fontRef>
-        </p:style>
-        <p:txBody>
-          <a:bodyPr rtlCol="0" anchor="ctr"/>
-          <a:lstStyle/>
-          <a:p>
-            <a:pPr algn="ctr"/>
-            <a:endParaRPr/>
-          </a:p>
-        </p:txBody>
-      </p:sp>
-      <p:sp>
-        <p:nvSpPr>
-          <p:cNvPr id="21" name="TextBox 20"/>
-          <p:cNvSpPr txBox="1"/>
-          <p:nvPr/>
-        </p:nvSpPr>
-        <p:spPr>
-          <a:xfrm>
-            <a:off x="640080" y="4663440"/>
-            <a:ext cx="10972800" cy="256032"/>
-          </a:xfrm>
-          <a:prstGeom prst="rect">
-            <a:avLst/>
-          </a:prstGeom>
-          <a:noFill/>
-        </p:spPr>
-        <p:txBody>
-          <a:bodyPr wrap="square">
-            <a:spAutoFit/>
-          </a:bodyPr>
-          <a:lstStyle/>
-          <a:p>
-            <a:pPr algn="l"/>
-            <a:r>
-              <a:rPr sz="1300" b="1">
-                <a:solidFill>
-                  <a:srgbClr val="E8A23A"/>
-                </a:solidFill>
-                <a:latin typeface="Calibri"/>
-              </a:rPr>
-              <a:t>gdb on the challenge binary (not the example)</a:t>
-            </a:r>
-          </a:p>
-        </p:txBody>
-      </p:sp>
-      <p:sp>
-        <p:nvSpPr>
-          <p:cNvPr id="22" name="TextBox 21"/>
-          <p:cNvSpPr txBox="1"/>
-          <p:nvPr/>
-        </p:nvSpPr>
-        <p:spPr>
-          <a:xfrm>
-            <a:off x="640080" y="4983480"/>
-            <a:ext cx="10972800" cy="1143000"/>
-          </a:xfrm>
-          <a:prstGeom prst="rect">
-            <a:avLst/>
-          </a:prstGeom>
-          <a:noFill/>
-        </p:spPr>
-        <p:txBody>
-          <a:bodyPr wrap="square">
-            <a:spAutoFit/>
-          </a:bodyPr>
-          <a:lstStyle/>
-          <a:p>
-            <a:pPr algn="l"/>
-            <a:r>
-              <a:rPr sz="1500" b="1">
-                <a:solidFill>
-                  <a:srgbClr val="7CDA6A"/>
-                </a:solidFill>
-                <a:latin typeface="Consolas"/>
-              </a:rPr>
-              <a:t>gdb ./ch_arith
-break check
-run
-print $eax</a:t>
-            </a:r>
-          </a:p>
-        </p:txBody>
-      </p:sp>
-      <p:sp>
-        <p:nvSpPr>
-          <p:cNvPr id="23" name="Rectangle 22"/>
+          <p:cNvPr id="24" name="Rectangle 23"/>
           <p:cNvSpPr/>
           <p:nvPr/>
         </p:nvSpPr>
@@ -11551,13 +11665,12 @@
           <a:lstStyle/>
           <a:p>
             <a:pPr algn="ctr"/>
-            <a:endParaRPr/>
-          </a:p>
-        </p:txBody>
-      </p:sp>
-      <p:sp>
-        <p:nvSpPr>
-          <p:cNvPr id="24" name="TextBox 23"/>
+          </a:p>
+        </p:txBody>
+      </p:sp>
+      <p:sp>
+        <p:nvSpPr>
+          <p:cNvPr id="25" name="TextBox 24"/>
           <p:cNvSpPr txBox="1"/>
           <p:nvPr/>
         </p:nvSpPr>
@@ -11592,7 +11705,7 @@
       </p:sp>
       <p:sp>
         <p:nvSpPr>
-          <p:cNvPr id="25" name="TextBox 24"/>
+          <p:cNvPr id="26" name="TextBox 25"/>
           <p:cNvSpPr txBox="1"/>
           <p:nvPr/>
         </p:nvSpPr>
@@ -12243,7 +12356,6 @@
           <a:lstStyle/>
           <a:p>
             <a:pPr algn="ctr"/>
-            <a:endParaRPr/>
           </a:p>
         </p:txBody>
       </p:sp>
@@ -12325,8 +12437,8 @@
         </p:nvSpPr>
         <p:spPr>
           <a:xfrm>
-            <a:off x="457200" y="1188720"/>
-            <a:ext cx="5943600" cy="3200400"/>
+            <a:off x="457200" y="1234440"/>
+            <a:ext cx="5943600" cy="5029200"/>
           </a:xfrm>
           <a:prstGeom prst="rect">
             <a:avLst/>
@@ -12358,7 +12470,6 @@
           <a:lstStyle/>
           <a:p>
             <a:pPr algn="ctr"/>
-            <a:endParaRPr/>
           </a:p>
         </p:txBody>
       </p:sp>
@@ -12370,7 +12481,7 @@
         </p:nvSpPr>
         <p:spPr>
           <a:xfrm>
-            <a:off x="594360" y="1280160"/>
+            <a:off x="594360" y="1353312"/>
             <a:ext cx="5577840" cy="256032"/>
           </a:xfrm>
           <a:prstGeom prst="rect">
@@ -12386,26 +12497,61 @@
           <a:p>
             <a:pPr algn="l"/>
             <a:r>
+              <a:rPr sz="1300" b="1">
+                <a:solidFill>
+                  <a:srgbClr val="E8A23A"/>
+                </a:solidFill>
+                <a:latin typeface="Calibri"/>
+              </a:rPr>
+              <a:t>example  (03_xor)</a:t>
+            </a:r>
+          </a:p>
+        </p:txBody>
+      </p:sp>
+      <p:sp>
+        <p:nvSpPr>
+          <p:cNvPr id="7" name="TextBox 6"/>
+          <p:cNvSpPr txBox="1"/>
+          <p:nvPr/>
+        </p:nvSpPr>
+        <p:spPr>
+          <a:xfrm>
+            <a:off x="594360" y="1664208"/>
+            <a:ext cx="2743200" cy="228600"/>
+          </a:xfrm>
+          <a:prstGeom prst="rect">
+            <a:avLst/>
+          </a:prstGeom>
+          <a:noFill/>
+        </p:spPr>
+        <p:txBody>
+          <a:bodyPr wrap="square">
+            <a:spAutoFit/>
+          </a:bodyPr>
+          <a:lstStyle/>
+          <a:p>
+            <a:pPr algn="l"/>
+            <a:r>
               <a:rPr sz="1200" b="1">
                 <a:solidFill>
-                  <a:srgbClr val="E8A23A"/>
-                </a:solidFill>
-                <a:latin typeface="Calibri"/>
-              </a:rPr>
-              <a:t>example  (03_xor)</a:t>
-            </a:r>
-          </a:p>
-        </p:txBody>
-      </p:sp>
-      <p:sp>
-        <p:nvSpPr>
-          <p:cNvPr id="7" name="TextBox 6"/>
-          <p:cNvSpPr txBox="1"/>
-          <p:nvPr/>
-        </p:nvSpPr>
-        <p:spPr>
-          <a:xfrm>
-            <a:off x="594360" y="1554480"/>
+                  <a:srgbClr val="B0B0B0"/>
+                </a:solidFill>
+                <a:latin typeface="Calibri"/>
+              </a:rPr>
+              <a:t>asm</a:t>
+            </a:r>
+          </a:p>
+        </p:txBody>
+      </p:sp>
+      <p:sp>
+        <p:nvSpPr>
+          <p:cNvPr id="8" name="TextBox 7"/>
+          <p:cNvSpPr txBox="1"/>
+          <p:nvPr/>
+        </p:nvSpPr>
+        <p:spPr>
+          <a:xfrm>
+            <a:off x="3383280" y="1664208"/>
             <a:ext cx="2743200" cy="228600"/>
           </a:xfrm>
           <a:prstGeom prst="rect">
@@ -12421,47 +12567,12 @@
           <a:p>
             <a:pPr algn="l"/>
             <a:r>
-              <a:rPr sz="1100" b="1">
+              <a:rPr sz="1200" b="1">
                 <a:solidFill>
                   <a:srgbClr val="B0B0B0"/>
                 </a:solidFill>
                 <a:latin typeface="Calibri"/>
               </a:rPr>
-              <a:t>asm</a:t>
-            </a:r>
-          </a:p>
-        </p:txBody>
-      </p:sp>
-      <p:sp>
-        <p:nvSpPr>
-          <p:cNvPr id="8" name="TextBox 7"/>
-          <p:cNvSpPr txBox="1"/>
-          <p:nvPr/>
-        </p:nvSpPr>
-        <p:spPr>
-          <a:xfrm>
-            <a:off x="3383280" y="1554480"/>
-            <a:ext cx="2743200" cy="228600"/>
-          </a:xfrm>
-          <a:prstGeom prst="rect">
-            <a:avLst/>
-          </a:prstGeom>
-          <a:noFill/>
-        </p:spPr>
-        <p:txBody>
-          <a:bodyPr wrap="square">
-            <a:spAutoFit/>
-          </a:bodyPr>
-          <a:lstStyle/>
-          <a:p>
-            <a:pPr algn="l"/>
-            <a:r>
-              <a:rPr sz="1100" b="1">
-                <a:solidFill>
-                  <a:srgbClr val="B0B0B0"/>
-                </a:solidFill>
-                <a:latin typeface="Calibri"/>
-              </a:rPr>
               <a:t>closest C</a:t>
             </a:r>
           </a:p>
@@ -12475,29 +12586,29 @@
         </p:nvSpPr>
         <p:spPr>
           <a:xfrm>
-            <a:off x="594360" y="1874519"/>
-            <a:ext cx="2743200" cy="411480"/>
-          </a:xfrm>
-          <a:prstGeom prst="rect">
-            <a:avLst/>
-          </a:prstGeom>
-          <a:noFill/>
-        </p:spPr>
-        <p:txBody>
-          <a:bodyPr wrap="square">
-            <a:spAutoFit/>
-          </a:bodyPr>
-          <a:lstStyle/>
-          <a:p>
-            <a:pPr algn="l"/>
-            <a:r>
-              <a:rPr sz="1500" b="1">
+            <a:off x="594360" y="2011680"/>
+            <a:ext cx="2743200" cy="457200"/>
+          </a:xfrm>
+          <a:prstGeom prst="rect">
+            <a:avLst/>
+          </a:prstGeom>
+          <a:noFill/>
+        </p:spPr>
+        <p:txBody>
+          <a:bodyPr wrap="square">
+            <a:spAutoFit/>
+          </a:bodyPr>
+          <a:lstStyle/>
+          <a:p>
+            <a:pPr algn="l"/>
+            <a:r>
+              <a:rPr sz="1600" b="1">
                 <a:solidFill>
                   <a:srgbClr val="7CDA6A"/>
                 </a:solidFill>
                 <a:latin typeface="Consolas"/>
               </a:rPr>
-              <a:t>xor eax, eax</a:t>
+              <a:t>mov eax, 0x55</a:t>
             </a:r>
           </a:p>
         </p:txBody>
@@ -12510,29 +12621,29 @@
         </p:nvSpPr>
         <p:spPr>
           <a:xfrm>
-            <a:off x="3383280" y="1874519"/>
-            <a:ext cx="2834640" cy="411480"/>
-          </a:xfrm>
-          <a:prstGeom prst="rect">
-            <a:avLst/>
-          </a:prstGeom>
-          <a:noFill/>
-        </p:spPr>
-        <p:txBody>
-          <a:bodyPr wrap="square">
-            <a:spAutoFit/>
-          </a:bodyPr>
-          <a:lstStyle/>
-          <a:p>
-            <a:pPr algn="l"/>
-            <a:r>
-              <a:rPr sz="1400" b="0">
+            <a:off x="3383280" y="2011680"/>
+            <a:ext cx="2834640" cy="457200"/>
+          </a:xfrm>
+          <a:prstGeom prst="rect">
+            <a:avLst/>
+          </a:prstGeom>
+          <a:noFill/>
+        </p:spPr>
+        <p:txBody>
+          <a:bodyPr wrap="square">
+            <a:spAutoFit/>
+          </a:bodyPr>
+          <a:lstStyle/>
+          <a:p>
+            <a:pPr algn="l"/>
+            <a:r>
+              <a:rPr sz="1500" b="0">
                 <a:solidFill>
                   <a:srgbClr val="F2F2F2"/>
                 </a:solidFill>
                 <a:latin typeface="Consolas"/>
               </a:rPr>
-              <a:t>eax = 0;</a:t>
+              <a:t>eax = 0x55;</a:t>
             </a:r>
           </a:p>
         </p:txBody>
@@ -12545,23 +12656,23 @@
         </p:nvSpPr>
         <p:spPr>
           <a:xfrm>
-            <a:off x="594360" y="2441448"/>
-            <a:ext cx="2743200" cy="411480"/>
-          </a:xfrm>
-          <a:prstGeom prst="rect">
-            <a:avLst/>
-          </a:prstGeom>
-          <a:noFill/>
-        </p:spPr>
-        <p:txBody>
-          <a:bodyPr wrap="square">
-            <a:spAutoFit/>
-          </a:bodyPr>
-          <a:lstStyle/>
-          <a:p>
-            <a:pPr algn="l"/>
-            <a:r>
-              <a:rPr sz="1500" b="1">
+            <a:off x="594360" y="2633472"/>
+            <a:ext cx="2743200" cy="457200"/>
+          </a:xfrm>
+          <a:prstGeom prst="rect">
+            <a:avLst/>
+          </a:prstGeom>
+          <a:noFill/>
+        </p:spPr>
+        <p:txBody>
+          <a:bodyPr wrap="square">
+            <a:spAutoFit/>
+          </a:bodyPr>
+          <a:lstStyle/>
+          <a:p>
+            <a:pPr algn="l"/>
+            <a:r>
+              <a:rPr sz="1600" b="1">
                 <a:solidFill>
                   <a:srgbClr val="7CDA6A"/>
                 </a:solidFill>
@@ -12580,29 +12691,29 @@
         </p:nvSpPr>
         <p:spPr>
           <a:xfrm>
-            <a:off x="3383280" y="2441448"/>
-            <a:ext cx="2834640" cy="411480"/>
-          </a:xfrm>
-          <a:prstGeom prst="rect">
-            <a:avLst/>
-          </a:prstGeom>
-          <a:noFill/>
-        </p:spPr>
-        <p:txBody>
-          <a:bodyPr wrap="square">
-            <a:spAutoFit/>
-          </a:bodyPr>
-          <a:lstStyle/>
-          <a:p>
-            <a:pPr algn="l"/>
-            <a:r>
-              <a:rPr sz="1400" b="0">
+            <a:off x="3383280" y="2633472"/>
+            <a:ext cx="2834640" cy="457200"/>
+          </a:xfrm>
+          <a:prstGeom prst="rect">
+            <a:avLst/>
+          </a:prstGeom>
+          <a:noFill/>
+        </p:spPr>
+        <p:txBody>
+          <a:bodyPr wrap="square">
+            <a:spAutoFit/>
+          </a:bodyPr>
+          <a:lstStyle/>
+          <a:p>
+            <a:pPr algn="l"/>
+            <a:r>
+              <a:rPr sz="1500" b="0">
                 <a:solidFill>
                   <a:srgbClr val="F2F2F2"/>
                 </a:solidFill>
                 <a:latin typeface="Consolas"/>
               </a:rPr>
-              <a:t>eax ^= 0x55;</a:t>
+              <a:t>eax ^= 0x55;   // 0</a:t>
             </a:r>
           </a:p>
         </p:txBody>
@@ -12615,23 +12726,23 @@
         </p:nvSpPr>
         <p:spPr>
           <a:xfrm>
-            <a:off x="594360" y="3008376"/>
-            <a:ext cx="2743200" cy="411480"/>
-          </a:xfrm>
-          <a:prstGeom prst="rect">
-            <a:avLst/>
-          </a:prstGeom>
-          <a:noFill/>
-        </p:spPr>
-        <p:txBody>
-          <a:bodyPr wrap="square">
-            <a:spAutoFit/>
-          </a:bodyPr>
-          <a:lstStyle/>
-          <a:p>
-            <a:pPr algn="l"/>
-            <a:r>
-              <a:rPr sz="1500" b="1">
+            <a:off x="594360" y="3255264"/>
+            <a:ext cx="2743200" cy="457200"/>
+          </a:xfrm>
+          <a:prstGeom prst="rect">
+            <a:avLst/>
+          </a:prstGeom>
+          <a:noFill/>
+        </p:spPr>
+        <p:txBody>
+          <a:bodyPr wrap="square">
+            <a:spAutoFit/>
+          </a:bodyPr>
+          <a:lstStyle/>
+          <a:p>
+            <a:pPr algn="l"/>
+            <a:r>
+              <a:rPr sz="1600" b="1">
                 <a:solidFill>
                   <a:srgbClr val="7CDA6A"/>
                 </a:solidFill>
@@ -12650,23 +12761,23 @@
         </p:nvSpPr>
         <p:spPr>
           <a:xfrm>
-            <a:off x="3383280" y="3008376"/>
-            <a:ext cx="2834640" cy="411480"/>
-          </a:xfrm>
-          <a:prstGeom prst="rect">
-            <a:avLst/>
-          </a:prstGeom>
-          <a:noFill/>
-        </p:spPr>
-        <p:txBody>
-          <a:bodyPr wrap="square">
-            <a:spAutoFit/>
-          </a:bodyPr>
-          <a:lstStyle/>
-          <a:p>
-            <a:pPr algn="l"/>
-            <a:r>
-              <a:rPr sz="1400" b="0">
+            <a:off x="3383280" y="3255264"/>
+            <a:ext cx="2834640" cy="457200"/>
+          </a:xfrm>
+          <a:prstGeom prst="rect">
+            <a:avLst/>
+          </a:prstGeom>
+          <a:noFill/>
+        </p:spPr>
+        <p:txBody>
+          <a:bodyPr wrap="square">
+            <a:spAutoFit/>
+          </a:bodyPr>
+          <a:lstStyle/>
+          <a:p>
+            <a:pPr algn="l"/>
+            <a:r>
+              <a:rPr sz="1500" b="0">
                 <a:solidFill>
                   <a:srgbClr val="F2F2F2"/>
                 </a:solidFill>
@@ -12679,14 +12790,154 @@
       </p:sp>
       <p:sp>
         <p:nvSpPr>
-          <p:cNvPr id="15" name="Rectangle 14"/>
+          <p:cNvPr id="15" name="TextBox 14"/>
+          <p:cNvSpPr txBox="1"/>
+          <p:nvPr/>
+        </p:nvSpPr>
+        <p:spPr>
+          <a:xfrm>
+            <a:off x="594360" y="3877056"/>
+            <a:ext cx="2743200" cy="457200"/>
+          </a:xfrm>
+          <a:prstGeom prst="rect">
+            <a:avLst/>
+          </a:prstGeom>
+          <a:noFill/>
+        </p:spPr>
+        <p:txBody>
+          <a:bodyPr wrap="square">
+            <a:spAutoFit/>
+          </a:bodyPr>
+          <a:lstStyle/>
+          <a:p>
+            <a:pPr algn="l"/>
+            <a:r>
+              <a:rPr sz="1600" b="1">
+                <a:solidFill>
+                  <a:srgbClr val="7CDA6A"/>
+                </a:solidFill>
+                <a:latin typeface="Consolas"/>
+              </a:rPr>
+              <a:t>mov eax, 0xF0</a:t>
+            </a:r>
+          </a:p>
+        </p:txBody>
+      </p:sp>
+      <p:sp>
+        <p:nvSpPr>
+          <p:cNvPr id="16" name="TextBox 15"/>
+          <p:cNvSpPr txBox="1"/>
+          <p:nvPr/>
+        </p:nvSpPr>
+        <p:spPr>
+          <a:xfrm>
+            <a:off x="3383280" y="3877056"/>
+            <a:ext cx="2834640" cy="457200"/>
+          </a:xfrm>
+          <a:prstGeom prst="rect">
+            <a:avLst/>
+          </a:prstGeom>
+          <a:noFill/>
+        </p:spPr>
+        <p:txBody>
+          <a:bodyPr wrap="square">
+            <a:spAutoFit/>
+          </a:bodyPr>
+          <a:lstStyle/>
+          <a:p>
+            <a:pPr algn="l"/>
+            <a:r>
+              <a:rPr sz="1500" b="0">
+                <a:solidFill>
+                  <a:srgbClr val="F2F2F2"/>
+                </a:solidFill>
+                <a:latin typeface="Consolas"/>
+              </a:rPr>
+              <a:t>eax = 0xF0;</a:t>
+            </a:r>
+          </a:p>
+        </p:txBody>
+      </p:sp>
+      <p:sp>
+        <p:nvSpPr>
+          <p:cNvPr id="17" name="TextBox 16"/>
+          <p:cNvSpPr txBox="1"/>
+          <p:nvPr/>
+        </p:nvSpPr>
+        <p:spPr>
+          <a:xfrm>
+            <a:off x="594360" y="4498848"/>
+            <a:ext cx="2743200" cy="457200"/>
+          </a:xfrm>
+          <a:prstGeom prst="rect">
+            <a:avLst/>
+          </a:prstGeom>
+          <a:noFill/>
+        </p:spPr>
+        <p:txBody>
+          <a:bodyPr wrap="square">
+            <a:spAutoFit/>
+          </a:bodyPr>
+          <a:lstStyle/>
+          <a:p>
+            <a:pPr algn="l"/>
+            <a:r>
+              <a:rPr sz="1600" b="1">
+                <a:solidFill>
+                  <a:srgbClr val="7CDA6A"/>
+                </a:solidFill>
+                <a:latin typeface="Consolas"/>
+              </a:rPr>
+              <a:t>xor eax, 0x0F</a:t>
+            </a:r>
+          </a:p>
+        </p:txBody>
+      </p:sp>
+      <p:sp>
+        <p:nvSpPr>
+          <p:cNvPr id="18" name="TextBox 17"/>
+          <p:cNvSpPr txBox="1"/>
+          <p:nvPr/>
+        </p:nvSpPr>
+        <p:spPr>
+          <a:xfrm>
+            <a:off x="3383280" y="4498848"/>
+            <a:ext cx="2834640" cy="457200"/>
+          </a:xfrm>
+          <a:prstGeom prst="rect">
+            <a:avLst/>
+          </a:prstGeom>
+          <a:noFill/>
+        </p:spPr>
+        <p:txBody>
+          <a:bodyPr wrap="square">
+            <a:spAutoFit/>
+          </a:bodyPr>
+          <a:lstStyle/>
+          <a:p>
+            <a:pPr algn="l"/>
+            <a:r>
+              <a:rPr sz="1500" b="0">
+                <a:solidFill>
+                  <a:srgbClr val="F2F2F2"/>
+                </a:solidFill>
+                <a:latin typeface="Consolas"/>
+              </a:rPr>
+              <a:t>eax ^= 0x0F;</a:t>
+            </a:r>
+          </a:p>
+        </p:txBody>
+      </p:sp>
+      <p:sp>
+        <p:nvSpPr>
+          <p:cNvPr id="19" name="Rectangle 18"/>
           <p:cNvSpPr/>
           <p:nvPr/>
         </p:nvSpPr>
         <p:spPr>
           <a:xfrm>
-            <a:off x="6583680" y="1188720"/>
-            <a:ext cx="5166360" cy="3200400"/>
+            <a:off x="6583680" y="1234440"/>
+            <a:ext cx="5166360" cy="5029200"/>
           </a:xfrm>
           <a:prstGeom prst="rect">
             <a:avLst/>
@@ -12718,19 +12969,18 @@
           <a:lstStyle/>
           <a:p>
             <a:pPr algn="ctr"/>
-            <a:endParaRPr/>
-          </a:p>
-        </p:txBody>
-      </p:sp>
-      <p:sp>
-        <p:nvSpPr>
-          <p:cNvPr id="16" name="TextBox 15"/>
-          <p:cNvSpPr txBox="1"/>
-          <p:nvPr/>
-        </p:nvSpPr>
-        <p:spPr>
-          <a:xfrm>
-            <a:off x="6766560" y="1280160"/>
+          </a:p>
+        </p:txBody>
+      </p:sp>
+      <p:sp>
+        <p:nvSpPr>
+          <p:cNvPr id="20" name="TextBox 19"/>
+          <p:cNvSpPr txBox="1"/>
+          <p:nvPr/>
+        </p:nvSpPr>
+        <p:spPr>
+          <a:xfrm>
+            <a:off x="6766560" y="1353312"/>
             <a:ext cx="4800600" cy="256032"/>
           </a:xfrm>
           <a:prstGeom prst="rect">
@@ -12746,7 +12996,7 @@
           <a:p>
             <a:pPr algn="l"/>
             <a:r>
-              <a:rPr sz="1200" b="1">
+              <a:rPr sz="1300" b="1">
                 <a:solidFill>
                   <a:srgbClr val="E8A23A"/>
                 </a:solidFill>
@@ -12759,166 +13009,47 @@
       </p:sp>
       <p:sp>
         <p:nvSpPr>
-          <p:cNvPr id="17" name="TextBox 16"/>
-          <p:cNvSpPr txBox="1"/>
-          <p:nvPr/>
-        </p:nvSpPr>
-        <p:spPr>
-          <a:xfrm>
-            <a:off x="6766560" y="1645920"/>
-            <a:ext cx="4800600" cy="2468880"/>
-          </a:xfrm>
-          <a:prstGeom prst="rect">
-            <a:avLst/>
-          </a:prstGeom>
-          <a:noFill/>
-        </p:spPr>
-        <p:txBody>
-          <a:bodyPr wrap="square">
-            <a:spAutoFit/>
-          </a:bodyPr>
-          <a:lstStyle/>
-          <a:p>
-            <a:pPr algn="l"/>
-            <a:r>
-              <a:rPr sz="1500" b="0">
+          <p:cNvPr id="21" name="TextBox 20"/>
+          <p:cNvSpPr txBox="1"/>
+          <p:nvPr/>
+        </p:nvSpPr>
+        <p:spPr>
+          <a:xfrm>
+            <a:off x="6766560" y="1783080"/>
+            <a:ext cx="4800600" cy="4206240"/>
+          </a:xfrm>
+          <a:prstGeom prst="rect">
+            <a:avLst/>
+          </a:prstGeom>
+          <a:noFill/>
+        </p:spPr>
+        <p:txBody>
+          <a:bodyPr wrap="square">
+            <a:spAutoFit/>
+          </a:bodyPr>
+          <a:lstStyle/>
+          <a:p>
+            <a:pPr algn="l"/>
+            <a:r>
+              <a:rPr sz="1600" b="0">
                 <a:solidFill>
                   <a:srgbClr val="F2F2F2"/>
                 </a:solidFill>
                 <a:latin typeface="Calibri"/>
               </a:rPr>
-              <a:t>Different values than the example.
-At label check:
+              <a:t>xor eax with a value, then xor ebx with itself, then xor those together.
+break check
   eax = ?
-  is ZF set?
-ZF: print ($eflags &amp; 0x40)
-(non-zero means set)</a:t>
-            </a:r>
-          </a:p>
-        </p:txBody>
-      </p:sp>
-      <p:sp>
-        <p:nvSpPr>
-          <p:cNvPr id="18" name="Rectangle 17"/>
-          <p:cNvSpPr/>
-          <p:nvPr/>
-        </p:nvSpPr>
-        <p:spPr>
-          <a:xfrm>
-            <a:off x="457200" y="4572000"/>
-            <a:ext cx="11292840" cy="1691640"/>
-          </a:xfrm>
-          <a:prstGeom prst="rect">
-            <a:avLst/>
-          </a:prstGeom>
-          <a:solidFill>
-            <a:srgbClr val="242424"/>
-          </a:solidFill>
-          <a:ln>
-            <a:noFill/>
-          </a:ln>
-          <a:effectLst/>
-        </p:spPr>
-        <p:style>
-          <a:lnRef idx="1">
-            <a:schemeClr val="accent1"/>
-          </a:lnRef>
-          <a:fillRef idx="3">
-            <a:schemeClr val="accent1"/>
-          </a:fillRef>
-          <a:effectRef idx="2">
-            <a:schemeClr val="accent1"/>
-          </a:effectRef>
-          <a:fontRef idx="minor">
-            <a:schemeClr val="lt1"/>
-          </a:fontRef>
-        </p:style>
-        <p:txBody>
-          <a:bodyPr rtlCol="0" anchor="ctr"/>
-          <a:lstStyle/>
-          <a:p>
-            <a:pPr algn="ctr"/>
-            <a:endParaRPr/>
-          </a:p>
-        </p:txBody>
-      </p:sp>
-      <p:sp>
-        <p:nvSpPr>
-          <p:cNvPr id="19" name="TextBox 18"/>
-          <p:cNvSpPr txBox="1"/>
-          <p:nvPr/>
-        </p:nvSpPr>
-        <p:spPr>
-          <a:xfrm>
-            <a:off x="640080" y="4663440"/>
-            <a:ext cx="10972800" cy="256032"/>
-          </a:xfrm>
-          <a:prstGeom prst="rect">
-            <a:avLst/>
-          </a:prstGeom>
-          <a:noFill/>
-        </p:spPr>
-        <p:txBody>
-          <a:bodyPr wrap="square">
-            <a:spAutoFit/>
-          </a:bodyPr>
-          <a:lstStyle/>
-          <a:p>
-            <a:pPr algn="l"/>
-            <a:r>
-              <a:rPr sz="1300" b="1">
-                <a:solidFill>
-                  <a:srgbClr val="E8A23A"/>
-                </a:solidFill>
-                <a:latin typeface="Calibri"/>
-              </a:rPr>
-              <a:t>gdb on the challenge binary (not the example)</a:t>
-            </a:r>
-          </a:p>
-        </p:txBody>
-      </p:sp>
-      <p:sp>
-        <p:nvSpPr>
-          <p:cNvPr id="20" name="TextBox 19"/>
-          <p:cNvSpPr txBox="1"/>
-          <p:nvPr/>
-        </p:nvSpPr>
-        <p:spPr>
-          <a:xfrm>
-            <a:off x="640080" y="4983480"/>
-            <a:ext cx="10972800" cy="1143000"/>
-          </a:xfrm>
-          <a:prstGeom prst="rect">
-            <a:avLst/>
-          </a:prstGeom>
-          <a:noFill/>
-        </p:spPr>
-        <p:txBody>
-          <a:bodyPr wrap="square">
-            <a:spAutoFit/>
-          </a:bodyPr>
-          <a:lstStyle/>
-          <a:p>
-            <a:pPr algn="l"/>
-            <a:r>
-              <a:rPr sz="1500" b="1">
-                <a:solidFill>
-                  <a:srgbClr val="7CDA6A"/>
-                </a:solidFill>
-                <a:latin typeface="Consolas"/>
-              </a:rPr>
-              <a:t>gdb ./ch_xor
-break check
-run
-print /x $eax
-print ($eflags &amp; 0x40)</a:t>
-            </a:r>
-          </a:p>
-        </p:txBody>
-      </p:sp>
-      <p:sp>
-        <p:nvSpPr>
-          <p:cNvPr id="21" name="Rectangle 20"/>
+  ZF set?
+print ($eflags &amp; 0x40)
+non-zero = ZF set</a:t>
+            </a:r>
+          </a:p>
+        </p:txBody>
+      </p:sp>
+      <p:sp>
+        <p:nvSpPr>
+          <p:cNvPr id="22" name="Rectangle 21"/>
           <p:cNvSpPr/>
           <p:nvPr/>
         </p:nvSpPr>
@@ -12957,13 +13088,12 @@
           <a:lstStyle/>
           <a:p>
             <a:pPr algn="ctr"/>
-            <a:endParaRPr/>
-          </a:p>
-        </p:txBody>
-      </p:sp>
-      <p:sp>
-        <p:nvSpPr>
-          <p:cNvPr id="22" name="TextBox 21"/>
+          </a:p>
+        </p:txBody>
+      </p:sp>
+      <p:sp>
+        <p:nvSpPr>
+          <p:cNvPr id="23" name="TextBox 22"/>
           <p:cNvSpPr txBox="1"/>
           <p:nvPr/>
         </p:nvSpPr>
@@ -12998,7 +13128,7 @@
       </p:sp>
       <p:sp>
         <p:nvSpPr>
-          <p:cNvPr id="23" name="TextBox 22"/>
+          <p:cNvPr id="24" name="TextBox 23"/>
           <p:cNvSpPr txBox="1"/>
           <p:nvPr/>
         </p:nvSpPr>
@@ -13105,7 +13235,6 @@
           <a:lstStyle/>
           <a:p>
             <a:pPr algn="ctr"/>
-            <a:endParaRPr/>
           </a:p>
         </p:txBody>
       </p:sp>
@@ -13187,8 +13316,8 @@
         </p:nvSpPr>
         <p:spPr>
           <a:xfrm>
-            <a:off x="457200" y="1188720"/>
-            <a:ext cx="5943600" cy="3200400"/>
+            <a:off x="457200" y="1234440"/>
+            <a:ext cx="5943600" cy="5029200"/>
           </a:xfrm>
           <a:prstGeom prst="rect">
             <a:avLst/>
@@ -13220,7 +13349,6 @@
           <a:lstStyle/>
           <a:p>
             <a:pPr algn="ctr"/>
-            <a:endParaRPr/>
           </a:p>
         </p:txBody>
       </p:sp>
@@ -13232,7 +13360,7 @@
         </p:nvSpPr>
         <p:spPr>
           <a:xfrm>
-            <a:off x="594360" y="1280160"/>
+            <a:off x="594360" y="1353312"/>
             <a:ext cx="5577840" cy="256032"/>
           </a:xfrm>
           <a:prstGeom prst="rect">
@@ -13248,26 +13376,61 @@
           <a:p>
             <a:pPr algn="l"/>
             <a:r>
+              <a:rPr sz="1300" b="1">
+                <a:solidFill>
+                  <a:srgbClr val="E8A23A"/>
+                </a:solidFill>
+                <a:latin typeface="Calibri"/>
+              </a:rPr>
+              <a:t>example  (04_cmp_jmp)</a:t>
+            </a:r>
+          </a:p>
+        </p:txBody>
+      </p:sp>
+      <p:sp>
+        <p:nvSpPr>
+          <p:cNvPr id="7" name="TextBox 6"/>
+          <p:cNvSpPr txBox="1"/>
+          <p:nvPr/>
+        </p:nvSpPr>
+        <p:spPr>
+          <a:xfrm>
+            <a:off x="594360" y="1664208"/>
+            <a:ext cx="2743200" cy="228600"/>
+          </a:xfrm>
+          <a:prstGeom prst="rect">
+            <a:avLst/>
+          </a:prstGeom>
+          <a:noFill/>
+        </p:spPr>
+        <p:txBody>
+          <a:bodyPr wrap="square">
+            <a:spAutoFit/>
+          </a:bodyPr>
+          <a:lstStyle/>
+          <a:p>
+            <a:pPr algn="l"/>
+            <a:r>
               <a:rPr sz="1200" b="1">
                 <a:solidFill>
-                  <a:srgbClr val="E8A23A"/>
-                </a:solidFill>
-                <a:latin typeface="Calibri"/>
-              </a:rPr>
-              <a:t>example  (04_cmp_jmp)</a:t>
-            </a:r>
-          </a:p>
-        </p:txBody>
-      </p:sp>
-      <p:sp>
-        <p:nvSpPr>
-          <p:cNvPr id="7" name="TextBox 6"/>
-          <p:cNvSpPr txBox="1"/>
-          <p:nvPr/>
-        </p:nvSpPr>
-        <p:spPr>
-          <a:xfrm>
-            <a:off x="594360" y="1554480"/>
+                  <a:srgbClr val="B0B0B0"/>
+                </a:solidFill>
+                <a:latin typeface="Calibri"/>
+              </a:rPr>
+              <a:t>asm</a:t>
+            </a:r>
+          </a:p>
+        </p:txBody>
+      </p:sp>
+      <p:sp>
+        <p:nvSpPr>
+          <p:cNvPr id="8" name="TextBox 7"/>
+          <p:cNvSpPr txBox="1"/>
+          <p:nvPr/>
+        </p:nvSpPr>
+        <p:spPr>
+          <a:xfrm>
+            <a:off x="3383280" y="1664208"/>
             <a:ext cx="2743200" cy="228600"/>
           </a:xfrm>
           <a:prstGeom prst="rect">
@@ -13283,47 +13446,12 @@
           <a:p>
             <a:pPr algn="l"/>
             <a:r>
-              <a:rPr sz="1100" b="1">
+              <a:rPr sz="1200" b="1">
                 <a:solidFill>
                   <a:srgbClr val="B0B0B0"/>
                 </a:solidFill>
                 <a:latin typeface="Calibri"/>
               </a:rPr>
-              <a:t>asm</a:t>
-            </a:r>
-          </a:p>
-        </p:txBody>
-      </p:sp>
-      <p:sp>
-        <p:nvSpPr>
-          <p:cNvPr id="8" name="TextBox 7"/>
-          <p:cNvSpPr txBox="1"/>
-          <p:nvPr/>
-        </p:nvSpPr>
-        <p:spPr>
-          <a:xfrm>
-            <a:off x="3383280" y="1554480"/>
-            <a:ext cx="2743200" cy="228600"/>
-          </a:xfrm>
-          <a:prstGeom prst="rect">
-            <a:avLst/>
-          </a:prstGeom>
-          <a:noFill/>
-        </p:spPr>
-        <p:txBody>
-          <a:bodyPr wrap="square">
-            <a:spAutoFit/>
-          </a:bodyPr>
-          <a:lstStyle/>
-          <a:p>
-            <a:pPr algn="l"/>
-            <a:r>
-              <a:rPr sz="1100" b="1">
-                <a:solidFill>
-                  <a:srgbClr val="B0B0B0"/>
-                </a:solidFill>
-                <a:latin typeface="Calibri"/>
-              </a:rPr>
               <a:t>closest C</a:t>
             </a:r>
           </a:p>
@@ -13337,28 +13465,168 @@
         </p:nvSpPr>
         <p:spPr>
           <a:xfrm>
-            <a:off x="594360" y="1874519"/>
-            <a:ext cx="2743200" cy="411480"/>
-          </a:xfrm>
-          <a:prstGeom prst="rect">
-            <a:avLst/>
-          </a:prstGeom>
-          <a:noFill/>
-        </p:spPr>
-        <p:txBody>
-          <a:bodyPr wrap="square">
-            <a:spAutoFit/>
-          </a:bodyPr>
-          <a:lstStyle/>
-          <a:p>
-            <a:pPr algn="l"/>
-            <a:r>
-              <a:rPr sz="1500" b="1">
+            <a:off x="594360" y="2011680"/>
+            <a:ext cx="2743200" cy="457200"/>
+          </a:xfrm>
+          <a:prstGeom prst="rect">
+            <a:avLst/>
+          </a:prstGeom>
+          <a:noFill/>
+        </p:spPr>
+        <p:txBody>
+          <a:bodyPr wrap="square">
+            <a:spAutoFit/>
+          </a:bodyPr>
+          <a:lstStyle/>
+          <a:p>
+            <a:pPr algn="l"/>
+            <a:r>
+              <a:rPr sz="1600" b="1">
                 <a:solidFill>
                   <a:srgbClr val="7CDA6A"/>
                 </a:solidFill>
                 <a:latin typeface="Consolas"/>
               </a:rPr>
+              <a:t>mov eax, 5</a:t>
+            </a:r>
+          </a:p>
+        </p:txBody>
+      </p:sp>
+      <p:sp>
+        <p:nvSpPr>
+          <p:cNvPr id="10" name="TextBox 9"/>
+          <p:cNvSpPr txBox="1"/>
+          <p:nvPr/>
+        </p:nvSpPr>
+        <p:spPr>
+          <a:xfrm>
+            <a:off x="3383280" y="2011680"/>
+            <a:ext cx="2834640" cy="457200"/>
+          </a:xfrm>
+          <a:prstGeom prst="rect">
+            <a:avLst/>
+          </a:prstGeom>
+          <a:noFill/>
+        </p:spPr>
+        <p:txBody>
+          <a:bodyPr wrap="square">
+            <a:spAutoFit/>
+          </a:bodyPr>
+          <a:lstStyle/>
+          <a:p>
+            <a:pPr algn="l"/>
+            <a:r>
+              <a:rPr sz="1500" b="0">
+                <a:solidFill>
+                  <a:srgbClr val="F2F2F2"/>
+                </a:solidFill>
+                <a:latin typeface="Consolas"/>
+              </a:rPr>
+              <a:t>eax = 5;</a:t>
+            </a:r>
+          </a:p>
+        </p:txBody>
+      </p:sp>
+      <p:sp>
+        <p:nvSpPr>
+          <p:cNvPr id="11" name="TextBox 10"/>
+          <p:cNvSpPr txBox="1"/>
+          <p:nvPr/>
+        </p:nvSpPr>
+        <p:spPr>
+          <a:xfrm>
+            <a:off x="594360" y="2633472"/>
+            <a:ext cx="2743200" cy="457200"/>
+          </a:xfrm>
+          <a:prstGeom prst="rect">
+            <a:avLst/>
+          </a:prstGeom>
+          <a:noFill/>
+        </p:spPr>
+        <p:txBody>
+          <a:bodyPr wrap="square">
+            <a:spAutoFit/>
+          </a:bodyPr>
+          <a:lstStyle/>
+          <a:p>
+            <a:pPr algn="l"/>
+            <a:r>
+              <a:rPr sz="1600" b="1">
+                <a:solidFill>
+                  <a:srgbClr val="7CDA6A"/>
+                </a:solidFill>
+                <a:latin typeface="Consolas"/>
+              </a:rPr>
+              <a:t>mov ebx, 5</a:t>
+            </a:r>
+          </a:p>
+        </p:txBody>
+      </p:sp>
+      <p:sp>
+        <p:nvSpPr>
+          <p:cNvPr id="12" name="TextBox 11"/>
+          <p:cNvSpPr txBox="1"/>
+          <p:nvPr/>
+        </p:nvSpPr>
+        <p:spPr>
+          <a:xfrm>
+            <a:off x="3383280" y="2633472"/>
+            <a:ext cx="2834640" cy="457200"/>
+          </a:xfrm>
+          <a:prstGeom prst="rect">
+            <a:avLst/>
+          </a:prstGeom>
+          <a:noFill/>
+        </p:spPr>
+        <p:txBody>
+          <a:bodyPr wrap="square">
+            <a:spAutoFit/>
+          </a:bodyPr>
+          <a:lstStyle/>
+          <a:p>
+            <a:pPr algn="l"/>
+            <a:r>
+              <a:rPr sz="1500" b="0">
+                <a:solidFill>
+                  <a:srgbClr val="F2F2F2"/>
+                </a:solidFill>
+                <a:latin typeface="Consolas"/>
+              </a:rPr>
+              <a:t>ebx = 5;</a:t>
+            </a:r>
+          </a:p>
+        </p:txBody>
+      </p:sp>
+      <p:sp>
+        <p:nvSpPr>
+          <p:cNvPr id="13" name="TextBox 12"/>
+          <p:cNvSpPr txBox="1"/>
+          <p:nvPr/>
+        </p:nvSpPr>
+        <p:spPr>
+          <a:xfrm>
+            <a:off x="594360" y="3255264"/>
+            <a:ext cx="2743200" cy="457200"/>
+          </a:xfrm>
+          <a:prstGeom prst="rect">
+            <a:avLst/>
+          </a:prstGeom>
+          <a:noFill/>
+        </p:spPr>
+        <p:txBody>
+          <a:bodyPr wrap="square">
+            <a:spAutoFit/>
+          </a:bodyPr>
+          <a:lstStyle/>
+          <a:p>
+            <a:pPr algn="l"/>
+            <a:r>
+              <a:rPr sz="1600" b="1">
+                <a:solidFill>
+                  <a:srgbClr val="7CDA6A"/>
+                </a:solidFill>
+                <a:latin typeface="Consolas"/>
+              </a:rPr>
               <a:t>cmp eax, ebx</a:t>
             </a:r>
           </a:p>
@@ -13366,259 +13634,259 @@
       </p:sp>
       <p:sp>
         <p:nvSpPr>
-          <p:cNvPr id="10" name="TextBox 9"/>
-          <p:cNvSpPr txBox="1"/>
-          <p:nvPr/>
-        </p:nvSpPr>
-        <p:spPr>
-          <a:xfrm>
-            <a:off x="3383280" y="1874519"/>
-            <a:ext cx="2834640" cy="411480"/>
-          </a:xfrm>
-          <a:prstGeom prst="rect">
-            <a:avLst/>
-          </a:prstGeom>
-          <a:noFill/>
-        </p:spPr>
-        <p:txBody>
-          <a:bodyPr wrap="square">
-            <a:spAutoFit/>
-          </a:bodyPr>
-          <a:lstStyle/>
-          <a:p>
-            <a:pPr algn="l"/>
-            <a:r>
-              <a:rPr sz="1400" b="0">
+          <p:cNvPr id="14" name="TextBox 13"/>
+          <p:cNvSpPr txBox="1"/>
+          <p:nvPr/>
+        </p:nvSpPr>
+        <p:spPr>
+          <a:xfrm>
+            <a:off x="3383280" y="3255264"/>
+            <a:ext cx="2834640" cy="457200"/>
+          </a:xfrm>
+          <a:prstGeom prst="rect">
+            <a:avLst/>
+          </a:prstGeom>
+          <a:noFill/>
+        </p:spPr>
+        <p:txBody>
+          <a:bodyPr wrap="square">
+            <a:spAutoFit/>
+          </a:bodyPr>
+          <a:lstStyle/>
+          <a:p>
+            <a:pPr algn="l"/>
+            <a:r>
+              <a:rPr sz="1500" b="0">
                 <a:solidFill>
                   <a:srgbClr val="F2F2F2"/>
                 </a:solidFill>
                 <a:latin typeface="Consolas"/>
               </a:rPr>
-              <a:t>/* ZF if equal */</a:t>
-            </a:r>
-          </a:p>
-        </p:txBody>
-      </p:sp>
-      <p:sp>
-        <p:nvSpPr>
-          <p:cNvPr id="11" name="TextBox 10"/>
-          <p:cNvSpPr txBox="1"/>
-          <p:nvPr/>
-        </p:nvSpPr>
-        <p:spPr>
-          <a:xfrm>
-            <a:off x="594360" y="2441448"/>
-            <a:ext cx="2743200" cy="411480"/>
-          </a:xfrm>
-          <a:prstGeom prst="rect">
-            <a:avLst/>
-          </a:prstGeom>
-          <a:noFill/>
-        </p:spPr>
-        <p:txBody>
-          <a:bodyPr wrap="square">
-            <a:spAutoFit/>
-          </a:bodyPr>
-          <a:lstStyle/>
-          <a:p>
-            <a:pPr algn="l"/>
-            <a:r>
-              <a:rPr sz="1500" b="1">
+              <a:t>if (eax == ebx)</a:t>
+            </a:r>
+          </a:p>
+        </p:txBody>
+      </p:sp>
+      <p:sp>
+        <p:nvSpPr>
+          <p:cNvPr id="15" name="TextBox 14"/>
+          <p:cNvSpPr txBox="1"/>
+          <p:nvPr/>
+        </p:nvSpPr>
+        <p:spPr>
+          <a:xfrm>
+            <a:off x="594360" y="3877056"/>
+            <a:ext cx="2743200" cy="457200"/>
+          </a:xfrm>
+          <a:prstGeom prst="rect">
+            <a:avLst/>
+          </a:prstGeom>
+          <a:noFill/>
+        </p:spPr>
+        <p:txBody>
+          <a:bodyPr wrap="square">
+            <a:spAutoFit/>
+          </a:bodyPr>
+          <a:lstStyle/>
+          <a:p>
+            <a:pPr algn="l"/>
+            <a:r>
+              <a:rPr sz="1600" b="1">
                 <a:solidFill>
                   <a:srgbClr val="7CDA6A"/>
                 </a:solidFill>
                 <a:latin typeface="Consolas"/>
               </a:rPr>
-              <a:t>jmp label</a:t>
-            </a:r>
-          </a:p>
-        </p:txBody>
-      </p:sp>
-      <p:sp>
-        <p:nvSpPr>
-          <p:cNvPr id="12" name="TextBox 11"/>
-          <p:cNvSpPr txBox="1"/>
-          <p:nvPr/>
-        </p:nvSpPr>
-        <p:spPr>
-          <a:xfrm>
-            <a:off x="3383280" y="2441448"/>
-            <a:ext cx="2834640" cy="411480"/>
-          </a:xfrm>
-          <a:prstGeom prst="rect">
-            <a:avLst/>
-          </a:prstGeom>
-          <a:noFill/>
-        </p:spPr>
-        <p:txBody>
-          <a:bodyPr wrap="square">
-            <a:spAutoFit/>
-          </a:bodyPr>
-          <a:lstStyle/>
-          <a:p>
-            <a:pPr algn="l"/>
-            <a:r>
-              <a:rPr sz="1400" b="0">
+              <a:t>je same</a:t>
+            </a:r>
+          </a:p>
+        </p:txBody>
+      </p:sp>
+      <p:sp>
+        <p:nvSpPr>
+          <p:cNvPr id="16" name="TextBox 15"/>
+          <p:cNvSpPr txBox="1"/>
+          <p:nvPr/>
+        </p:nvSpPr>
+        <p:spPr>
+          <a:xfrm>
+            <a:off x="3383280" y="3877056"/>
+            <a:ext cx="2834640" cy="457200"/>
+          </a:xfrm>
+          <a:prstGeom prst="rect">
+            <a:avLst/>
+          </a:prstGeom>
+          <a:noFill/>
+        </p:spPr>
+        <p:txBody>
+          <a:bodyPr wrap="square">
+            <a:spAutoFit/>
+          </a:bodyPr>
+          <a:lstStyle/>
+          <a:p>
+            <a:pPr algn="l"/>
+            <a:r>
+              <a:rPr sz="1500" b="0">
                 <a:solidFill>
                   <a:srgbClr val="F2F2F2"/>
                 </a:solidFill>
                 <a:latin typeface="Consolas"/>
               </a:rPr>
-              <a:t>goto label;</a:t>
-            </a:r>
-          </a:p>
-        </p:txBody>
-      </p:sp>
-      <p:sp>
-        <p:nvSpPr>
-          <p:cNvPr id="13" name="TextBox 12"/>
-          <p:cNvSpPr txBox="1"/>
-          <p:nvPr/>
-        </p:nvSpPr>
-        <p:spPr>
-          <a:xfrm>
-            <a:off x="594360" y="3008376"/>
-            <a:ext cx="2743200" cy="411480"/>
-          </a:xfrm>
-          <a:prstGeom prst="rect">
-            <a:avLst/>
-          </a:prstGeom>
-          <a:noFill/>
-        </p:spPr>
-        <p:txBody>
-          <a:bodyPr wrap="square">
-            <a:spAutoFit/>
-          </a:bodyPr>
-          <a:lstStyle/>
-          <a:p>
-            <a:pPr algn="l"/>
-            <a:r>
-              <a:rPr sz="1500" b="1">
+              <a:t>goto same;</a:t>
+            </a:r>
+          </a:p>
+        </p:txBody>
+      </p:sp>
+      <p:sp>
+        <p:nvSpPr>
+          <p:cNvPr id="17" name="TextBox 16"/>
+          <p:cNvSpPr txBox="1"/>
+          <p:nvPr/>
+        </p:nvSpPr>
+        <p:spPr>
+          <a:xfrm>
+            <a:off x="594360" y="4498848"/>
+            <a:ext cx="2743200" cy="457200"/>
+          </a:xfrm>
+          <a:prstGeom prst="rect">
+            <a:avLst/>
+          </a:prstGeom>
+          <a:noFill/>
+        </p:spPr>
+        <p:txBody>
+          <a:bodyPr wrap="square">
+            <a:spAutoFit/>
+          </a:bodyPr>
+          <a:lstStyle/>
+          <a:p>
+            <a:pPr algn="l"/>
+            <a:r>
+              <a:rPr sz="1600" b="1">
                 <a:solidFill>
                   <a:srgbClr val="7CDA6A"/>
                 </a:solidFill>
                 <a:latin typeface="Consolas"/>
               </a:rPr>
-              <a:t>je  /  jz</a:t>
-            </a:r>
-          </a:p>
-        </p:txBody>
-      </p:sp>
-      <p:sp>
-        <p:nvSpPr>
-          <p:cNvPr id="14" name="TextBox 13"/>
-          <p:cNvSpPr txBox="1"/>
-          <p:nvPr/>
-        </p:nvSpPr>
-        <p:spPr>
-          <a:xfrm>
-            <a:off x="3383280" y="3008376"/>
-            <a:ext cx="2834640" cy="411480"/>
-          </a:xfrm>
-          <a:prstGeom prst="rect">
-            <a:avLst/>
-          </a:prstGeom>
-          <a:noFill/>
-        </p:spPr>
-        <p:txBody>
-          <a:bodyPr wrap="square">
-            <a:spAutoFit/>
-          </a:bodyPr>
-          <a:lstStyle/>
-          <a:p>
-            <a:pPr algn="l"/>
-            <a:r>
-              <a:rPr sz="1400" b="0">
+              <a:t>cmp ecx, 3</a:t>
+            </a:r>
+          </a:p>
+        </p:txBody>
+      </p:sp>
+      <p:sp>
+        <p:nvSpPr>
+          <p:cNvPr id="18" name="TextBox 17"/>
+          <p:cNvSpPr txBox="1"/>
+          <p:nvPr/>
+        </p:nvSpPr>
+        <p:spPr>
+          <a:xfrm>
+            <a:off x="3383280" y="4498848"/>
+            <a:ext cx="2834640" cy="457200"/>
+          </a:xfrm>
+          <a:prstGeom prst="rect">
+            <a:avLst/>
+          </a:prstGeom>
+          <a:noFill/>
+        </p:spPr>
+        <p:txBody>
+          <a:bodyPr wrap="square">
+            <a:spAutoFit/>
+          </a:bodyPr>
+          <a:lstStyle/>
+          <a:p>
+            <a:pPr algn="l"/>
+            <a:r>
+              <a:rPr sz="1500" b="0">
                 <a:solidFill>
                   <a:srgbClr val="F2F2F2"/>
                 </a:solidFill>
                 <a:latin typeface="Consolas"/>
               </a:rPr>
-              <a:t>if equal goto;</a:t>
-            </a:r>
-          </a:p>
-        </p:txBody>
-      </p:sp>
-      <p:sp>
-        <p:nvSpPr>
-          <p:cNvPr id="15" name="TextBox 14"/>
-          <p:cNvSpPr txBox="1"/>
-          <p:nvPr/>
-        </p:nvSpPr>
-        <p:spPr>
-          <a:xfrm>
-            <a:off x="594360" y="3575303"/>
-            <a:ext cx="2743200" cy="411480"/>
-          </a:xfrm>
-          <a:prstGeom prst="rect">
-            <a:avLst/>
-          </a:prstGeom>
-          <a:noFill/>
-        </p:spPr>
-        <p:txBody>
-          <a:bodyPr wrap="square">
-            <a:spAutoFit/>
-          </a:bodyPr>
-          <a:lstStyle/>
-          <a:p>
-            <a:pPr algn="l"/>
-            <a:r>
-              <a:rPr sz="1500" b="1">
+              <a:t>if (ecx != 3)</a:t>
+            </a:r>
+          </a:p>
+        </p:txBody>
+      </p:sp>
+      <p:sp>
+        <p:nvSpPr>
+          <p:cNvPr id="19" name="TextBox 18"/>
+          <p:cNvSpPr txBox="1"/>
+          <p:nvPr/>
+        </p:nvSpPr>
+        <p:spPr>
+          <a:xfrm>
+            <a:off x="594360" y="5120640"/>
+            <a:ext cx="2743200" cy="457200"/>
+          </a:xfrm>
+          <a:prstGeom prst="rect">
+            <a:avLst/>
+          </a:prstGeom>
+          <a:noFill/>
+        </p:spPr>
+        <p:txBody>
+          <a:bodyPr wrap="square">
+            <a:spAutoFit/>
+          </a:bodyPr>
+          <a:lstStyle/>
+          <a:p>
+            <a:pPr algn="l"/>
+            <a:r>
+              <a:rPr sz="1600" b="1">
                 <a:solidFill>
                   <a:srgbClr val="7CDA6A"/>
                 </a:solidFill>
                 <a:latin typeface="Consolas"/>
               </a:rPr>
-              <a:t>jne / jnz</a:t>
-            </a:r>
-          </a:p>
-        </p:txBody>
-      </p:sp>
-      <p:sp>
-        <p:nvSpPr>
-          <p:cNvPr id="16" name="TextBox 15"/>
-          <p:cNvSpPr txBox="1"/>
-          <p:nvPr/>
-        </p:nvSpPr>
-        <p:spPr>
-          <a:xfrm>
-            <a:off x="3383280" y="3575303"/>
-            <a:ext cx="2834640" cy="411480"/>
-          </a:xfrm>
-          <a:prstGeom prst="rect">
-            <a:avLst/>
-          </a:prstGeom>
-          <a:noFill/>
-        </p:spPr>
-        <p:txBody>
-          <a:bodyPr wrap="square">
-            <a:spAutoFit/>
-          </a:bodyPr>
-          <a:lstStyle/>
-          <a:p>
-            <a:pPr algn="l"/>
-            <a:r>
-              <a:rPr sz="1400" b="0">
+              <a:t>jne not_equal</a:t>
+            </a:r>
+          </a:p>
+        </p:txBody>
+      </p:sp>
+      <p:sp>
+        <p:nvSpPr>
+          <p:cNvPr id="20" name="TextBox 19"/>
+          <p:cNvSpPr txBox="1"/>
+          <p:nvPr/>
+        </p:nvSpPr>
+        <p:spPr>
+          <a:xfrm>
+            <a:off x="3383280" y="5120640"/>
+            <a:ext cx="2834640" cy="457200"/>
+          </a:xfrm>
+          <a:prstGeom prst="rect">
+            <a:avLst/>
+          </a:prstGeom>
+          <a:noFill/>
+        </p:spPr>
+        <p:txBody>
+          <a:bodyPr wrap="square">
+            <a:spAutoFit/>
+          </a:bodyPr>
+          <a:lstStyle/>
+          <a:p>
+            <a:pPr algn="l"/>
+            <a:r>
+              <a:rPr sz="1500" b="0">
                 <a:solidFill>
                   <a:srgbClr val="F2F2F2"/>
                 </a:solidFill>
                 <a:latin typeface="Consolas"/>
               </a:rPr>
-              <a:t>if not equal goto;</a:t>
-            </a:r>
-          </a:p>
-        </p:txBody>
-      </p:sp>
-      <p:sp>
-        <p:nvSpPr>
-          <p:cNvPr id="17" name="Rectangle 16"/>
+              <a:t>goto not_equal;</a:t>
+            </a:r>
+          </a:p>
+        </p:txBody>
+      </p:sp>
+      <p:sp>
+        <p:nvSpPr>
+          <p:cNvPr id="21" name="Rectangle 20"/>
           <p:cNvSpPr/>
           <p:nvPr/>
         </p:nvSpPr>
         <p:spPr>
           <a:xfrm>
-            <a:off x="6583680" y="1188720"/>
-            <a:ext cx="5166360" cy="3200400"/>
+            <a:off x="6583680" y="1234440"/>
+            <a:ext cx="5166360" cy="5029200"/>
           </a:xfrm>
           <a:prstGeom prst="rect">
             <a:avLst/>
@@ -13650,19 +13918,18 @@
           <a:lstStyle/>
           <a:p>
             <a:pPr algn="ctr"/>
-            <a:endParaRPr/>
-          </a:p>
-        </p:txBody>
-      </p:sp>
-      <p:sp>
-        <p:nvSpPr>
-          <p:cNvPr id="18" name="TextBox 17"/>
-          <p:cNvSpPr txBox="1"/>
-          <p:nvPr/>
-        </p:nvSpPr>
-        <p:spPr>
-          <a:xfrm>
-            <a:off x="6766560" y="1280160"/>
+          </a:p>
+        </p:txBody>
+      </p:sp>
+      <p:sp>
+        <p:nvSpPr>
+          <p:cNvPr id="22" name="TextBox 21"/>
+          <p:cNvSpPr txBox="1"/>
+          <p:nvPr/>
+        </p:nvSpPr>
+        <p:spPr>
+          <a:xfrm>
+            <a:off x="6766560" y="1353312"/>
             <a:ext cx="4800600" cy="256032"/>
           </a:xfrm>
           <a:prstGeom prst="rect">
@@ -13678,7 +13945,7 @@
           <a:p>
             <a:pPr algn="l"/>
             <a:r>
-              <a:rPr sz="1200" b="1">
+              <a:rPr sz="1300" b="1">
                 <a:solidFill>
                   <a:srgbClr val="E8A23A"/>
                 </a:solidFill>
@@ -13691,163 +13958,45 @@
       </p:sp>
       <p:sp>
         <p:nvSpPr>
-          <p:cNvPr id="19" name="TextBox 18"/>
-          <p:cNvSpPr txBox="1"/>
-          <p:nvPr/>
-        </p:nvSpPr>
-        <p:spPr>
-          <a:xfrm>
-            <a:off x="6766560" y="1645920"/>
-            <a:ext cx="4800600" cy="2468880"/>
-          </a:xfrm>
-          <a:prstGeom prst="rect">
-            <a:avLst/>
-          </a:prstGeom>
-          <a:noFill/>
-        </p:spPr>
-        <p:txBody>
-          <a:bodyPr wrap="square">
-            <a:spAutoFit/>
-          </a:bodyPr>
-          <a:lstStyle/>
-          <a:p>
-            <a:pPr algn="l"/>
-            <a:r>
-              <a:rPr sz="1500" b="0">
+          <p:cNvPr id="23" name="TextBox 22"/>
+          <p:cNvSpPr txBox="1"/>
+          <p:nvPr/>
+        </p:nvSpPr>
+        <p:spPr>
+          <a:xfrm>
+            <a:off x="6766560" y="1783080"/>
+            <a:ext cx="4800600" cy="4206240"/>
+          </a:xfrm>
+          <a:prstGeom prst="rect">
+            <a:avLst/>
+          </a:prstGeom>
+          <a:noFill/>
+        </p:spPr>
+        <p:txBody>
+          <a:bodyPr wrap="square">
+            <a:spAutoFit/>
+          </a:bodyPr>
+          <a:lstStyle/>
+          <a:p>
+            <a:pPr algn="l"/>
+            <a:r>
+              <a:rPr sz="1600" b="0">
                 <a:solidFill>
                   <a:srgbClr val="F2F2F2"/>
                 </a:solidFill>
                 <a:latin typeface="Calibri"/>
               </a:rPr>
-              <a:t>Different values / branches.
-At label check:
+              <a:t>Compares two numbers, takes je or jne.
+break check
   eax = ?
-  which path ran?</a:t>
-            </a:r>
-          </a:p>
-        </p:txBody>
-      </p:sp>
-      <p:sp>
-        <p:nvSpPr>
-          <p:cNvPr id="20" name="Rectangle 19"/>
-          <p:cNvSpPr/>
-          <p:nvPr/>
-        </p:nvSpPr>
-        <p:spPr>
-          <a:xfrm>
-            <a:off x="457200" y="4572000"/>
-            <a:ext cx="11292840" cy="1691640"/>
-          </a:xfrm>
-          <a:prstGeom prst="rect">
-            <a:avLst/>
-          </a:prstGeom>
-          <a:solidFill>
-            <a:srgbClr val="242424"/>
-          </a:solidFill>
-          <a:ln>
-            <a:noFill/>
-          </a:ln>
-          <a:effectLst/>
-        </p:spPr>
-        <p:style>
-          <a:lnRef idx="1">
-            <a:schemeClr val="accent1"/>
-          </a:lnRef>
-          <a:fillRef idx="3">
-            <a:schemeClr val="accent1"/>
-          </a:fillRef>
-          <a:effectRef idx="2">
-            <a:schemeClr val="accent1"/>
-          </a:effectRef>
-          <a:fontRef idx="minor">
-            <a:schemeClr val="lt1"/>
-          </a:fontRef>
-        </p:style>
-        <p:txBody>
-          <a:bodyPr rtlCol="0" anchor="ctr"/>
-          <a:lstStyle/>
-          <a:p>
-            <a:pPr algn="ctr"/>
-            <a:endParaRPr/>
-          </a:p>
-        </p:txBody>
-      </p:sp>
-      <p:sp>
-        <p:nvSpPr>
-          <p:cNvPr id="21" name="TextBox 20"/>
-          <p:cNvSpPr txBox="1"/>
-          <p:nvPr/>
-        </p:nvSpPr>
-        <p:spPr>
-          <a:xfrm>
-            <a:off x="640080" y="4663440"/>
-            <a:ext cx="10972800" cy="256032"/>
-          </a:xfrm>
-          <a:prstGeom prst="rect">
-            <a:avLst/>
-          </a:prstGeom>
-          <a:noFill/>
-        </p:spPr>
-        <p:txBody>
-          <a:bodyPr wrap="square">
-            <a:spAutoFit/>
-          </a:bodyPr>
-          <a:lstStyle/>
-          <a:p>
-            <a:pPr algn="l"/>
-            <a:r>
-              <a:rPr sz="1300" b="1">
-                <a:solidFill>
-                  <a:srgbClr val="E8A23A"/>
-                </a:solidFill>
-                <a:latin typeface="Calibri"/>
-              </a:rPr>
-              <a:t>gdb on the challenge binary (not the example)</a:t>
-            </a:r>
-          </a:p>
-        </p:txBody>
-      </p:sp>
-      <p:sp>
-        <p:nvSpPr>
-          <p:cNvPr id="22" name="TextBox 21"/>
-          <p:cNvSpPr txBox="1"/>
-          <p:nvPr/>
-        </p:nvSpPr>
-        <p:spPr>
-          <a:xfrm>
-            <a:off x="640080" y="4983480"/>
-            <a:ext cx="10972800" cy="1143000"/>
-          </a:xfrm>
-          <a:prstGeom prst="rect">
-            <a:avLst/>
-          </a:prstGeom>
-          <a:noFill/>
-        </p:spPr>
-        <p:txBody>
-          <a:bodyPr wrap="square">
-            <a:spAutoFit/>
-          </a:bodyPr>
-          <a:lstStyle/>
-          <a:p>
-            <a:pPr algn="l"/>
-            <a:r>
-              <a:rPr sz="1500" b="1">
-                <a:solidFill>
-                  <a:srgbClr val="7CDA6A"/>
-                </a:solidFill>
-                <a:latin typeface="Consolas"/>
-              </a:rPr>
-              <a:t>gdb ./ch_jmp
-break check
-run
-print $eax</a:t>
-            </a:r>
-          </a:p>
-        </p:txBody>
-      </p:sp>
-      <p:sp>
-        <p:nvSpPr>
-          <p:cNvPr id="23" name="Rectangle 22"/>
+  equal path or not_equal?</a:t>
+            </a:r>
+          </a:p>
+        </p:txBody>
+      </p:sp>
+      <p:sp>
+        <p:nvSpPr>
+          <p:cNvPr id="24" name="Rectangle 23"/>
           <p:cNvSpPr/>
           <p:nvPr/>
         </p:nvSpPr>
@@ -13886,13 +14035,12 @@
           <a:lstStyle/>
           <a:p>
             <a:pPr algn="ctr"/>
-            <a:endParaRPr/>
-          </a:p>
-        </p:txBody>
-      </p:sp>
-      <p:sp>
-        <p:nvSpPr>
-          <p:cNvPr id="24" name="TextBox 23"/>
+          </a:p>
+        </p:txBody>
+      </p:sp>
+      <p:sp>
+        <p:nvSpPr>
+          <p:cNvPr id="25" name="TextBox 24"/>
           <p:cNvSpPr txBox="1"/>
           <p:nvPr/>
         </p:nvSpPr>
@@ -13927,7 +14075,7 @@
       </p:sp>
       <p:sp>
         <p:nvSpPr>
-          <p:cNvPr id="25" name="TextBox 24"/>
+          <p:cNvPr id="26" name="TextBox 25"/>
           <p:cNvSpPr txBox="1"/>
           <p:nvPr/>
         </p:nvSpPr>
@@ -14034,7 +14182,6 @@
           <a:lstStyle/>
           <a:p>
             <a:pPr algn="ctr"/>
-            <a:endParaRPr/>
           </a:p>
         </p:txBody>
       </p:sp>
@@ -14116,8 +14263,8 @@
         </p:nvSpPr>
         <p:spPr>
           <a:xfrm>
-            <a:off x="457200" y="1188720"/>
-            <a:ext cx="5943600" cy="3200400"/>
+            <a:off x="457200" y="1234440"/>
+            <a:ext cx="5943600" cy="5029200"/>
           </a:xfrm>
           <a:prstGeom prst="rect">
             <a:avLst/>
@@ -14149,7 +14296,6 @@
           <a:lstStyle/>
           <a:p>
             <a:pPr algn="ctr"/>
-            <a:endParaRPr/>
           </a:p>
         </p:txBody>
       </p:sp>
@@ -14161,7 +14307,7 @@
         </p:nvSpPr>
         <p:spPr>
           <a:xfrm>
-            <a:off x="594360" y="1280160"/>
+            <a:off x="594360" y="1353312"/>
             <a:ext cx="5577840" cy="256032"/>
           </a:xfrm>
           <a:prstGeom prst="rect">
@@ -14177,26 +14323,61 @@
           <a:p>
             <a:pPr algn="l"/>
             <a:r>
+              <a:rPr sz="1300" b="1">
+                <a:solidFill>
+                  <a:srgbClr val="E8A23A"/>
+                </a:solidFill>
+                <a:latin typeface="Calibri"/>
+              </a:rPr>
+              <a:t>example  (05_stack)</a:t>
+            </a:r>
+          </a:p>
+        </p:txBody>
+      </p:sp>
+      <p:sp>
+        <p:nvSpPr>
+          <p:cNvPr id="7" name="TextBox 6"/>
+          <p:cNvSpPr txBox="1"/>
+          <p:nvPr/>
+        </p:nvSpPr>
+        <p:spPr>
+          <a:xfrm>
+            <a:off x="594360" y="1664208"/>
+            <a:ext cx="2743200" cy="228600"/>
+          </a:xfrm>
+          <a:prstGeom prst="rect">
+            <a:avLst/>
+          </a:prstGeom>
+          <a:noFill/>
+        </p:spPr>
+        <p:txBody>
+          <a:bodyPr wrap="square">
+            <a:spAutoFit/>
+          </a:bodyPr>
+          <a:lstStyle/>
+          <a:p>
+            <a:pPr algn="l"/>
+            <a:r>
               <a:rPr sz="1200" b="1">
                 <a:solidFill>
-                  <a:srgbClr val="E8A23A"/>
-                </a:solidFill>
-                <a:latin typeface="Calibri"/>
-              </a:rPr>
-              <a:t>example  (05_stack)</a:t>
-            </a:r>
-          </a:p>
-        </p:txBody>
-      </p:sp>
-      <p:sp>
-        <p:nvSpPr>
-          <p:cNvPr id="7" name="TextBox 6"/>
-          <p:cNvSpPr txBox="1"/>
-          <p:nvPr/>
-        </p:nvSpPr>
-        <p:spPr>
-          <a:xfrm>
-            <a:off x="594360" y="1554480"/>
+                  <a:srgbClr val="B0B0B0"/>
+                </a:solidFill>
+                <a:latin typeface="Calibri"/>
+              </a:rPr>
+              <a:t>asm</a:t>
+            </a:r>
+          </a:p>
+        </p:txBody>
+      </p:sp>
+      <p:sp>
+        <p:nvSpPr>
+          <p:cNvPr id="8" name="TextBox 7"/>
+          <p:cNvSpPr txBox="1"/>
+          <p:nvPr/>
+        </p:nvSpPr>
+        <p:spPr>
+          <a:xfrm>
+            <a:off x="3383280" y="1664208"/>
             <a:ext cx="2743200" cy="228600"/>
           </a:xfrm>
           <a:prstGeom prst="rect">
@@ -14212,47 +14393,12 @@
           <a:p>
             <a:pPr algn="l"/>
             <a:r>
-              <a:rPr sz="1100" b="1">
+              <a:rPr sz="1200" b="1">
                 <a:solidFill>
                   <a:srgbClr val="B0B0B0"/>
                 </a:solidFill>
                 <a:latin typeface="Calibri"/>
               </a:rPr>
-              <a:t>asm</a:t>
-            </a:r>
-          </a:p>
-        </p:txBody>
-      </p:sp>
-      <p:sp>
-        <p:nvSpPr>
-          <p:cNvPr id="8" name="TextBox 7"/>
-          <p:cNvSpPr txBox="1"/>
-          <p:nvPr/>
-        </p:nvSpPr>
-        <p:spPr>
-          <a:xfrm>
-            <a:off x="3383280" y="1554480"/>
-            <a:ext cx="2743200" cy="228600"/>
-          </a:xfrm>
-          <a:prstGeom prst="rect">
-            <a:avLst/>
-          </a:prstGeom>
-          <a:noFill/>
-        </p:spPr>
-        <p:txBody>
-          <a:bodyPr wrap="square">
-            <a:spAutoFit/>
-          </a:bodyPr>
-          <a:lstStyle/>
-          <a:p>
-            <a:pPr algn="l"/>
-            <a:r>
-              <a:rPr sz="1100" b="1">
-                <a:solidFill>
-                  <a:srgbClr val="B0B0B0"/>
-                </a:solidFill>
-                <a:latin typeface="Calibri"/>
-              </a:rPr>
               <a:t>closest C</a:t>
             </a:r>
           </a:p>
@@ -14266,28 +14412,168 @@
         </p:nvSpPr>
         <p:spPr>
           <a:xfrm>
-            <a:off x="594360" y="1874519"/>
-            <a:ext cx="2743200" cy="411480"/>
-          </a:xfrm>
-          <a:prstGeom prst="rect">
-            <a:avLst/>
-          </a:prstGeom>
-          <a:noFill/>
-        </p:spPr>
-        <p:txBody>
-          <a:bodyPr wrap="square">
-            <a:spAutoFit/>
-          </a:bodyPr>
-          <a:lstStyle/>
-          <a:p>
-            <a:pPr algn="l"/>
-            <a:r>
-              <a:rPr sz="1500" b="1">
+            <a:off x="594360" y="2011680"/>
+            <a:ext cx="2743200" cy="457200"/>
+          </a:xfrm>
+          <a:prstGeom prst="rect">
+            <a:avLst/>
+          </a:prstGeom>
+          <a:noFill/>
+        </p:spPr>
+        <p:txBody>
+          <a:bodyPr wrap="square">
+            <a:spAutoFit/>
+          </a:bodyPr>
+          <a:lstStyle/>
+          <a:p>
+            <a:pPr algn="l"/>
+            <a:r>
+              <a:rPr sz="1600" b="1">
                 <a:solidFill>
                   <a:srgbClr val="7CDA6A"/>
                 </a:solidFill>
                 <a:latin typeface="Consolas"/>
               </a:rPr>
+              <a:t>mov eax, 0x1111</a:t>
+            </a:r>
+          </a:p>
+        </p:txBody>
+      </p:sp>
+      <p:sp>
+        <p:nvSpPr>
+          <p:cNvPr id="10" name="TextBox 9"/>
+          <p:cNvSpPr txBox="1"/>
+          <p:nvPr/>
+        </p:nvSpPr>
+        <p:spPr>
+          <a:xfrm>
+            <a:off x="3383280" y="2011680"/>
+            <a:ext cx="2834640" cy="457200"/>
+          </a:xfrm>
+          <a:prstGeom prst="rect">
+            <a:avLst/>
+          </a:prstGeom>
+          <a:noFill/>
+        </p:spPr>
+        <p:txBody>
+          <a:bodyPr wrap="square">
+            <a:spAutoFit/>
+          </a:bodyPr>
+          <a:lstStyle/>
+          <a:p>
+            <a:pPr algn="l"/>
+            <a:r>
+              <a:rPr sz="1500" b="0">
+                <a:solidFill>
+                  <a:srgbClr val="F2F2F2"/>
+                </a:solidFill>
+                <a:latin typeface="Consolas"/>
+              </a:rPr>
+              <a:t>eax = 0x1111;</a:t>
+            </a:r>
+          </a:p>
+        </p:txBody>
+      </p:sp>
+      <p:sp>
+        <p:nvSpPr>
+          <p:cNvPr id="11" name="TextBox 10"/>
+          <p:cNvSpPr txBox="1"/>
+          <p:nvPr/>
+        </p:nvSpPr>
+        <p:spPr>
+          <a:xfrm>
+            <a:off x="594360" y="2633472"/>
+            <a:ext cx="2743200" cy="457200"/>
+          </a:xfrm>
+          <a:prstGeom prst="rect">
+            <a:avLst/>
+          </a:prstGeom>
+          <a:noFill/>
+        </p:spPr>
+        <p:txBody>
+          <a:bodyPr wrap="square">
+            <a:spAutoFit/>
+          </a:bodyPr>
+          <a:lstStyle/>
+          <a:p>
+            <a:pPr algn="l"/>
+            <a:r>
+              <a:rPr sz="1600" b="1">
+                <a:solidFill>
+                  <a:srgbClr val="7CDA6A"/>
+                </a:solidFill>
+                <a:latin typeface="Consolas"/>
+              </a:rPr>
+              <a:t>mov ebx, 0x2222</a:t>
+            </a:r>
+          </a:p>
+        </p:txBody>
+      </p:sp>
+      <p:sp>
+        <p:nvSpPr>
+          <p:cNvPr id="12" name="TextBox 11"/>
+          <p:cNvSpPr txBox="1"/>
+          <p:nvPr/>
+        </p:nvSpPr>
+        <p:spPr>
+          <a:xfrm>
+            <a:off x="3383280" y="2633472"/>
+            <a:ext cx="2834640" cy="457200"/>
+          </a:xfrm>
+          <a:prstGeom prst="rect">
+            <a:avLst/>
+          </a:prstGeom>
+          <a:noFill/>
+        </p:spPr>
+        <p:txBody>
+          <a:bodyPr wrap="square">
+            <a:spAutoFit/>
+          </a:bodyPr>
+          <a:lstStyle/>
+          <a:p>
+            <a:pPr algn="l"/>
+            <a:r>
+              <a:rPr sz="1500" b="0">
+                <a:solidFill>
+                  <a:srgbClr val="F2F2F2"/>
+                </a:solidFill>
+                <a:latin typeface="Consolas"/>
+              </a:rPr>
+              <a:t>ebx = 0x2222;</a:t>
+            </a:r>
+          </a:p>
+        </p:txBody>
+      </p:sp>
+      <p:sp>
+        <p:nvSpPr>
+          <p:cNvPr id="13" name="TextBox 12"/>
+          <p:cNvSpPr txBox="1"/>
+          <p:nvPr/>
+        </p:nvSpPr>
+        <p:spPr>
+          <a:xfrm>
+            <a:off x="594360" y="3255264"/>
+            <a:ext cx="2743200" cy="457200"/>
+          </a:xfrm>
+          <a:prstGeom prst="rect">
+            <a:avLst/>
+          </a:prstGeom>
+          <a:noFill/>
+        </p:spPr>
+        <p:txBody>
+          <a:bodyPr wrap="square">
+            <a:spAutoFit/>
+          </a:bodyPr>
+          <a:lstStyle/>
+          <a:p>
+            <a:pPr algn="l"/>
+            <a:r>
+              <a:rPr sz="1600" b="1">
+                <a:solidFill>
+                  <a:srgbClr val="7CDA6A"/>
+                </a:solidFill>
+                <a:latin typeface="Consolas"/>
+              </a:rPr>
               <a:t>push eax</a:t>
             </a:r>
           </a:p>
@@ -14295,69 +14581,139 @@
       </p:sp>
       <p:sp>
         <p:nvSpPr>
-          <p:cNvPr id="10" name="TextBox 9"/>
-          <p:cNvSpPr txBox="1"/>
-          <p:nvPr/>
-        </p:nvSpPr>
-        <p:spPr>
-          <a:xfrm>
-            <a:off x="3383280" y="1874519"/>
-            <a:ext cx="2834640" cy="411480"/>
-          </a:xfrm>
-          <a:prstGeom prst="rect">
-            <a:avLst/>
-          </a:prstGeom>
-          <a:noFill/>
-        </p:spPr>
-        <p:txBody>
-          <a:bodyPr wrap="square">
-            <a:spAutoFit/>
-          </a:bodyPr>
-          <a:lstStyle/>
-          <a:p>
-            <a:pPr algn="l"/>
-            <a:r>
-              <a:rPr sz="1400" b="0">
+          <p:cNvPr id="14" name="TextBox 13"/>
+          <p:cNvSpPr txBox="1"/>
+          <p:nvPr/>
+        </p:nvSpPr>
+        <p:spPr>
+          <a:xfrm>
+            <a:off x="3383280" y="3255264"/>
+            <a:ext cx="2834640" cy="457200"/>
+          </a:xfrm>
+          <a:prstGeom prst="rect">
+            <a:avLst/>
+          </a:prstGeom>
+          <a:noFill/>
+        </p:spPr>
+        <p:txBody>
+          <a:bodyPr wrap="square">
+            <a:spAutoFit/>
+          </a:bodyPr>
+          <a:lstStyle/>
+          <a:p>
+            <a:pPr algn="l"/>
+            <a:r>
+              <a:rPr sz="1500" b="0">
                 <a:solidFill>
                   <a:srgbClr val="F2F2F2"/>
                 </a:solidFill>
                 <a:latin typeface="Consolas"/>
               </a:rPr>
-              <a:t>/* push onto stack */</a:t>
-            </a:r>
-          </a:p>
-        </p:txBody>
-      </p:sp>
-      <p:sp>
-        <p:nvSpPr>
-          <p:cNvPr id="11" name="TextBox 10"/>
-          <p:cNvSpPr txBox="1"/>
-          <p:nvPr/>
-        </p:nvSpPr>
-        <p:spPr>
-          <a:xfrm>
-            <a:off x="594360" y="2441448"/>
-            <a:ext cx="2743200" cy="411480"/>
-          </a:xfrm>
-          <a:prstGeom prst="rect">
-            <a:avLst/>
-          </a:prstGeom>
-          <a:noFill/>
-        </p:spPr>
-        <p:txBody>
-          <a:bodyPr wrap="square">
-            <a:spAutoFit/>
-          </a:bodyPr>
-          <a:lstStyle/>
-          <a:p>
-            <a:pPr algn="l"/>
-            <a:r>
-              <a:rPr sz="1500" b="1">
+              <a:t>save eax</a:t>
+            </a:r>
+          </a:p>
+        </p:txBody>
+      </p:sp>
+      <p:sp>
+        <p:nvSpPr>
+          <p:cNvPr id="15" name="TextBox 14"/>
+          <p:cNvSpPr txBox="1"/>
+          <p:nvPr/>
+        </p:nvSpPr>
+        <p:spPr>
+          <a:xfrm>
+            <a:off x="594360" y="3877056"/>
+            <a:ext cx="2743200" cy="457200"/>
+          </a:xfrm>
+          <a:prstGeom prst="rect">
+            <a:avLst/>
+          </a:prstGeom>
+          <a:noFill/>
+        </p:spPr>
+        <p:txBody>
+          <a:bodyPr wrap="square">
+            <a:spAutoFit/>
+          </a:bodyPr>
+          <a:lstStyle/>
+          <a:p>
+            <a:pPr algn="l"/>
+            <a:r>
+              <a:rPr sz="1600" b="1">
                 <a:solidFill>
                   <a:srgbClr val="7CDA6A"/>
                 </a:solidFill>
                 <a:latin typeface="Consolas"/>
               </a:rPr>
+              <a:t>push ebx</a:t>
+            </a:r>
+          </a:p>
+        </p:txBody>
+      </p:sp>
+      <p:sp>
+        <p:nvSpPr>
+          <p:cNvPr id="16" name="TextBox 15"/>
+          <p:cNvSpPr txBox="1"/>
+          <p:nvPr/>
+        </p:nvSpPr>
+        <p:spPr>
+          <a:xfrm>
+            <a:off x="3383280" y="3877056"/>
+            <a:ext cx="2834640" cy="457200"/>
+          </a:xfrm>
+          <a:prstGeom prst="rect">
+            <a:avLst/>
+          </a:prstGeom>
+          <a:noFill/>
+        </p:spPr>
+        <p:txBody>
+          <a:bodyPr wrap="square">
+            <a:spAutoFit/>
+          </a:bodyPr>
+          <a:lstStyle/>
+          <a:p>
+            <a:pPr algn="l"/>
+            <a:r>
+              <a:rPr sz="1500" b="0">
+                <a:solidFill>
+                  <a:srgbClr val="F2F2F2"/>
+                </a:solidFill>
+                <a:latin typeface="Consolas"/>
+              </a:rPr>
+              <a:t>save ebx</a:t>
+            </a:r>
+          </a:p>
+        </p:txBody>
+      </p:sp>
+      <p:sp>
+        <p:nvSpPr>
+          <p:cNvPr id="17" name="TextBox 16"/>
+          <p:cNvSpPr txBox="1"/>
+          <p:nvPr/>
+        </p:nvSpPr>
+        <p:spPr>
+          <a:xfrm>
+            <a:off x="594360" y="4498848"/>
+            <a:ext cx="2743200" cy="457200"/>
+          </a:xfrm>
+          <a:prstGeom prst="rect">
+            <a:avLst/>
+          </a:prstGeom>
+          <a:noFill/>
+        </p:spPr>
+        <p:txBody>
+          <a:bodyPr wrap="square">
+            <a:spAutoFit/>
+          </a:bodyPr>
+          <a:lstStyle/>
+          <a:p>
+            <a:pPr algn="l"/>
+            <a:r>
+              <a:rPr sz="1600" b="1">
+                <a:solidFill>
+                  <a:srgbClr val="7CDA6A"/>
+                </a:solidFill>
+                <a:latin typeface="Consolas"/>
+              </a:rPr>
               <a:t>pop ecx</a:t>
             </a:r>
           </a:p>
@@ -14365,119 +14721,119 @@
       </p:sp>
       <p:sp>
         <p:nvSpPr>
-          <p:cNvPr id="12" name="TextBox 11"/>
-          <p:cNvSpPr txBox="1"/>
-          <p:nvPr/>
-        </p:nvSpPr>
-        <p:spPr>
-          <a:xfrm>
-            <a:off x="3383280" y="2441448"/>
-            <a:ext cx="2834640" cy="411480"/>
-          </a:xfrm>
-          <a:prstGeom prst="rect">
-            <a:avLst/>
-          </a:prstGeom>
-          <a:noFill/>
-        </p:spPr>
-        <p:txBody>
-          <a:bodyPr wrap="square">
-            <a:spAutoFit/>
-          </a:bodyPr>
-          <a:lstStyle/>
-          <a:p>
-            <a:pPr algn="l"/>
-            <a:r>
-              <a:rPr sz="1400" b="0">
+          <p:cNvPr id="18" name="TextBox 17"/>
+          <p:cNvSpPr txBox="1"/>
+          <p:nvPr/>
+        </p:nvSpPr>
+        <p:spPr>
+          <a:xfrm>
+            <a:off x="3383280" y="4498848"/>
+            <a:ext cx="2834640" cy="457200"/>
+          </a:xfrm>
+          <a:prstGeom prst="rect">
+            <a:avLst/>
+          </a:prstGeom>
+          <a:noFill/>
+        </p:spPr>
+        <p:txBody>
+          <a:bodyPr wrap="square">
+            <a:spAutoFit/>
+          </a:bodyPr>
+          <a:lstStyle/>
+          <a:p>
+            <a:pPr algn="l"/>
+            <a:r>
+              <a:rPr sz="1500" b="0">
                 <a:solidFill>
                   <a:srgbClr val="F2F2F2"/>
                 </a:solidFill>
                 <a:latin typeface="Consolas"/>
               </a:rPr>
-              <a:t>/* pop into ecx */</a:t>
-            </a:r>
-          </a:p>
-        </p:txBody>
-      </p:sp>
-      <p:sp>
-        <p:nvSpPr>
-          <p:cNvPr id="13" name="TextBox 12"/>
-          <p:cNvSpPr txBox="1"/>
-          <p:nvPr/>
-        </p:nvSpPr>
-        <p:spPr>
-          <a:xfrm>
-            <a:off x="594360" y="3008376"/>
-            <a:ext cx="2743200" cy="411480"/>
-          </a:xfrm>
-          <a:prstGeom prst="rect">
-            <a:avLst/>
-          </a:prstGeom>
-          <a:noFill/>
-        </p:spPr>
-        <p:txBody>
-          <a:bodyPr wrap="square">
-            <a:spAutoFit/>
-          </a:bodyPr>
-          <a:lstStyle/>
-          <a:p>
-            <a:pPr algn="l"/>
-            <a:r>
-              <a:rPr sz="1500" b="1">
+              <a:t>ecx = last push</a:t>
+            </a:r>
+          </a:p>
+        </p:txBody>
+      </p:sp>
+      <p:sp>
+        <p:nvSpPr>
+          <p:cNvPr id="19" name="TextBox 18"/>
+          <p:cNvSpPr txBox="1"/>
+          <p:nvPr/>
+        </p:nvSpPr>
+        <p:spPr>
+          <a:xfrm>
+            <a:off x="594360" y="5120640"/>
+            <a:ext cx="2743200" cy="457200"/>
+          </a:xfrm>
+          <a:prstGeom prst="rect">
+            <a:avLst/>
+          </a:prstGeom>
+          <a:noFill/>
+        </p:spPr>
+        <p:txBody>
+          <a:bodyPr wrap="square">
+            <a:spAutoFit/>
+          </a:bodyPr>
+          <a:lstStyle/>
+          <a:p>
+            <a:pPr algn="l"/>
+            <a:r>
+              <a:rPr sz="1600" b="1">
                 <a:solidFill>
                   <a:srgbClr val="7CDA6A"/>
                 </a:solidFill>
                 <a:latin typeface="Consolas"/>
               </a:rPr>
-              <a:t>x/2xw $esp</a:t>
-            </a:r>
-          </a:p>
-        </p:txBody>
-      </p:sp>
-      <p:sp>
-        <p:nvSpPr>
-          <p:cNvPr id="14" name="TextBox 13"/>
-          <p:cNvSpPr txBox="1"/>
-          <p:nvPr/>
-        </p:nvSpPr>
-        <p:spPr>
-          <a:xfrm>
-            <a:off x="3383280" y="3008376"/>
-            <a:ext cx="2834640" cy="411480"/>
-          </a:xfrm>
-          <a:prstGeom prst="rect">
-            <a:avLst/>
-          </a:prstGeom>
-          <a:noFill/>
-        </p:spPr>
-        <p:txBody>
-          <a:bodyPr wrap="square">
-            <a:spAutoFit/>
-          </a:bodyPr>
-          <a:lstStyle/>
-          <a:p>
-            <a:pPr algn="l"/>
-            <a:r>
-              <a:rPr sz="1400" b="0">
+              <a:t>pop edx</a:t>
+            </a:r>
+          </a:p>
+        </p:txBody>
+      </p:sp>
+      <p:sp>
+        <p:nvSpPr>
+          <p:cNvPr id="20" name="TextBox 19"/>
+          <p:cNvSpPr txBox="1"/>
+          <p:nvPr/>
+        </p:nvSpPr>
+        <p:spPr>
+          <a:xfrm>
+            <a:off x="3383280" y="5120640"/>
+            <a:ext cx="2834640" cy="457200"/>
+          </a:xfrm>
+          <a:prstGeom prst="rect">
+            <a:avLst/>
+          </a:prstGeom>
+          <a:noFill/>
+        </p:spPr>
+        <p:txBody>
+          <a:bodyPr wrap="square">
+            <a:spAutoFit/>
+          </a:bodyPr>
+          <a:lstStyle/>
+          <a:p>
+            <a:pPr algn="l"/>
+            <a:r>
+              <a:rPr sz="1500" b="0">
                 <a:solidFill>
                   <a:srgbClr val="F2F2F2"/>
                 </a:solidFill>
                 <a:latin typeface="Consolas"/>
               </a:rPr>
-              <a:t>/* dump stack */</a:t>
-            </a:r>
-          </a:p>
-        </p:txBody>
-      </p:sp>
-      <p:sp>
-        <p:nvSpPr>
-          <p:cNvPr id="15" name="Rectangle 14"/>
+              <a:t>edx = first push</a:t>
+            </a:r>
+          </a:p>
+        </p:txBody>
+      </p:sp>
+      <p:sp>
+        <p:nvSpPr>
+          <p:cNvPr id="21" name="Rectangle 20"/>
           <p:cNvSpPr/>
           <p:nvPr/>
         </p:nvSpPr>
         <p:spPr>
           <a:xfrm>
-            <a:off x="6583680" y="1188720"/>
-            <a:ext cx="5166360" cy="3200400"/>
+            <a:off x="6583680" y="1234440"/>
+            <a:ext cx="5166360" cy="5029200"/>
           </a:xfrm>
           <a:prstGeom prst="rect">
             <a:avLst/>
@@ -14509,19 +14865,18 @@
           <a:lstStyle/>
           <a:p>
             <a:pPr algn="ctr"/>
-            <a:endParaRPr/>
-          </a:p>
-        </p:txBody>
-      </p:sp>
-      <p:sp>
-        <p:nvSpPr>
-          <p:cNvPr id="16" name="TextBox 15"/>
-          <p:cNvSpPr txBox="1"/>
-          <p:nvPr/>
-        </p:nvSpPr>
-        <p:spPr>
-          <a:xfrm>
-            <a:off x="6766560" y="1280160"/>
+          </a:p>
+        </p:txBody>
+      </p:sp>
+      <p:sp>
+        <p:nvSpPr>
+          <p:cNvPr id="22" name="TextBox 21"/>
+          <p:cNvSpPr txBox="1"/>
+          <p:nvPr/>
+        </p:nvSpPr>
+        <p:spPr>
+          <a:xfrm>
+            <a:off x="6766560" y="1353312"/>
             <a:ext cx="4800600" cy="256032"/>
           </a:xfrm>
           <a:prstGeom prst="rect">
@@ -14537,7 +14892,7 @@
           <a:p>
             <a:pPr algn="l"/>
             <a:r>
-              <a:rPr sz="1200" b="1">
+              <a:rPr sz="1300" b="1">
                 <a:solidFill>
                   <a:srgbClr val="E8A23A"/>
                 </a:solidFill>
@@ -14550,39 +14905,39 @@
       </p:sp>
       <p:sp>
         <p:nvSpPr>
-          <p:cNvPr id="17" name="TextBox 16"/>
-          <p:cNvSpPr txBox="1"/>
-          <p:nvPr/>
-        </p:nvSpPr>
-        <p:spPr>
-          <a:xfrm>
-            <a:off x="6766560" y="1645920"/>
-            <a:ext cx="4800600" cy="2468880"/>
-          </a:xfrm>
-          <a:prstGeom prst="rect">
-            <a:avLst/>
-          </a:prstGeom>
-          <a:noFill/>
-        </p:spPr>
-        <p:txBody>
-          <a:bodyPr wrap="square">
-            <a:spAutoFit/>
-          </a:bodyPr>
-          <a:lstStyle/>
-          <a:p>
-            <a:pPr algn="l"/>
-            <a:r>
-              <a:rPr sz="1500" b="0">
+          <p:cNvPr id="23" name="TextBox 22"/>
+          <p:cNvSpPr txBox="1"/>
+          <p:nvPr/>
+        </p:nvSpPr>
+        <p:spPr>
+          <a:xfrm>
+            <a:off x="6766560" y="1783080"/>
+            <a:ext cx="4800600" cy="4206240"/>
+          </a:xfrm>
+          <a:prstGeom prst="rect">
+            <a:avLst/>
+          </a:prstGeom>
+          <a:noFill/>
+        </p:spPr>
+        <p:txBody>
+          <a:bodyPr wrap="square">
+            <a:spAutoFit/>
+          </a:bodyPr>
+          <a:lstStyle/>
+          <a:p>
+            <a:pPr algn="l"/>
+            <a:r>
+              <a:rPr sz="1600" b="0">
                 <a:solidFill>
                   <a:srgbClr val="F2F2F2"/>
                 </a:solidFill>
                 <a:latin typeface="Calibri"/>
               </a:rPr>
-              <a:t>Different constants than the example.
-At before_pop:
+              <a:t>Two pushes, then two pops. Last in, first out.
+break before_pop
   [esp] = ?
   [esp+4] = ?
-At check:
+break check
   ecx = ?
   edx = ?</a:t>
             </a:r>
@@ -14591,129 +14946,7 @@
       </p:sp>
       <p:sp>
         <p:nvSpPr>
-          <p:cNvPr id="18" name="Rectangle 17"/>
-          <p:cNvSpPr/>
-          <p:nvPr/>
-        </p:nvSpPr>
-        <p:spPr>
-          <a:xfrm>
-            <a:off x="457200" y="4572000"/>
-            <a:ext cx="11292840" cy="1691640"/>
-          </a:xfrm>
-          <a:prstGeom prst="rect">
-            <a:avLst/>
-          </a:prstGeom>
-          <a:solidFill>
-            <a:srgbClr val="242424"/>
-          </a:solidFill>
-          <a:ln>
-            <a:noFill/>
-          </a:ln>
-          <a:effectLst/>
-        </p:spPr>
-        <p:style>
-          <a:lnRef idx="1">
-            <a:schemeClr val="accent1"/>
-          </a:lnRef>
-          <a:fillRef idx="3">
-            <a:schemeClr val="accent1"/>
-          </a:fillRef>
-          <a:effectRef idx="2">
-            <a:schemeClr val="accent1"/>
-          </a:effectRef>
-          <a:fontRef idx="minor">
-            <a:schemeClr val="lt1"/>
-          </a:fontRef>
-        </p:style>
-        <p:txBody>
-          <a:bodyPr rtlCol="0" anchor="ctr"/>
-          <a:lstStyle/>
-          <a:p>
-            <a:pPr algn="ctr"/>
-            <a:endParaRPr/>
-          </a:p>
-        </p:txBody>
-      </p:sp>
-      <p:sp>
-        <p:nvSpPr>
-          <p:cNvPr id="19" name="TextBox 18"/>
-          <p:cNvSpPr txBox="1"/>
-          <p:nvPr/>
-        </p:nvSpPr>
-        <p:spPr>
-          <a:xfrm>
-            <a:off x="640080" y="4663440"/>
-            <a:ext cx="10972800" cy="256032"/>
-          </a:xfrm>
-          <a:prstGeom prst="rect">
-            <a:avLst/>
-          </a:prstGeom>
-          <a:noFill/>
-        </p:spPr>
-        <p:txBody>
-          <a:bodyPr wrap="square">
-            <a:spAutoFit/>
-          </a:bodyPr>
-          <a:lstStyle/>
-          <a:p>
-            <a:pPr algn="l"/>
-            <a:r>
-              <a:rPr sz="1300" b="1">
-                <a:solidFill>
-                  <a:srgbClr val="E8A23A"/>
-                </a:solidFill>
-                <a:latin typeface="Calibri"/>
-              </a:rPr>
-              <a:t>gdb on the challenge binary (not the example)</a:t>
-            </a:r>
-          </a:p>
-        </p:txBody>
-      </p:sp>
-      <p:sp>
-        <p:nvSpPr>
-          <p:cNvPr id="20" name="TextBox 19"/>
-          <p:cNvSpPr txBox="1"/>
-          <p:nvPr/>
-        </p:nvSpPr>
-        <p:spPr>
-          <a:xfrm>
-            <a:off x="640080" y="4983480"/>
-            <a:ext cx="10972800" cy="1143000"/>
-          </a:xfrm>
-          <a:prstGeom prst="rect">
-            <a:avLst/>
-          </a:prstGeom>
-          <a:noFill/>
-        </p:spPr>
-        <p:txBody>
-          <a:bodyPr wrap="square">
-            <a:spAutoFit/>
-          </a:bodyPr>
-          <a:lstStyle/>
-          <a:p>
-            <a:pPr algn="l"/>
-            <a:r>
-              <a:rPr sz="1500" b="1">
-                <a:solidFill>
-                  <a:srgbClr val="7CDA6A"/>
-                </a:solidFill>
-                <a:latin typeface="Consolas"/>
-              </a:rPr>
-              <a:t>gdb ./ch_stack
-break before_pop
-run
-x/2xw $esp
-break check
-continue
-print /x $ecx
-print /x $edx</a:t>
-            </a:r>
-          </a:p>
-        </p:txBody>
-      </p:sp>
-      <p:sp>
-        <p:nvSpPr>
-          <p:cNvPr id="21" name="Rectangle 20"/>
+          <p:cNvPr id="24" name="Rectangle 23"/>
           <p:cNvSpPr/>
           <p:nvPr/>
         </p:nvSpPr>
@@ -14752,13 +14985,12 @@
           <a:lstStyle/>
           <a:p>
             <a:pPr algn="ctr"/>
-            <a:endParaRPr/>
-          </a:p>
-        </p:txBody>
-      </p:sp>
-      <p:sp>
-        <p:nvSpPr>
-          <p:cNvPr id="22" name="TextBox 21"/>
+          </a:p>
+        </p:txBody>
+      </p:sp>
+      <p:sp>
+        <p:nvSpPr>
+          <p:cNvPr id="25" name="TextBox 24"/>
           <p:cNvSpPr txBox="1"/>
           <p:nvPr/>
         </p:nvSpPr>
@@ -14793,7 +15025,7 @@
       </p:sp>
       <p:sp>
         <p:nvSpPr>
-          <p:cNvPr id="23" name="TextBox 22"/>
+          <p:cNvPr id="26" name="TextBox 25"/>
           <p:cNvSpPr txBox="1"/>
           <p:nvPr/>
         </p:nvSpPr>
@@ -14900,7 +15132,6 @@
           <a:lstStyle/>
           <a:p>
             <a:pPr algn="ctr"/>
-            <a:endParaRPr/>
           </a:p>
         </p:txBody>
       </p:sp>
@@ -14982,8 +15213,8 @@
         </p:nvSpPr>
         <p:spPr>
           <a:xfrm>
-            <a:off x="457200" y="1188720"/>
-            <a:ext cx="5943600" cy="3200400"/>
+            <a:off x="457200" y="1234440"/>
+            <a:ext cx="5943600" cy="5029200"/>
           </a:xfrm>
           <a:prstGeom prst="rect">
             <a:avLst/>
@@ -15015,7 +15246,6 @@
           <a:lstStyle/>
           <a:p>
             <a:pPr algn="ctr"/>
-            <a:endParaRPr/>
           </a:p>
         </p:txBody>
       </p:sp>
@@ -15027,7 +15257,7 @@
         </p:nvSpPr>
         <p:spPr>
           <a:xfrm>
-            <a:off x="594360" y="1280160"/>
+            <a:off x="594360" y="1353312"/>
             <a:ext cx="5577840" cy="256032"/>
           </a:xfrm>
           <a:prstGeom prst="rect">
@@ -15043,26 +15273,61 @@
           <a:p>
             <a:pPr algn="l"/>
             <a:r>
+              <a:rPr sz="1300" b="1">
+                <a:solidFill>
+                  <a:srgbClr val="E8A23A"/>
+                </a:solidFill>
+                <a:latin typeface="Calibri"/>
+              </a:rPr>
+              <a:t>example  (06_call)</a:t>
+            </a:r>
+          </a:p>
+        </p:txBody>
+      </p:sp>
+      <p:sp>
+        <p:nvSpPr>
+          <p:cNvPr id="7" name="TextBox 6"/>
+          <p:cNvSpPr txBox="1"/>
+          <p:nvPr/>
+        </p:nvSpPr>
+        <p:spPr>
+          <a:xfrm>
+            <a:off x="594360" y="1664208"/>
+            <a:ext cx="2743200" cy="228600"/>
+          </a:xfrm>
+          <a:prstGeom prst="rect">
+            <a:avLst/>
+          </a:prstGeom>
+          <a:noFill/>
+        </p:spPr>
+        <p:txBody>
+          <a:bodyPr wrap="square">
+            <a:spAutoFit/>
+          </a:bodyPr>
+          <a:lstStyle/>
+          <a:p>
+            <a:pPr algn="l"/>
+            <a:r>
               <a:rPr sz="1200" b="1">
                 <a:solidFill>
-                  <a:srgbClr val="E8A23A"/>
-                </a:solidFill>
-                <a:latin typeface="Calibri"/>
-              </a:rPr>
-              <a:t>example  (06_call)</a:t>
-            </a:r>
-          </a:p>
-        </p:txBody>
-      </p:sp>
-      <p:sp>
-        <p:nvSpPr>
-          <p:cNvPr id="7" name="TextBox 6"/>
-          <p:cNvSpPr txBox="1"/>
-          <p:nvPr/>
-        </p:nvSpPr>
-        <p:spPr>
-          <a:xfrm>
-            <a:off x="594360" y="1554480"/>
+                  <a:srgbClr val="B0B0B0"/>
+                </a:solidFill>
+                <a:latin typeface="Calibri"/>
+              </a:rPr>
+              <a:t>asm</a:t>
+            </a:r>
+          </a:p>
+        </p:txBody>
+      </p:sp>
+      <p:sp>
+        <p:nvSpPr>
+          <p:cNvPr id="8" name="TextBox 7"/>
+          <p:cNvSpPr txBox="1"/>
+          <p:nvPr/>
+        </p:nvSpPr>
+        <p:spPr>
+          <a:xfrm>
+            <a:off x="3383280" y="1664208"/>
             <a:ext cx="2743200" cy="228600"/>
           </a:xfrm>
           <a:prstGeom prst="rect">
@@ -15078,47 +15343,12 @@
           <a:p>
             <a:pPr algn="l"/>
             <a:r>
-              <a:rPr sz="1100" b="1">
+              <a:rPr sz="1200" b="1">
                 <a:solidFill>
                   <a:srgbClr val="B0B0B0"/>
                 </a:solidFill>
                 <a:latin typeface="Calibri"/>
               </a:rPr>
-              <a:t>asm</a:t>
-            </a:r>
-          </a:p>
-        </p:txBody>
-      </p:sp>
-      <p:sp>
-        <p:nvSpPr>
-          <p:cNvPr id="8" name="TextBox 7"/>
-          <p:cNvSpPr txBox="1"/>
-          <p:nvPr/>
-        </p:nvSpPr>
-        <p:spPr>
-          <a:xfrm>
-            <a:off x="3383280" y="1554480"/>
-            <a:ext cx="2743200" cy="228600"/>
-          </a:xfrm>
-          <a:prstGeom prst="rect">
-            <a:avLst/>
-          </a:prstGeom>
-          <a:noFill/>
-        </p:spPr>
-        <p:txBody>
-          <a:bodyPr wrap="square">
-            <a:spAutoFit/>
-          </a:bodyPr>
-          <a:lstStyle/>
-          <a:p>
-            <a:pPr algn="l"/>
-            <a:r>
-              <a:rPr sz="1100" b="1">
-                <a:solidFill>
-                  <a:srgbClr val="B0B0B0"/>
-                </a:solidFill>
-                <a:latin typeface="Calibri"/>
-              </a:rPr>
               <a:t>closest C</a:t>
             </a:r>
           </a:p>
@@ -15132,23 +15362,23 @@
         </p:nvSpPr>
         <p:spPr>
           <a:xfrm>
-            <a:off x="594360" y="1874519"/>
-            <a:ext cx="2743200" cy="411480"/>
-          </a:xfrm>
-          <a:prstGeom prst="rect">
-            <a:avLst/>
-          </a:prstGeom>
-          <a:noFill/>
-        </p:spPr>
-        <p:txBody>
-          <a:bodyPr wrap="square">
-            <a:spAutoFit/>
-          </a:bodyPr>
-          <a:lstStyle/>
-          <a:p>
-            <a:pPr algn="l"/>
-            <a:r>
-              <a:rPr sz="1500" b="1">
+            <a:off x="594360" y="2011680"/>
+            <a:ext cx="2743200" cy="457200"/>
+          </a:xfrm>
+          <a:prstGeom prst="rect">
+            <a:avLst/>
+          </a:prstGeom>
+          <a:noFill/>
+        </p:spPr>
+        <p:txBody>
+          <a:bodyPr wrap="square">
+            <a:spAutoFit/>
+          </a:bodyPr>
+          <a:lstStyle/>
+          <a:p>
+            <a:pPr algn="l"/>
+            <a:r>
+              <a:rPr sz="1600" b="1">
                 <a:solidFill>
                   <a:srgbClr val="7CDA6A"/>
                 </a:solidFill>
@@ -15167,29 +15397,29 @@
         </p:nvSpPr>
         <p:spPr>
           <a:xfrm>
-            <a:off x="3383280" y="1874519"/>
-            <a:ext cx="2834640" cy="411480"/>
-          </a:xfrm>
-          <a:prstGeom prst="rect">
-            <a:avLst/>
-          </a:prstGeom>
-          <a:noFill/>
-        </p:spPr>
-        <p:txBody>
-          <a:bodyPr wrap="square">
-            <a:spAutoFit/>
-          </a:bodyPr>
-          <a:lstStyle/>
-          <a:p>
-            <a:pPr algn="l"/>
-            <a:r>
-              <a:rPr sz="1400" b="0">
+            <a:off x="3383280" y="2011680"/>
+            <a:ext cx="2834640" cy="457200"/>
+          </a:xfrm>
+          <a:prstGeom prst="rect">
+            <a:avLst/>
+          </a:prstGeom>
+          <a:noFill/>
+        </p:spPr>
+        <p:txBody>
+          <a:bodyPr wrap="square">
+            <a:spAutoFit/>
+          </a:bodyPr>
+          <a:lstStyle/>
+          <a:p>
+            <a:pPr algn="l"/>
+            <a:r>
+              <a:rPr sz="1500" b="0">
                 <a:solidFill>
                   <a:srgbClr val="F2F2F2"/>
                 </a:solidFill>
                 <a:latin typeface="Consolas"/>
               </a:rPr>
-              <a:t>/* argument */</a:t>
+              <a:t>arg = 41;</a:t>
             </a:r>
           </a:p>
         </p:txBody>
@@ -15202,23 +15432,23 @@
         </p:nvSpPr>
         <p:spPr>
           <a:xfrm>
-            <a:off x="594360" y="2441448"/>
-            <a:ext cx="2743200" cy="411480"/>
-          </a:xfrm>
-          <a:prstGeom prst="rect">
-            <a:avLst/>
-          </a:prstGeom>
-          <a:noFill/>
-        </p:spPr>
-        <p:txBody>
-          <a:bodyPr wrap="square">
-            <a:spAutoFit/>
-          </a:bodyPr>
-          <a:lstStyle/>
-          <a:p>
-            <a:pPr algn="l"/>
-            <a:r>
-              <a:rPr sz="1500" b="1">
+            <a:off x="594360" y="2633472"/>
+            <a:ext cx="2743200" cy="457200"/>
+          </a:xfrm>
+          <a:prstGeom prst="rect">
+            <a:avLst/>
+          </a:prstGeom>
+          <a:noFill/>
+        </p:spPr>
+        <p:txBody>
+          <a:bodyPr wrap="square">
+            <a:spAutoFit/>
+          </a:bodyPr>
+          <a:lstStyle/>
+          <a:p>
+            <a:pPr algn="l"/>
+            <a:r>
+              <a:rPr sz="1600" b="1">
                 <a:solidFill>
                   <a:srgbClr val="7CDA6A"/>
                 </a:solidFill>
@@ -15237,23 +15467,23 @@
         </p:nvSpPr>
         <p:spPr>
           <a:xfrm>
-            <a:off x="3383280" y="2441448"/>
-            <a:ext cx="2834640" cy="411480"/>
-          </a:xfrm>
-          <a:prstGeom prst="rect">
-            <a:avLst/>
-          </a:prstGeom>
-          <a:noFill/>
-        </p:spPr>
-        <p:txBody>
-          <a:bodyPr wrap="square">
-            <a:spAutoFit/>
-          </a:bodyPr>
-          <a:lstStyle/>
-          <a:p>
-            <a:pPr algn="l"/>
-            <a:r>
-              <a:rPr sz="1400" b="0">
+            <a:off x="3383280" y="2633472"/>
+            <a:ext cx="2834640" cy="457200"/>
+          </a:xfrm>
+          <a:prstGeom prst="rect">
+            <a:avLst/>
+          </a:prstGeom>
+          <a:noFill/>
+        </p:spPr>
+        <p:txBody>
+          <a:bodyPr wrap="square">
+            <a:spAutoFit/>
+          </a:bodyPr>
+          <a:lstStyle/>
+          <a:p>
+            <a:pPr algn="l"/>
+            <a:r>
+              <a:rPr sz="1500" b="0">
                 <a:solidFill>
                   <a:srgbClr val="F2F2F2"/>
                 </a:solidFill>
@@ -15272,23 +15502,23 @@
         </p:nvSpPr>
         <p:spPr>
           <a:xfrm>
-            <a:off x="594360" y="3008376"/>
-            <a:ext cx="2743200" cy="411480"/>
-          </a:xfrm>
-          <a:prstGeom prst="rect">
-            <a:avLst/>
-          </a:prstGeom>
-          <a:noFill/>
-        </p:spPr>
-        <p:txBody>
-          <a:bodyPr wrap="square">
-            <a:spAutoFit/>
-          </a:bodyPr>
-          <a:lstStyle/>
-          <a:p>
-            <a:pPr algn="l"/>
-            <a:r>
-              <a:rPr sz="1500" b="1">
+            <a:off x="594360" y="3255264"/>
+            <a:ext cx="2743200" cy="457200"/>
+          </a:xfrm>
+          <a:prstGeom prst="rect">
+            <a:avLst/>
+          </a:prstGeom>
+          <a:noFill/>
+        </p:spPr>
+        <p:txBody>
+          <a:bodyPr wrap="square">
+            <a:spAutoFit/>
+          </a:bodyPr>
+          <a:lstStyle/>
+          <a:p>
+            <a:pPr algn="l"/>
+            <a:r>
+              <a:rPr sz="1600" b="1">
                 <a:solidFill>
                   <a:srgbClr val="7CDA6A"/>
                 </a:solidFill>
@@ -15307,29 +15537,29 @@
         </p:nvSpPr>
         <p:spPr>
           <a:xfrm>
-            <a:off x="3383280" y="3008376"/>
-            <a:ext cx="2834640" cy="411480"/>
-          </a:xfrm>
-          <a:prstGeom prst="rect">
-            <a:avLst/>
-          </a:prstGeom>
-          <a:noFill/>
-        </p:spPr>
-        <p:txBody>
-          <a:bodyPr wrap="square">
-            <a:spAutoFit/>
-          </a:bodyPr>
-          <a:lstStyle/>
-          <a:p>
-            <a:pPr algn="l"/>
-            <a:r>
-              <a:rPr sz="1400" b="0">
+            <a:off x="3383280" y="3255264"/>
+            <a:ext cx="2834640" cy="457200"/>
+          </a:xfrm>
+          <a:prstGeom prst="rect">
+            <a:avLst/>
+          </a:prstGeom>
+          <a:noFill/>
+        </p:spPr>
+        <p:txBody>
+          <a:bodyPr wrap="square">
+            <a:spAutoFit/>
+          </a:bodyPr>
+          <a:lstStyle/>
+          <a:p>
+            <a:pPr algn="l"/>
+            <a:r>
+              <a:rPr sz="1500" b="0">
                 <a:solidFill>
                   <a:srgbClr val="F2F2F2"/>
                 </a:solidFill>
                 <a:latin typeface="Consolas"/>
               </a:rPr>
-              <a:t>/* cdecl cleanup */</a:t>
+              <a:t>pop the arg</a:t>
             </a:r>
           </a:p>
         </p:txBody>
@@ -15342,23 +15572,23 @@
         </p:nvSpPr>
         <p:spPr>
           <a:xfrm>
-            <a:off x="594360" y="3575303"/>
-            <a:ext cx="2743200" cy="411480"/>
-          </a:xfrm>
-          <a:prstGeom prst="rect">
-            <a:avLst/>
-          </a:prstGeom>
-          <a:noFill/>
-        </p:spPr>
-        <p:txBody>
-          <a:bodyPr wrap="square">
-            <a:spAutoFit/>
-          </a:bodyPr>
-          <a:lstStyle/>
-          <a:p>
-            <a:pPr algn="l"/>
-            <a:r>
-              <a:rPr sz="1500" b="1">
+            <a:off x="594360" y="3877056"/>
+            <a:ext cx="2743200" cy="457200"/>
+          </a:xfrm>
+          <a:prstGeom prst="rect">
+            <a:avLst/>
+          </a:prstGeom>
+          <a:noFill/>
+        </p:spPr>
+        <p:txBody>
+          <a:bodyPr wrap="square">
+            <a:spAutoFit/>
+          </a:bodyPr>
+          <a:lstStyle/>
+          <a:p>
+            <a:pPr algn="l"/>
+            <a:r>
+              <a:rPr sz="1600" b="1">
                 <a:solidFill>
                   <a:srgbClr val="7CDA6A"/>
                 </a:solidFill>
@@ -15377,23 +15607,23 @@
         </p:nvSpPr>
         <p:spPr>
           <a:xfrm>
-            <a:off x="3383280" y="3575303"/>
-            <a:ext cx="2834640" cy="411480"/>
-          </a:xfrm>
-          <a:prstGeom prst="rect">
-            <a:avLst/>
-          </a:prstGeom>
-          <a:noFill/>
-        </p:spPr>
-        <p:txBody>
-          <a:bodyPr wrap="square">
-            <a:spAutoFit/>
-          </a:bodyPr>
-          <a:lstStyle/>
-          <a:p>
-            <a:pPr algn="l"/>
-            <a:r>
-              <a:rPr sz="1400" b="0">
+            <a:off x="3383280" y="3877056"/>
+            <a:ext cx="2834640" cy="457200"/>
+          </a:xfrm>
+          <a:prstGeom prst="rect">
+            <a:avLst/>
+          </a:prstGeom>
+          <a:noFill/>
+        </p:spPr>
+        <p:txBody>
+          <a:bodyPr wrap="square">
+            <a:spAutoFit/>
+          </a:bodyPr>
+          <a:lstStyle/>
+          <a:p>
+            <a:pPr algn="l"/>
+            <a:r>
+              <a:rPr sz="1500" b="0">
                 <a:solidFill>
                   <a:srgbClr val="F2F2F2"/>
                 </a:solidFill>
@@ -15406,14 +15636,154 @@
       </p:sp>
       <p:sp>
         <p:nvSpPr>
-          <p:cNvPr id="17" name="Rectangle 16"/>
+          <p:cNvPr id="17" name="TextBox 16"/>
+          <p:cNvSpPr txBox="1"/>
+          <p:nvPr/>
+        </p:nvSpPr>
+        <p:spPr>
+          <a:xfrm>
+            <a:off x="594360" y="4498848"/>
+            <a:ext cx="2743200" cy="457200"/>
+          </a:xfrm>
+          <a:prstGeom prst="rect">
+            <a:avLst/>
+          </a:prstGeom>
+          <a:noFill/>
+        </p:spPr>
+        <p:txBody>
+          <a:bodyPr wrap="square">
+            <a:spAutoFit/>
+          </a:bodyPr>
+          <a:lstStyle/>
+          <a:p>
+            <a:pPr algn="l"/>
+            <a:r>
+              <a:rPr sz="1600" b="1">
+                <a:solidFill>
+                  <a:srgbClr val="7CDA6A"/>
+                </a:solidFill>
+                <a:latin typeface="Consolas"/>
+              </a:rPr>
+              <a:t/>
+            </a:r>
+          </a:p>
+        </p:txBody>
+      </p:sp>
+      <p:sp>
+        <p:nvSpPr>
+          <p:cNvPr id="18" name="TextBox 17"/>
+          <p:cNvSpPr txBox="1"/>
+          <p:nvPr/>
+        </p:nvSpPr>
+        <p:spPr>
+          <a:xfrm>
+            <a:off x="3383280" y="4498848"/>
+            <a:ext cx="2834640" cy="457200"/>
+          </a:xfrm>
+          <a:prstGeom prst="rect">
+            <a:avLst/>
+          </a:prstGeom>
+          <a:noFill/>
+        </p:spPr>
+        <p:txBody>
+          <a:bodyPr wrap="square">
+            <a:spAutoFit/>
+          </a:bodyPr>
+          <a:lstStyle/>
+          <a:p>
+            <a:pPr algn="l"/>
+            <a:r>
+              <a:rPr sz="1500" b="0">
+                <a:solidFill>
+                  <a:srgbClr val="F2F2F2"/>
+                </a:solidFill>
+                <a:latin typeface="Consolas"/>
+              </a:rPr>
+              <a:t/>
+            </a:r>
+          </a:p>
+        </p:txBody>
+      </p:sp>
+      <p:sp>
+        <p:nvSpPr>
+          <p:cNvPr id="19" name="TextBox 18"/>
+          <p:cNvSpPr txBox="1"/>
+          <p:nvPr/>
+        </p:nvSpPr>
+        <p:spPr>
+          <a:xfrm>
+            <a:off x="594360" y="5120640"/>
+            <a:ext cx="2743200" cy="457200"/>
+          </a:xfrm>
+          <a:prstGeom prst="rect">
+            <a:avLst/>
+          </a:prstGeom>
+          <a:noFill/>
+        </p:spPr>
+        <p:txBody>
+          <a:bodyPr wrap="square">
+            <a:spAutoFit/>
+          </a:bodyPr>
+          <a:lstStyle/>
+          <a:p>
+            <a:pPr algn="l"/>
+            <a:r>
+              <a:rPr sz="1600" b="1">
+                <a:solidFill>
+                  <a:srgbClr val="7CDA6A"/>
+                </a:solidFill>
+                <a:latin typeface="Consolas"/>
+              </a:rPr>
+              <a:t>add_one:  inc eax</a:t>
+            </a:r>
+          </a:p>
+        </p:txBody>
+      </p:sp>
+      <p:sp>
+        <p:nvSpPr>
+          <p:cNvPr id="20" name="TextBox 19"/>
+          <p:cNvSpPr txBox="1"/>
+          <p:nvPr/>
+        </p:nvSpPr>
+        <p:spPr>
+          <a:xfrm>
+            <a:off x="3383280" y="5120640"/>
+            <a:ext cx="2834640" cy="457200"/>
+          </a:xfrm>
+          <a:prstGeom prst="rect">
+            <a:avLst/>
+          </a:prstGeom>
+          <a:noFill/>
+        </p:spPr>
+        <p:txBody>
+          <a:bodyPr wrap="square">
+            <a:spAutoFit/>
+          </a:bodyPr>
+          <a:lstStyle/>
+          <a:p>
+            <a:pPr algn="l"/>
+            <a:r>
+              <a:rPr sz="1500" b="0">
+                <a:solidFill>
+                  <a:srgbClr val="F2F2F2"/>
+                </a:solidFill>
+                <a:latin typeface="Consolas"/>
+              </a:rPr>
+              <a:t>return arg + 1;</a:t>
+            </a:r>
+          </a:p>
+        </p:txBody>
+      </p:sp>
+      <p:sp>
+        <p:nvSpPr>
+          <p:cNvPr id="21" name="Rectangle 20"/>
           <p:cNvSpPr/>
           <p:nvPr/>
         </p:nvSpPr>
         <p:spPr>
           <a:xfrm>
-            <a:off x="6583680" y="1188720"/>
-            <a:ext cx="5166360" cy="3200400"/>
+            <a:off x="6583680" y="1234440"/>
+            <a:ext cx="5166360" cy="5029200"/>
           </a:xfrm>
           <a:prstGeom prst="rect">
             <a:avLst/>
@@ -15445,19 +15815,18 @@
           <a:lstStyle/>
           <a:p>
             <a:pPr algn="ctr"/>
-            <a:endParaRPr/>
-          </a:p>
-        </p:txBody>
-      </p:sp>
-      <p:sp>
-        <p:nvSpPr>
-          <p:cNvPr id="18" name="TextBox 17"/>
-          <p:cNvSpPr txBox="1"/>
-          <p:nvPr/>
-        </p:nvSpPr>
-        <p:spPr>
-          <a:xfrm>
-            <a:off x="6766560" y="1280160"/>
+          </a:p>
+        </p:txBody>
+      </p:sp>
+      <p:sp>
+        <p:nvSpPr>
+          <p:cNvPr id="22" name="TextBox 21"/>
+          <p:cNvSpPr txBox="1"/>
+          <p:nvPr/>
+        </p:nvSpPr>
+        <p:spPr>
+          <a:xfrm>
+            <a:off x="6766560" y="1353312"/>
             <a:ext cx="4800600" cy="256032"/>
           </a:xfrm>
           <a:prstGeom prst="rect">
@@ -15473,7 +15842,7 @@
           <a:p>
             <a:pPr algn="l"/>
             <a:r>
-              <a:rPr sz="1200" b="1">
+              <a:rPr sz="1300" b="1">
                 <a:solidFill>
                   <a:srgbClr val="E8A23A"/>
                 </a:solidFill>
@@ -15486,37 +15855,36 @@
       </p:sp>
       <p:sp>
         <p:nvSpPr>
-          <p:cNvPr id="19" name="TextBox 18"/>
-          <p:cNvSpPr txBox="1"/>
-          <p:nvPr/>
-        </p:nvSpPr>
-        <p:spPr>
-          <a:xfrm>
-            <a:off x="6766560" y="1645920"/>
-            <a:ext cx="4800600" cy="2468880"/>
-          </a:xfrm>
-          <a:prstGeom prst="rect">
-            <a:avLst/>
-          </a:prstGeom>
-          <a:noFill/>
-        </p:spPr>
-        <p:txBody>
-          <a:bodyPr wrap="square">
-            <a:spAutoFit/>
-          </a:bodyPr>
-          <a:lstStyle/>
-          <a:p>
-            <a:pPr algn="l"/>
-            <a:r>
-              <a:rPr sz="1500" b="0">
+          <p:cNvPr id="23" name="TextBox 22"/>
+          <p:cNvSpPr txBox="1"/>
+          <p:nvPr/>
+        </p:nvSpPr>
+        <p:spPr>
+          <a:xfrm>
+            <a:off x="6766560" y="1783080"/>
+            <a:ext cx="4800600" cy="4206240"/>
+          </a:xfrm>
+          <a:prstGeom prst="rect">
+            <a:avLst/>
+          </a:prstGeom>
+          <a:noFill/>
+        </p:spPr>
+        <p:txBody>
+          <a:bodyPr wrap="square">
+            <a:spAutoFit/>
+          </a:bodyPr>
+          <a:lstStyle/>
+          <a:p>
+            <a:pPr algn="l"/>
+            <a:r>
+              <a:rPr sz="1600" b="0">
                 <a:solidFill>
                   <a:srgbClr val="F2F2F2"/>
                 </a:solidFill>
                 <a:latin typeface="Calibri"/>
               </a:rPr>
-              <a:t>Different function / argument.
-At label check
-(right after call returns):
+              <a:t>Calls triple instead of add_one. Different argument.
+break check  (after call returns)
   eax = ?</a:t>
             </a:r>
           </a:p>
@@ -15524,125 +15892,7 @@
       </p:sp>
       <p:sp>
         <p:nvSpPr>
-          <p:cNvPr id="20" name="Rectangle 19"/>
-          <p:cNvSpPr/>
-          <p:nvPr/>
-        </p:nvSpPr>
-        <p:spPr>
-          <a:xfrm>
-            <a:off x="457200" y="4572000"/>
-            <a:ext cx="11292840" cy="1691640"/>
-          </a:xfrm>
-          <a:prstGeom prst="rect">
-            <a:avLst/>
-          </a:prstGeom>
-          <a:solidFill>
-            <a:srgbClr val="242424"/>
-          </a:solidFill>
-          <a:ln>
-            <a:noFill/>
-          </a:ln>
-          <a:effectLst/>
-        </p:spPr>
-        <p:style>
-          <a:lnRef idx="1">
-            <a:schemeClr val="accent1"/>
-          </a:lnRef>
-          <a:fillRef idx="3">
-            <a:schemeClr val="accent1"/>
-          </a:fillRef>
-          <a:effectRef idx="2">
-            <a:schemeClr val="accent1"/>
-          </a:effectRef>
-          <a:fontRef idx="minor">
-            <a:schemeClr val="lt1"/>
-          </a:fontRef>
-        </p:style>
-        <p:txBody>
-          <a:bodyPr rtlCol="0" anchor="ctr"/>
-          <a:lstStyle/>
-          <a:p>
-            <a:pPr algn="ctr"/>
-            <a:endParaRPr/>
-          </a:p>
-        </p:txBody>
-      </p:sp>
-      <p:sp>
-        <p:nvSpPr>
-          <p:cNvPr id="21" name="TextBox 20"/>
-          <p:cNvSpPr txBox="1"/>
-          <p:nvPr/>
-        </p:nvSpPr>
-        <p:spPr>
-          <a:xfrm>
-            <a:off x="640080" y="4663440"/>
-            <a:ext cx="10972800" cy="256032"/>
-          </a:xfrm>
-          <a:prstGeom prst="rect">
-            <a:avLst/>
-          </a:prstGeom>
-          <a:noFill/>
-        </p:spPr>
-        <p:txBody>
-          <a:bodyPr wrap="square">
-            <a:spAutoFit/>
-          </a:bodyPr>
-          <a:lstStyle/>
-          <a:p>
-            <a:pPr algn="l"/>
-            <a:r>
-              <a:rPr sz="1300" b="1">
-                <a:solidFill>
-                  <a:srgbClr val="E8A23A"/>
-                </a:solidFill>
-                <a:latin typeface="Calibri"/>
-              </a:rPr>
-              <a:t>gdb on the challenge binary (not the example)</a:t>
-            </a:r>
-          </a:p>
-        </p:txBody>
-      </p:sp>
-      <p:sp>
-        <p:nvSpPr>
-          <p:cNvPr id="22" name="TextBox 21"/>
-          <p:cNvSpPr txBox="1"/>
-          <p:nvPr/>
-        </p:nvSpPr>
-        <p:spPr>
-          <a:xfrm>
-            <a:off x="640080" y="4983480"/>
-            <a:ext cx="10972800" cy="1143000"/>
-          </a:xfrm>
-          <a:prstGeom prst="rect">
-            <a:avLst/>
-          </a:prstGeom>
-          <a:noFill/>
-        </p:spPr>
-        <p:txBody>
-          <a:bodyPr wrap="square">
-            <a:spAutoFit/>
-          </a:bodyPr>
-          <a:lstStyle/>
-          <a:p>
-            <a:pPr algn="l"/>
-            <a:r>
-              <a:rPr sz="1500" b="1">
-                <a:solidFill>
-                  <a:srgbClr val="7CDA6A"/>
-                </a:solidFill>
-                <a:latin typeface="Consolas"/>
-              </a:rPr>
-              <a:t>gdb ./ch_call
-break check
-run
-print $eax</a:t>
-            </a:r>
-          </a:p>
-        </p:txBody>
-      </p:sp>
-      <p:sp>
-        <p:nvSpPr>
-          <p:cNvPr id="23" name="Rectangle 22"/>
+          <p:cNvPr id="24" name="Rectangle 23"/>
           <p:cNvSpPr/>
           <p:nvPr/>
         </p:nvSpPr>
@@ -15681,13 +15931,12 @@
           <a:lstStyle/>
           <a:p>
             <a:pPr algn="ctr"/>
-            <a:endParaRPr/>
-          </a:p>
-        </p:txBody>
-      </p:sp>
-      <p:sp>
-        <p:nvSpPr>
-          <p:cNvPr id="24" name="TextBox 23"/>
+          </a:p>
+        </p:txBody>
+      </p:sp>
+      <p:sp>
+        <p:nvSpPr>
+          <p:cNvPr id="25" name="TextBox 24"/>
           <p:cNvSpPr txBox="1"/>
           <p:nvPr/>
         </p:nvSpPr>
@@ -15722,7 +15971,7 @@
       </p:sp>
       <p:sp>
         <p:nvSpPr>
-          <p:cNvPr id="25" name="TextBox 24"/>
+          <p:cNvPr id="26" name="TextBox 25"/>
           <p:cNvSpPr txBox="1"/>
           <p:nvPr/>
         </p:nvSpPr>

--- a/Reverse Engineering 101.pptx
+++ b/Reverse Engineering 101.pptx
@@ -10647,21 +10647,41 @@
         </p:nvSpPr>
         <p:spPr>
           <a:xfrm>
-            <a:off x="6766560" y="1783080"/>
-            <a:ext cx="4800600" cy="4206240"/>
-          </a:xfrm>
-          <a:prstGeom prst="rect">
-            <a:avLst/>
-          </a:prstGeom>
-          <a:noFill/>
-        </p:spPr>
-        <p:txBody>
-          <a:bodyPr wrap="square">
-            <a:spAutoFit/>
-          </a:bodyPr>
-          <a:lstStyle/>
-          <a:p>
-            <a:pPr algn="l"/>
+            <a:off x="6766560" y="1737360"/>
+            <a:ext cx="4800600" cy="4297680"/>
+          </a:xfrm>
+          <a:prstGeom prst="rect">
+            <a:avLst/>
+          </a:prstGeom>
+          <a:noFill/>
+        </p:spPr>
+        <p:txBody>
+          <a:bodyPr wrap="square">
+            <a:spAutoFit/>
+          </a:bodyPr>
+          <a:lstStyle/>
+          <a:p>
+            <a:pPr>
+              <a:spcAft>
+                <a:spcPts val="300"/>
+              </a:spcAft>
+            </a:pPr>
+            <a:r>
+              <a:rPr sz="1400" b="1">
+                <a:solidFill>
+                  <a:srgbClr val="7CDA6A"/>
+                </a:solidFill>
+                <a:latin typeface="Consolas"/>
+              </a:rPr>
+              <a:t>disass main in ch_mov.</a:t>
+            </a:r>
+          </a:p>
+          <a:p>
+            <a:pPr>
+              <a:spcAft>
+                <a:spcPts val="300"/>
+              </a:spcAft>
+            </a:pPr>
             <a:r>
               <a:rPr sz="1600" b="0">
                 <a:solidFill>
@@ -10669,11 +10689,135 @@
                 </a:solidFill>
                 <a:latin typeface="Calibri"/>
               </a:rPr>
-              <a:t>Same pattern, different numbers.
-Stores a value to a local, then loads it.
-break check
-  eax = ?
-  ecx = ?</a:t>
+              <a:t> </a:t>
+            </a:r>
+          </a:p>
+          <a:p>
+            <a:pPr>
+              <a:spcAft>
+                <a:spcPts val="300"/>
+              </a:spcAft>
+            </a:pPr>
+            <a:r>
+              <a:rPr sz="1400" b="1">
+                <a:solidFill>
+                  <a:srgbClr val="7CDA6A"/>
+                </a:solidFill>
+                <a:latin typeface="Consolas"/>
+              </a:rPr>
+              <a:t>After  mov eax, ebx</a:t>
+            </a:r>
+          </a:p>
+          <a:p>
+            <a:pPr>
+              <a:spcAft>
+                <a:spcPts val="300"/>
+              </a:spcAft>
+            </a:pPr>
+            <a:r>
+              <a:rPr sz="1600" b="0">
+                <a:solidFill>
+                  <a:srgbClr val="F2F2F2"/>
+                </a:solidFill>
+                <a:latin typeface="Calibri"/>
+              </a:rPr>
+              <a:t>  eax = ?</a:t>
+            </a:r>
+          </a:p>
+          <a:p>
+            <a:pPr>
+              <a:spcAft>
+                <a:spcPts val="300"/>
+              </a:spcAft>
+            </a:pPr>
+            <a:r>
+              <a:rPr sz="1600" b="0">
+                <a:solidFill>
+                  <a:srgbClr val="F2F2F2"/>
+                </a:solidFill>
+                <a:latin typeface="Calibri"/>
+              </a:rPr>
+              <a:t> </a:t>
+            </a:r>
+          </a:p>
+          <a:p>
+            <a:pPr>
+              <a:spcAft>
+                <a:spcPts val="300"/>
+              </a:spcAft>
+            </a:pPr>
+            <a:r>
+              <a:rPr sz="1400" b="1">
+                <a:solidFill>
+                  <a:srgbClr val="7CDA6A"/>
+                </a:solidFill>
+                <a:latin typeface="Consolas"/>
+              </a:rPr>
+              <a:t>After  mov ecx, [ebp-4]</a:t>
+            </a:r>
+          </a:p>
+          <a:p>
+            <a:pPr>
+              <a:spcAft>
+                <a:spcPts val="300"/>
+              </a:spcAft>
+            </a:pPr>
+            <a:r>
+              <a:rPr sz="1600" b="0">
+                <a:solidFill>
+                  <a:srgbClr val="F2F2F2"/>
+                </a:solidFill>
+                <a:latin typeface="Calibri"/>
+              </a:rPr>
+              <a:t>  ecx = ?</a:t>
+            </a:r>
+          </a:p>
+          <a:p>
+            <a:pPr>
+              <a:spcAft>
+                <a:spcPts val="300"/>
+              </a:spcAft>
+            </a:pPr>
+            <a:r>
+              <a:rPr sz="1600" b="0">
+                <a:solidFill>
+                  <a:srgbClr val="F2F2F2"/>
+                </a:solidFill>
+                <a:latin typeface="Calibri"/>
+              </a:rPr>
+              <a:t> </a:t>
+            </a:r>
+          </a:p>
+          <a:p>
+            <a:pPr>
+              <a:spcAft>
+                <a:spcPts val="300"/>
+              </a:spcAft>
+            </a:pPr>
+            <a:r>
+              <a:rPr sz="1400" b="1">
+                <a:solidFill>
+                  <a:srgbClr val="7CDA6A"/>
+                </a:solidFill>
+                <a:latin typeface="Consolas"/>
+              </a:rPr>
+              <a:t>After  mov eax, ecx</a:t>
+            </a:r>
+          </a:p>
+          <a:p>
+            <a:pPr>
+              <a:spcAft>
+                <a:spcPts val="300"/>
+              </a:spcAft>
+            </a:pPr>
+            <a:r>
+              <a:rPr sz="1600" b="0">
+                <a:solidFill>
+                  <a:srgbClr val="F2F2F2"/>
+                </a:solidFill>
+                <a:latin typeface="Calibri"/>
+              </a:rPr>
+              <a:t>  eax = ?</a:t>
             </a:r>
           </a:p>
         </p:txBody>
@@ -11595,21 +11739,41 @@
         </p:nvSpPr>
         <p:spPr>
           <a:xfrm>
-            <a:off x="6766560" y="1783080"/>
-            <a:ext cx="4800600" cy="4206240"/>
-          </a:xfrm>
-          <a:prstGeom prst="rect">
-            <a:avLst/>
-          </a:prstGeom>
-          <a:noFill/>
-        </p:spPr>
-        <p:txBody>
-          <a:bodyPr wrap="square">
-            <a:spAutoFit/>
-          </a:bodyPr>
-          <a:lstStyle/>
-          <a:p>
-            <a:pPr algn="l"/>
+            <a:off x="6766560" y="1737360"/>
+            <a:ext cx="4800600" cy="4297680"/>
+          </a:xfrm>
+          <a:prstGeom prst="rect">
+            <a:avLst/>
+          </a:prstGeom>
+          <a:noFill/>
+        </p:spPr>
+        <p:txBody>
+          <a:bodyPr wrap="square">
+            <a:spAutoFit/>
+          </a:bodyPr>
+          <a:lstStyle/>
+          <a:p>
+            <a:pPr>
+              <a:spcAft>
+                <a:spcPts val="300"/>
+              </a:spcAft>
+            </a:pPr>
+            <a:r>
+              <a:rPr sz="1400" b="1">
+                <a:solidFill>
+                  <a:srgbClr val="7CDA6A"/>
+                </a:solidFill>
+                <a:latin typeface="Consolas"/>
+              </a:rPr>
+              <a:t>disass main in ch_arith.</a:t>
+            </a:r>
+          </a:p>
+          <a:p>
+            <a:pPr>
+              <a:spcAft>
+                <a:spcPts val="300"/>
+              </a:spcAft>
+            </a:pPr>
             <a:r>
               <a:rPr sz="1600" b="0">
                 <a:solidFill>
@@ -11617,9 +11781,135 @@
                 </a:solidFill>
                 <a:latin typeface="Calibri"/>
               </a:rPr>
-              <a:t>Same ops, different start value and an extra inc.
-break check
-  eax = ?</a:t>
+              <a:t> </a:t>
+            </a:r>
+          </a:p>
+          <a:p>
+            <a:pPr>
+              <a:spcAft>
+                <a:spcPts val="300"/>
+              </a:spcAft>
+            </a:pPr>
+            <a:r>
+              <a:rPr sz="1400" b="1">
+                <a:solidFill>
+                  <a:srgbClr val="7CDA6A"/>
+                </a:solidFill>
+                <a:latin typeface="Consolas"/>
+              </a:rPr>
+              <a:t>After  add eax, 7</a:t>
+            </a:r>
+          </a:p>
+          <a:p>
+            <a:pPr>
+              <a:spcAft>
+                <a:spcPts val="300"/>
+              </a:spcAft>
+            </a:pPr>
+            <a:r>
+              <a:rPr sz="1600" b="0">
+                <a:solidFill>
+                  <a:srgbClr val="F2F2F2"/>
+                </a:solidFill>
+                <a:latin typeface="Calibri"/>
+              </a:rPr>
+              <a:t>  eax = ?</a:t>
+            </a:r>
+          </a:p>
+          <a:p>
+            <a:pPr>
+              <a:spcAft>
+                <a:spcPts val="300"/>
+              </a:spcAft>
+            </a:pPr>
+            <a:r>
+              <a:rPr sz="1600" b="0">
+                <a:solidFill>
+                  <a:srgbClr val="F2F2F2"/>
+                </a:solidFill>
+                <a:latin typeface="Calibri"/>
+              </a:rPr>
+              <a:t> </a:t>
+            </a:r>
+          </a:p>
+          <a:p>
+            <a:pPr>
+              <a:spcAft>
+                <a:spcPts val="300"/>
+              </a:spcAft>
+            </a:pPr>
+            <a:r>
+              <a:rPr sz="1400" b="1">
+                <a:solidFill>
+                  <a:srgbClr val="7CDA6A"/>
+                </a:solidFill>
+                <a:latin typeface="Consolas"/>
+              </a:rPr>
+              <a:t>After the two inc and one dec</a:t>
+            </a:r>
+          </a:p>
+          <a:p>
+            <a:pPr>
+              <a:spcAft>
+                <a:spcPts val="300"/>
+              </a:spcAft>
+            </a:pPr>
+            <a:r>
+              <a:rPr sz="1600" b="0">
+                <a:solidFill>
+                  <a:srgbClr val="F2F2F2"/>
+                </a:solidFill>
+                <a:latin typeface="Calibri"/>
+              </a:rPr>
+              <a:t>  eax = ?</a:t>
+            </a:r>
+          </a:p>
+          <a:p>
+            <a:pPr>
+              <a:spcAft>
+                <a:spcPts val="300"/>
+              </a:spcAft>
+            </a:pPr>
+            <a:r>
+              <a:rPr sz="1600" b="0">
+                <a:solidFill>
+                  <a:srgbClr val="F2F2F2"/>
+                </a:solidFill>
+                <a:latin typeface="Calibri"/>
+              </a:rPr>
+              <a:t> </a:t>
+            </a:r>
+          </a:p>
+          <a:p>
+            <a:pPr>
+              <a:spcAft>
+                <a:spcPts val="300"/>
+              </a:spcAft>
+            </a:pPr>
+            <a:r>
+              <a:rPr sz="1400" b="1">
+                <a:solidFill>
+                  <a:srgbClr val="7CDA6A"/>
+                </a:solidFill>
+                <a:latin typeface="Consolas"/>
+              </a:rPr>
+              <a:t>At check, after  add eax, ebx</a:t>
+            </a:r>
+          </a:p>
+          <a:p>
+            <a:pPr>
+              <a:spcAft>
+                <a:spcPts val="300"/>
+              </a:spcAft>
+            </a:pPr>
+            <a:r>
+              <a:rPr sz="1600" b="0">
+                <a:solidFill>
+                  <a:srgbClr val="F2F2F2"/>
+                </a:solidFill>
+                <a:latin typeface="Calibri"/>
+              </a:rPr>
+              <a:t>  eax = ?</a:t>
             </a:r>
           </a:p>
         </p:txBody>
@@ -13015,21 +13305,41 @@
         </p:nvSpPr>
         <p:spPr>
           <a:xfrm>
-            <a:off x="6766560" y="1783080"/>
-            <a:ext cx="4800600" cy="4206240"/>
-          </a:xfrm>
-          <a:prstGeom prst="rect">
-            <a:avLst/>
-          </a:prstGeom>
-          <a:noFill/>
-        </p:spPr>
-        <p:txBody>
-          <a:bodyPr wrap="square">
-            <a:spAutoFit/>
-          </a:bodyPr>
-          <a:lstStyle/>
-          <a:p>
-            <a:pPr algn="l"/>
+            <a:off x="6766560" y="1737360"/>
+            <a:ext cx="4800600" cy="4297680"/>
+          </a:xfrm>
+          <a:prstGeom prst="rect">
+            <a:avLst/>
+          </a:prstGeom>
+          <a:noFill/>
+        </p:spPr>
+        <p:txBody>
+          <a:bodyPr wrap="square">
+            <a:spAutoFit/>
+          </a:bodyPr>
+          <a:lstStyle/>
+          <a:p>
+            <a:pPr>
+              <a:spcAft>
+                <a:spcPts val="300"/>
+              </a:spcAft>
+            </a:pPr>
+            <a:r>
+              <a:rPr sz="1400" b="1">
+                <a:solidFill>
+                  <a:srgbClr val="7CDA6A"/>
+                </a:solidFill>
+                <a:latin typeface="Consolas"/>
+              </a:rPr>
+              <a:t>disass main in ch_xor.</a:t>
+            </a:r>
+          </a:p>
+          <a:p>
+            <a:pPr>
+              <a:spcAft>
+                <a:spcPts val="300"/>
+              </a:spcAft>
+            </a:pPr>
             <a:r>
               <a:rPr sz="1600" b="0">
                 <a:solidFill>
@@ -13037,12 +13347,199 @@
                 </a:solidFill>
                 <a:latin typeface="Calibri"/>
               </a:rPr>
-              <a:t>xor eax with a value, then xor ebx with itself, then xor those together.
-break check
-  eax = ?
-  ZF set?
-print ($eflags &amp; 0x40)
-non-zero = ZF set</a:t>
+              <a:t> </a:t>
+            </a:r>
+          </a:p>
+          <a:p>
+            <a:pPr>
+              <a:spcAft>
+                <a:spcPts val="300"/>
+              </a:spcAft>
+            </a:pPr>
+            <a:r>
+              <a:rPr sz="1400" b="1">
+                <a:solidFill>
+                  <a:srgbClr val="7CDA6A"/>
+                </a:solidFill>
+                <a:latin typeface="Consolas"/>
+              </a:rPr>
+              <a:t>After  xor eax, 0x12</a:t>
+            </a:r>
+          </a:p>
+          <a:p>
+            <a:pPr>
+              <a:spcAft>
+                <a:spcPts val="300"/>
+              </a:spcAft>
+            </a:pPr>
+            <a:r>
+              <a:rPr sz="1600" b="0">
+                <a:solidFill>
+                  <a:srgbClr val="F2F2F2"/>
+                </a:solidFill>
+                <a:latin typeface="Calibri"/>
+              </a:rPr>
+              <a:t>  eax = ?</a:t>
+            </a:r>
+          </a:p>
+          <a:p>
+            <a:pPr>
+              <a:spcAft>
+                <a:spcPts val="300"/>
+              </a:spcAft>
+            </a:pPr>
+            <a:r>
+              <a:rPr sz="1600" b="0">
+                <a:solidFill>
+                  <a:srgbClr val="F2F2F2"/>
+                </a:solidFill>
+                <a:latin typeface="Calibri"/>
+              </a:rPr>
+              <a:t> </a:t>
+            </a:r>
+          </a:p>
+          <a:p>
+            <a:pPr>
+              <a:spcAft>
+                <a:spcPts val="300"/>
+              </a:spcAft>
+            </a:pPr>
+            <a:r>
+              <a:rPr sz="1400" b="1">
+                <a:solidFill>
+                  <a:srgbClr val="7CDA6A"/>
+                </a:solidFill>
+                <a:latin typeface="Consolas"/>
+              </a:rPr>
+              <a:t>After  xor ebx, 0xAA</a:t>
+            </a:r>
+          </a:p>
+          <a:p>
+            <a:pPr>
+              <a:spcAft>
+                <a:spcPts val="300"/>
+              </a:spcAft>
+            </a:pPr>
+            <a:r>
+              <a:rPr sz="1600" b="0">
+                <a:solidFill>
+                  <a:srgbClr val="F2F2F2"/>
+                </a:solidFill>
+                <a:latin typeface="Calibri"/>
+              </a:rPr>
+              <a:t>  ebx = ?</a:t>
+            </a:r>
+          </a:p>
+          <a:p>
+            <a:pPr>
+              <a:spcAft>
+                <a:spcPts val="300"/>
+              </a:spcAft>
+            </a:pPr>
+            <a:r>
+              <a:rPr sz="1600" b="0">
+                <a:solidFill>
+                  <a:srgbClr val="F2F2F2"/>
+                </a:solidFill>
+                <a:latin typeface="Calibri"/>
+              </a:rPr>
+              <a:t>  ZF set?</a:t>
+            </a:r>
+          </a:p>
+          <a:p>
+            <a:pPr>
+              <a:spcAft>
+                <a:spcPts val="300"/>
+              </a:spcAft>
+            </a:pPr>
+            <a:r>
+              <a:rPr sz="1600" b="0">
+                <a:solidFill>
+                  <a:srgbClr val="F2F2F2"/>
+                </a:solidFill>
+                <a:latin typeface="Calibri"/>
+              </a:rPr>
+              <a:t> </a:t>
+            </a:r>
+          </a:p>
+          <a:p>
+            <a:pPr>
+              <a:spcAft>
+                <a:spcPts val="300"/>
+              </a:spcAft>
+            </a:pPr>
+            <a:r>
+              <a:rPr sz="1400" b="1">
+                <a:solidFill>
+                  <a:srgbClr val="7CDA6A"/>
+                </a:solidFill>
+                <a:latin typeface="Consolas"/>
+              </a:rPr>
+              <a:t>At check, after  xor eax, ebx</a:t>
+            </a:r>
+          </a:p>
+          <a:p>
+            <a:pPr>
+              <a:spcAft>
+                <a:spcPts val="300"/>
+              </a:spcAft>
+            </a:pPr>
+            <a:r>
+              <a:rPr sz="1600" b="0">
+                <a:solidFill>
+                  <a:srgbClr val="F2F2F2"/>
+                </a:solidFill>
+                <a:latin typeface="Calibri"/>
+              </a:rPr>
+              <a:t>  eax = ?</a:t>
+            </a:r>
+          </a:p>
+          <a:p>
+            <a:pPr>
+              <a:spcAft>
+                <a:spcPts val="300"/>
+              </a:spcAft>
+            </a:pPr>
+            <a:r>
+              <a:rPr sz="1600" b="0">
+                <a:solidFill>
+                  <a:srgbClr val="F2F2F2"/>
+                </a:solidFill>
+                <a:latin typeface="Calibri"/>
+              </a:rPr>
+              <a:t>  ZF set?</a:t>
+            </a:r>
+          </a:p>
+          <a:p>
+            <a:pPr>
+              <a:spcAft>
+                <a:spcPts val="300"/>
+              </a:spcAft>
+            </a:pPr>
+            <a:r>
+              <a:rPr sz="1600" b="0">
+                <a:solidFill>
+                  <a:srgbClr val="F2F2F2"/>
+                </a:solidFill>
+                <a:latin typeface="Calibri"/>
+              </a:rPr>
+              <a:t> </a:t>
+            </a:r>
+          </a:p>
+          <a:p>
+            <a:pPr>
+              <a:spcAft>
+                <a:spcPts val="300"/>
+              </a:spcAft>
+            </a:pPr>
+            <a:r>
+              <a:rPr sz="1400" b="1">
+                <a:solidFill>
+                  <a:srgbClr val="7CDA6A"/>
+                </a:solidFill>
+                <a:latin typeface="Consolas"/>
+              </a:rPr>
+              <a:t>print ($eflags &amp; 0x40)   non-zero = set</a:t>
             </a:r>
           </a:p>
         </p:txBody>
@@ -13964,21 +14461,41 @@
         </p:nvSpPr>
         <p:spPr>
           <a:xfrm>
-            <a:off x="6766560" y="1783080"/>
-            <a:ext cx="4800600" cy="4206240"/>
-          </a:xfrm>
-          <a:prstGeom prst="rect">
-            <a:avLst/>
-          </a:prstGeom>
-          <a:noFill/>
-        </p:spPr>
-        <p:txBody>
-          <a:bodyPr wrap="square">
-            <a:spAutoFit/>
-          </a:bodyPr>
-          <a:lstStyle/>
-          <a:p>
-            <a:pPr algn="l"/>
+            <a:off x="6766560" y="1737360"/>
+            <a:ext cx="4800600" cy="4297680"/>
+          </a:xfrm>
+          <a:prstGeom prst="rect">
+            <a:avLst/>
+          </a:prstGeom>
+          <a:noFill/>
+        </p:spPr>
+        <p:txBody>
+          <a:bodyPr wrap="square">
+            <a:spAutoFit/>
+          </a:bodyPr>
+          <a:lstStyle/>
+          <a:p>
+            <a:pPr>
+              <a:spcAft>
+                <a:spcPts val="300"/>
+              </a:spcAft>
+            </a:pPr>
+            <a:r>
+              <a:rPr sz="1400" b="1">
+                <a:solidFill>
+                  <a:srgbClr val="7CDA6A"/>
+                </a:solidFill>
+                <a:latin typeface="Consolas"/>
+              </a:rPr>
+              <a:t>disass main in ch_jmp.</a:t>
+            </a:r>
+          </a:p>
+          <a:p>
+            <a:pPr>
+              <a:spcAft>
+                <a:spcPts val="300"/>
+              </a:spcAft>
+            </a:pPr>
             <a:r>
               <a:rPr sz="1600" b="0">
                 <a:solidFill>
@@ -13986,10 +14503,135 @@
                 </a:solidFill>
                 <a:latin typeface="Calibri"/>
               </a:rPr>
-              <a:t>Compares two numbers, takes je or jne.
-break check
-  eax = ?
-  equal path or not_equal?</a:t>
+              <a:t> </a:t>
+            </a:r>
+          </a:p>
+          <a:p>
+            <a:pPr>
+              <a:spcAft>
+                <a:spcPts val="300"/>
+              </a:spcAft>
+            </a:pPr>
+            <a:r>
+              <a:rPr sz="1400" b="1">
+                <a:solidFill>
+                  <a:srgbClr val="7CDA6A"/>
+                </a:solidFill>
+                <a:latin typeface="Consolas"/>
+              </a:rPr>
+              <a:t>After  cmp eax, ebx</a:t>
+            </a:r>
+          </a:p>
+          <a:p>
+            <a:pPr>
+              <a:spcAft>
+                <a:spcPts val="300"/>
+              </a:spcAft>
+            </a:pPr>
+            <a:r>
+              <a:rPr sz="1600" b="0">
+                <a:solidFill>
+                  <a:srgbClr val="F2F2F2"/>
+                </a:solidFill>
+                <a:latin typeface="Calibri"/>
+              </a:rPr>
+              <a:t>  equal or not?</a:t>
+            </a:r>
+          </a:p>
+          <a:p>
+            <a:pPr>
+              <a:spcAft>
+                <a:spcPts val="300"/>
+              </a:spcAft>
+            </a:pPr>
+            <a:r>
+              <a:rPr sz="1600" b="0">
+                <a:solidFill>
+                  <a:srgbClr val="F2F2F2"/>
+                </a:solidFill>
+                <a:latin typeface="Calibri"/>
+              </a:rPr>
+              <a:t> </a:t>
+            </a:r>
+          </a:p>
+          <a:p>
+            <a:pPr>
+              <a:spcAft>
+                <a:spcPts val="300"/>
+              </a:spcAft>
+            </a:pPr>
+            <a:r>
+              <a:rPr sz="1400" b="1">
+                <a:solidFill>
+                  <a:srgbClr val="7CDA6A"/>
+                </a:solidFill>
+                <a:latin typeface="Consolas"/>
+              </a:rPr>
+              <a:t>Does  je  run, or  jne?</a:t>
+            </a:r>
+          </a:p>
+          <a:p>
+            <a:pPr>
+              <a:spcAft>
+                <a:spcPts val="300"/>
+              </a:spcAft>
+            </a:pPr>
+            <a:r>
+              <a:rPr sz="1600" b="0">
+                <a:solidFill>
+                  <a:srgbClr val="F2F2F2"/>
+                </a:solidFill>
+                <a:latin typeface="Calibri"/>
+              </a:rPr>
+              <a:t> </a:t>
+            </a:r>
+          </a:p>
+          <a:p>
+            <a:pPr>
+              <a:spcAft>
+                <a:spcPts val="300"/>
+              </a:spcAft>
+            </a:pPr>
+            <a:r>
+              <a:rPr sz="1400" b="1">
+                <a:solidFill>
+                  <a:srgbClr val="7CDA6A"/>
+                </a:solidFill>
+                <a:latin typeface="Consolas"/>
+              </a:rPr>
+              <a:t>At check</a:t>
+            </a:r>
+          </a:p>
+          <a:p>
+            <a:pPr>
+              <a:spcAft>
+                <a:spcPts val="300"/>
+              </a:spcAft>
+            </a:pPr>
+            <a:r>
+              <a:rPr sz="1600" b="0">
+                <a:solidFill>
+                  <a:srgbClr val="F2F2F2"/>
+                </a:solidFill>
+                <a:latin typeface="Calibri"/>
+              </a:rPr>
+              <a:t>  eax = ?</a:t>
+            </a:r>
+          </a:p>
+          <a:p>
+            <a:pPr>
+              <a:spcAft>
+                <a:spcPts val="300"/>
+              </a:spcAft>
+            </a:pPr>
+            <a:r>
+              <a:rPr sz="1600" b="0">
+                <a:solidFill>
+                  <a:srgbClr val="F2F2F2"/>
+                </a:solidFill>
+                <a:latin typeface="Calibri"/>
+              </a:rPr>
+              <a:t>  which label ran: equal or not_equal?</a:t>
             </a:r>
           </a:p>
         </p:txBody>
@@ -14911,21 +15553,41 @@
         </p:nvSpPr>
         <p:spPr>
           <a:xfrm>
-            <a:off x="6766560" y="1783080"/>
-            <a:ext cx="4800600" cy="4206240"/>
-          </a:xfrm>
-          <a:prstGeom prst="rect">
-            <a:avLst/>
-          </a:prstGeom>
-          <a:noFill/>
-        </p:spPr>
-        <p:txBody>
-          <a:bodyPr wrap="square">
-            <a:spAutoFit/>
-          </a:bodyPr>
-          <a:lstStyle/>
-          <a:p>
-            <a:pPr algn="l"/>
+            <a:off x="6766560" y="1737360"/>
+            <a:ext cx="4800600" cy="4297680"/>
+          </a:xfrm>
+          <a:prstGeom prst="rect">
+            <a:avLst/>
+          </a:prstGeom>
+          <a:noFill/>
+        </p:spPr>
+        <p:txBody>
+          <a:bodyPr wrap="square">
+            <a:spAutoFit/>
+          </a:bodyPr>
+          <a:lstStyle/>
+          <a:p>
+            <a:pPr>
+              <a:spcAft>
+                <a:spcPts val="300"/>
+              </a:spcAft>
+            </a:pPr>
+            <a:r>
+              <a:rPr sz="1400" b="1">
+                <a:solidFill>
+                  <a:srgbClr val="7CDA6A"/>
+                </a:solidFill>
+                <a:latin typeface="Consolas"/>
+              </a:rPr>
+              <a:t>disass main in ch_stack.</a:t>
+            </a:r>
+          </a:p>
+          <a:p>
+            <a:pPr>
+              <a:spcAft>
+                <a:spcPts val="300"/>
+              </a:spcAft>
+            </a:pPr>
             <a:r>
               <a:rPr sz="1600" b="0">
                 <a:solidFill>
@@ -14933,13 +15595,151 @@
                 </a:solidFill>
                 <a:latin typeface="Calibri"/>
               </a:rPr>
-              <a:t>Two pushes, then two pops. Last in, first out.
-break before_pop
-  [esp] = ?
-  [esp+4] = ?
-break check
-  ecx = ?
-  edx = ?</a:t>
+              <a:t> </a:t>
+            </a:r>
+          </a:p>
+          <a:p>
+            <a:pPr>
+              <a:spcAft>
+                <a:spcPts val="300"/>
+              </a:spcAft>
+            </a:pPr>
+            <a:r>
+              <a:rPr sz="1400" b="1">
+                <a:solidFill>
+                  <a:srgbClr val="7CDA6A"/>
+                </a:solidFill>
+                <a:latin typeface="Consolas"/>
+              </a:rPr>
+              <a:t>At before_pop (both pushed, nothing popped yet)</a:t>
+            </a:r>
+          </a:p>
+          <a:p>
+            <a:pPr>
+              <a:spcAft>
+                <a:spcPts val="300"/>
+              </a:spcAft>
+            </a:pPr>
+            <a:r>
+              <a:rPr sz="1600" b="0">
+                <a:solidFill>
+                  <a:srgbClr val="F2F2F2"/>
+                </a:solidFill>
+                <a:latin typeface="Calibri"/>
+              </a:rPr>
+              <a:t>  [esp] = ?</a:t>
+            </a:r>
+          </a:p>
+          <a:p>
+            <a:pPr>
+              <a:spcAft>
+                <a:spcPts val="300"/>
+              </a:spcAft>
+            </a:pPr>
+            <a:r>
+              <a:rPr sz="1600" b="0">
+                <a:solidFill>
+                  <a:srgbClr val="F2F2F2"/>
+                </a:solidFill>
+                <a:latin typeface="Calibri"/>
+              </a:rPr>
+              <a:t>  [esp+4] = ?</a:t>
+            </a:r>
+          </a:p>
+          <a:p>
+            <a:pPr>
+              <a:spcAft>
+                <a:spcPts val="300"/>
+              </a:spcAft>
+            </a:pPr>
+            <a:r>
+              <a:rPr sz="1600" b="0">
+                <a:solidFill>
+                  <a:srgbClr val="F2F2F2"/>
+                </a:solidFill>
+                <a:latin typeface="Calibri"/>
+              </a:rPr>
+              <a:t> </a:t>
+            </a:r>
+          </a:p>
+          <a:p>
+            <a:pPr>
+              <a:spcAft>
+                <a:spcPts val="300"/>
+              </a:spcAft>
+            </a:pPr>
+            <a:r>
+              <a:rPr sz="1400" b="1">
+                <a:solidFill>
+                  <a:srgbClr val="7CDA6A"/>
+                </a:solidFill>
+                <a:latin typeface="Consolas"/>
+              </a:rPr>
+              <a:t>After  pop ecx</a:t>
+            </a:r>
+          </a:p>
+          <a:p>
+            <a:pPr>
+              <a:spcAft>
+                <a:spcPts val="300"/>
+              </a:spcAft>
+            </a:pPr>
+            <a:r>
+              <a:rPr sz="1600" b="0">
+                <a:solidFill>
+                  <a:srgbClr val="F2F2F2"/>
+                </a:solidFill>
+                <a:latin typeface="Calibri"/>
+              </a:rPr>
+              <a:t>  ecx = ?</a:t>
+            </a:r>
+          </a:p>
+          <a:p>
+            <a:pPr>
+              <a:spcAft>
+                <a:spcPts val="300"/>
+              </a:spcAft>
+            </a:pPr>
+            <a:r>
+              <a:rPr sz="1600" b="0">
+                <a:solidFill>
+                  <a:srgbClr val="F2F2F2"/>
+                </a:solidFill>
+                <a:latin typeface="Calibri"/>
+              </a:rPr>
+              <a:t> </a:t>
+            </a:r>
+          </a:p>
+          <a:p>
+            <a:pPr>
+              <a:spcAft>
+                <a:spcPts val="300"/>
+              </a:spcAft>
+            </a:pPr>
+            <a:r>
+              <a:rPr sz="1400" b="1">
+                <a:solidFill>
+                  <a:srgbClr val="7CDA6A"/>
+                </a:solidFill>
+                <a:latin typeface="Consolas"/>
+              </a:rPr>
+              <a:t>After  pop edx</a:t>
+            </a:r>
+          </a:p>
+          <a:p>
+            <a:pPr>
+              <a:spcAft>
+                <a:spcPts val="300"/>
+              </a:spcAft>
+            </a:pPr>
+            <a:r>
+              <a:rPr sz="1600" b="0">
+                <a:solidFill>
+                  <a:srgbClr val="F2F2F2"/>
+                </a:solidFill>
+                <a:latin typeface="Calibri"/>
+              </a:rPr>
+              <a:t>  edx = ?</a:t>
             </a:r>
           </a:p>
         </p:txBody>
@@ -15861,21 +16661,41 @@
         </p:nvSpPr>
         <p:spPr>
           <a:xfrm>
-            <a:off x="6766560" y="1783080"/>
-            <a:ext cx="4800600" cy="4206240"/>
-          </a:xfrm>
-          <a:prstGeom prst="rect">
-            <a:avLst/>
-          </a:prstGeom>
-          <a:noFill/>
-        </p:spPr>
-        <p:txBody>
-          <a:bodyPr wrap="square">
-            <a:spAutoFit/>
-          </a:bodyPr>
-          <a:lstStyle/>
-          <a:p>
-            <a:pPr algn="l"/>
+            <a:off x="6766560" y="1737360"/>
+            <a:ext cx="4800600" cy="4297680"/>
+          </a:xfrm>
+          <a:prstGeom prst="rect">
+            <a:avLst/>
+          </a:prstGeom>
+          <a:noFill/>
+        </p:spPr>
+        <p:txBody>
+          <a:bodyPr wrap="square">
+            <a:spAutoFit/>
+          </a:bodyPr>
+          <a:lstStyle/>
+          <a:p>
+            <a:pPr>
+              <a:spcAft>
+                <a:spcPts val="300"/>
+              </a:spcAft>
+            </a:pPr>
+            <a:r>
+              <a:rPr sz="1400" b="1">
+                <a:solidFill>
+                  <a:srgbClr val="7CDA6A"/>
+                </a:solidFill>
+                <a:latin typeface="Consolas"/>
+              </a:rPr>
+              <a:t>disass main and triple in ch_call.</a:t>
+            </a:r>
+          </a:p>
+          <a:p>
+            <a:pPr>
+              <a:spcAft>
+                <a:spcPts val="300"/>
+              </a:spcAft>
+            </a:pPr>
             <a:r>
               <a:rPr sz="1600" b="0">
                 <a:solidFill>
@@ -15883,9 +16703,71 @@
                 </a:solidFill>
                 <a:latin typeface="Calibri"/>
               </a:rPr>
-              <a:t>Calls triple instead of add_one. Different argument.
-break check  (after call returns)
-  eax = ?</a:t>
+              <a:t> </a:t>
+            </a:r>
+          </a:p>
+          <a:p>
+            <a:pPr>
+              <a:spcAft>
+                <a:spcPts val="300"/>
+              </a:spcAft>
+            </a:pPr>
+            <a:r>
+              <a:rPr sz="1400" b="1">
+                <a:solidFill>
+                  <a:srgbClr val="7CDA6A"/>
+                </a:solidFill>
+                <a:latin typeface="Consolas"/>
+              </a:rPr>
+              <a:t>What does triple do with [ebp+8]?</a:t>
+            </a:r>
+          </a:p>
+          <a:p>
+            <a:pPr>
+              <a:spcAft>
+                <a:spcPts val="300"/>
+              </a:spcAft>
+            </a:pPr>
+            <a:r>
+              <a:rPr sz="1600" b="0">
+                <a:solidFill>
+                  <a:srgbClr val="F2F2F2"/>
+                </a:solidFill>
+                <a:latin typeface="Calibri"/>
+              </a:rPr>
+              <a:t> </a:t>
+            </a:r>
+          </a:p>
+          <a:p>
+            <a:pPr>
+              <a:spcAft>
+                <a:spcPts val="300"/>
+              </a:spcAft>
+            </a:pPr>
+            <a:r>
+              <a:rPr sz="1400" b="1">
+                <a:solidFill>
+                  <a:srgbClr val="7CDA6A"/>
+                </a:solidFill>
+                <a:latin typeface="Consolas"/>
+              </a:rPr>
+              <a:t>After  call triple  returns (label check)</a:t>
+            </a:r>
+          </a:p>
+          <a:p>
+            <a:pPr>
+              <a:spcAft>
+                <a:spcPts val="300"/>
+              </a:spcAft>
+            </a:pPr>
+            <a:r>
+              <a:rPr sz="1600" b="0">
+                <a:solidFill>
+                  <a:srgbClr val="F2F2F2"/>
+                </a:solidFill>
+                <a:latin typeface="Calibri"/>
+              </a:rPr>
+              <a:t>  eax = ?</a:t>
             </a:r>
           </a:p>
         </p:txBody>

--- a/Reverse Engineering 101.pptx
+++ b/Reverse Engineering 101.pptx
@@ -3424,7 +3424,6 @@
           <a:lstStyle/>
           <a:p>
             <a:pPr algn="ctr"/>
-            <a:endParaRPr/>
           </a:p>
         </p:txBody>
       </p:sp>
@@ -3459,6 +3458,41 @@
                 <a:latin typeface="Calibri"/>
               </a:rPr>
               <a:t>Install GDB + GEF</a:t>
+            </a:r>
+          </a:p>
+        </p:txBody>
+      </p:sp>
+      <p:sp>
+        <p:nvSpPr>
+          <p:cNvPr id="4" name="TextBox 3"/>
+          <p:cNvSpPr txBox="1"/>
+          <p:nvPr/>
+        </p:nvSpPr>
+        <p:spPr>
+          <a:xfrm>
+            <a:off x="457200" y="960120"/>
+            <a:ext cx="11247120" cy="365760"/>
+          </a:xfrm>
+          <a:prstGeom prst="rect">
+            <a:avLst/>
+          </a:prstGeom>
+          <a:noFill/>
+        </p:spPr>
+        <p:txBody>
+          <a:bodyPr wrap="square">
+            <a:spAutoFit/>
+          </a:bodyPr>
+          <a:lstStyle/>
+          <a:p>
+            <a:pPr algn="l"/>
+            <a:r>
+              <a:rPr sz="1700" b="0">
+                <a:solidFill>
+                  <a:srgbClr val="B0B0B0"/>
+                </a:solidFill>
+                <a:latin typeface="Calibri"/>
+              </a:rPr>
+              <a:t>Debian / Ubuntu / WSL. New terminal after GEF so it loads.</a:t>
             </a:r>
           </a:p>
         </p:txBody>
@@ -3504,7 +3538,6 @@
           <a:lstStyle/>
           <a:p>
             <a:pPr algn="ctr"/>
-            <a:endParaRPr/>
           </a:p>
         </p:txBody>
       </p:sp>
@@ -3516,8 +3549,8 @@
         </p:nvSpPr>
         <p:spPr>
           <a:xfrm>
-            <a:off x="685800" y="1600200"/>
-            <a:ext cx="10789920" cy="3657411"/>
+            <a:off x="685800" y="1572768"/>
+            <a:ext cx="10789920" cy="4617720"/>
           </a:xfrm>
           <a:prstGeom prst="rect">
             <a:avLst/>
@@ -3532,244 +3565,130 @@
           <a:p>
             <a:pPr>
               <a:spcAft>
-                <a:spcPts val="1000"/>
+                <a:spcPts val="800"/>
               </a:spcAft>
             </a:pPr>
-            <a:br>
-              <a:rPr lang="en-IN" sz="2000" b="1" dirty="0">
+            <a:r>
+              <a:rPr sz="2000" b="1">
                 <a:solidFill>
                   <a:srgbClr val="7CDA6A"/>
                 </a:solidFill>
                 <a:latin typeface="Consolas"/>
               </a:rPr>
-            </a:br>
-            <a:br>
-              <a:rPr lang="en-IN" sz="2000" b="1" dirty="0">
-                <a:solidFill>
-                  <a:srgbClr val="7CDA6A"/>
-                </a:solidFill>
-                <a:latin typeface="Consolas"/>
-              </a:rPr>
-            </a:br>
-            <a:r>
-              <a:rPr sz="2000" b="1" dirty="0" err="1">
-                <a:solidFill>
-                  <a:srgbClr val="7CDA6A"/>
-                </a:solidFill>
-                <a:latin typeface="Consolas"/>
-              </a:rPr>
-              <a:t>sudo</a:t>
-            </a:r>
-            <a:r>
-              <a:rPr sz="2000" b="1" dirty="0">
-                <a:solidFill>
-                  <a:srgbClr val="7CDA6A"/>
-                </a:solidFill>
-                <a:latin typeface="Consolas"/>
-              </a:rPr>
-              <a:t> apt update</a:t>
+              <a:t>sudo apt update</a:t>
             </a:r>
           </a:p>
           <a:p>
             <a:pPr>
               <a:spcAft>
-                <a:spcPts val="1000"/>
+                <a:spcPts val="800"/>
               </a:spcAft>
             </a:pPr>
             <a:r>
-              <a:rPr sz="1800" b="1" dirty="0" err="1">
+              <a:rPr sz="1600" b="1">
                 <a:solidFill>
                   <a:srgbClr val="7CDA6A"/>
                 </a:solidFill>
                 <a:latin typeface="Consolas"/>
               </a:rPr>
-              <a:t>sudo</a:t>
-            </a:r>
-            <a:r>
-              <a:rPr sz="1800" b="1" dirty="0">
-                <a:solidFill>
-                  <a:srgbClr val="7CDA6A"/>
-                </a:solidFill>
-                <a:latin typeface="Consolas"/>
-              </a:rPr>
-              <a:t> apt install -y build-essential </a:t>
-            </a:r>
-            <a:r>
-              <a:rPr sz="1800" b="1" dirty="0" err="1">
-                <a:solidFill>
-                  <a:srgbClr val="7CDA6A"/>
-                </a:solidFill>
-                <a:latin typeface="Consolas"/>
-              </a:rPr>
-              <a:t>gcc-multilib</a:t>
-            </a:r>
-            <a:r>
-              <a:rPr sz="1800" b="1" dirty="0">
-                <a:solidFill>
-                  <a:srgbClr val="7CDA6A"/>
-                </a:solidFill>
-                <a:latin typeface="Consolas"/>
-              </a:rPr>
-              <a:t> </a:t>
-            </a:r>
-            <a:r>
-              <a:rPr sz="1800" b="1" dirty="0" err="1">
-                <a:solidFill>
-                  <a:srgbClr val="7CDA6A"/>
-                </a:solidFill>
-                <a:latin typeface="Consolas"/>
-              </a:rPr>
-              <a:t>gdb</a:t>
-            </a:r>
-            <a:r>
-              <a:rPr sz="1800" b="1" dirty="0">
-                <a:solidFill>
-                  <a:srgbClr val="7CDA6A"/>
-                </a:solidFill>
-                <a:latin typeface="Consolas"/>
-              </a:rPr>
-              <a:t> python3 </a:t>
-            </a:r>
-            <a:r>
-              <a:rPr sz="1800" b="1" dirty="0" err="1">
-                <a:solidFill>
-                  <a:srgbClr val="7CDA6A"/>
-                </a:solidFill>
-                <a:latin typeface="Consolas"/>
-              </a:rPr>
-              <a:t>hexedit</a:t>
-            </a:r>
-            <a:r>
-              <a:rPr sz="1800" b="1" dirty="0">
-                <a:solidFill>
-                  <a:srgbClr val="7CDA6A"/>
-                </a:solidFill>
-                <a:latin typeface="Consolas"/>
-              </a:rPr>
-              <a:t> bless</a:t>
+              <a:t>sudo apt install -y build-essential gcc-multilib gdb python3 hexedit bless</a:t>
             </a:r>
           </a:p>
           <a:p>
             <a:pPr>
               <a:spcAft>
-                <a:spcPts val="1000"/>
+                <a:spcPts val="800"/>
               </a:spcAft>
             </a:pPr>
             <a:r>
-              <a:rPr sz="2000" b="1" dirty="0">
+              <a:rPr sz="2000" b="1">
                 <a:solidFill>
                   <a:srgbClr val="7CDA6A"/>
                 </a:solidFill>
                 <a:latin typeface="Consolas"/>
               </a:rPr>
-              <a:t>bash -c "$(curl -</a:t>
-            </a:r>
-            <a:r>
-              <a:rPr sz="2000" b="1" dirty="0" err="1">
-                <a:solidFill>
-                  <a:srgbClr val="7CDA6A"/>
-                </a:solidFill>
-                <a:latin typeface="Consolas"/>
-              </a:rPr>
-              <a:t>fsSL</a:t>
-            </a:r>
-            <a:r>
-              <a:rPr sz="2000" b="1" dirty="0">
-                <a:solidFill>
-                  <a:srgbClr val="7CDA6A"/>
-                </a:solidFill>
-                <a:latin typeface="Consolas"/>
-              </a:rPr>
-              <a:t> https://gef.blah.cat/sh)"</a:t>
+              <a:t>sudo apt install openjdk-21-jdk -y</a:t>
             </a:r>
           </a:p>
           <a:p>
             <a:pPr>
               <a:spcAft>
-                <a:spcPts val="1000"/>
+                <a:spcPts val="800"/>
               </a:spcAft>
             </a:pPr>
-            <a:endParaRPr sz="2000" b="1" dirty="0">
-              <a:solidFill>
-                <a:srgbClr val="7CDA6A"/>
-              </a:solidFill>
-              <a:latin typeface="Consolas"/>
-            </a:endParaRPr>
+            <a:r>
+              <a:rPr sz="1800" b="1">
+                <a:solidFill>
+                  <a:srgbClr val="7CDA6A"/>
+                </a:solidFill>
+                <a:latin typeface="Consolas"/>
+              </a:rPr>
+              <a:t>bash -c "$(curl -fsSL https://gef.blah.cat/sh)"</a:t>
+            </a:r>
           </a:p>
           <a:p>
             <a:pPr>
               <a:spcAft>
-                <a:spcPts val="1000"/>
+                <a:spcPts val="800"/>
               </a:spcAft>
             </a:pPr>
             <a:r>
-              <a:rPr sz="1800" b="0" dirty="0">
+              <a:rPr sz="800" b="0">
                 <a:solidFill>
                   <a:srgbClr val="B0B0B0"/>
                 </a:solidFill>
                 <a:latin typeface="Calibri"/>
               </a:rPr>
-              <a:t>Then open a new terminal and run:   </a:t>
-            </a:r>
-            <a:r>
-              <a:rPr sz="1800" b="0" dirty="0" err="1">
-                <a:solidFill>
-                  <a:srgbClr val="B0B0B0"/>
-                </a:solidFill>
-                <a:latin typeface="Calibri"/>
-              </a:rPr>
-              <a:t>gdb</a:t>
-            </a:r>
-            <a:endParaRPr sz="1800" b="0" dirty="0">
-              <a:solidFill>
-                <a:srgbClr val="B0B0B0"/>
-              </a:solidFill>
-              <a:latin typeface="Calibri"/>
-            </a:endParaRPr>
+              <a:t/>
+            </a:r>
           </a:p>
           <a:p>
             <a:pPr>
               <a:spcAft>
-                <a:spcPts val="1000"/>
+                <a:spcPts val="800"/>
               </a:spcAft>
             </a:pPr>
             <a:r>
-              <a:rPr sz="1800" b="0" dirty="0">
+              <a:rPr sz="1600" b="0">
                 <a:solidFill>
                   <a:srgbClr val="B0B0B0"/>
                 </a:solidFill>
                 <a:latin typeface="Calibri"/>
               </a:rPr>
+              <a:t>openjdk-21-jdk  =  Java for Ghidra. Run that before ./ghidraRun.</a:t>
+            </a:r>
+          </a:p>
+          <a:p>
+            <a:pPr>
+              <a:spcAft>
+                <a:spcPts val="800"/>
+              </a:spcAft>
+            </a:pPr>
+            <a:r>
+              <a:rPr sz="1600" b="0">
+                <a:solidFill>
+                  <a:srgbClr val="B0B0B0"/>
+                </a:solidFill>
+                <a:latin typeface="Calibri"/>
+              </a:rPr>
+              <a:t>Then open a new terminal and run:   gdb</a:t>
+            </a:r>
+          </a:p>
+          <a:p>
+            <a:pPr>
+              <a:spcAft>
+                <a:spcPts val="800"/>
+              </a:spcAft>
+            </a:pPr>
+            <a:r>
+              <a:rPr sz="1600" b="0">
+                <a:solidFill>
+                  <a:srgbClr val="B0B0B0"/>
+                </a:solidFill>
+                <a:latin typeface="Calibri"/>
+              </a:rPr>
               <a:t>You should see a GEF banner. Same commands as vanilla GDB.</a:t>
             </a:r>
-            <a:br>
-              <a:rPr lang="en-IN">
-                <a:solidFill>
-                  <a:srgbClr val="B0B0B0"/>
-                </a:solidFill>
-              </a:rPr>
-            </a:br>
-            <a:br>
-              <a:rPr lang="en-IN">
-                <a:solidFill>
-                  <a:srgbClr val="B0B0B0"/>
-                </a:solidFill>
-              </a:rPr>
-            </a:br>
-            <a:r>
-              <a:rPr lang="en-IN">
-                <a:solidFill>
-                  <a:srgbClr val="B0B0B0"/>
-                </a:solidFill>
-              </a:rPr>
-              <a:t>Please go here : https://github.com/DERE-ad2001/reverse-engineering-101/tree/main</a:t>
-            </a:r>
-            <a:endParaRPr sz="1800" b="0" dirty="0">
-              <a:solidFill>
-                <a:srgbClr val="B0B0B0"/>
-              </a:solidFill>
-              <a:latin typeface="Calibri"/>
-            </a:endParaRPr>
           </a:p>
         </p:txBody>
       </p:sp>
@@ -3814,7 +3733,6 @@
           <a:lstStyle/>
           <a:p>
             <a:pPr algn="ctr"/>
-            <a:endParaRPr/>
           </a:p>
         </p:txBody>
       </p:sp>
@@ -9988,6 +9906,7 @@
           <a:lstStyle/>
           <a:p>
             <a:pPr algn="ctr"/>
+            <a:endParaRPr/>
           </a:p>
         </p:txBody>
       </p:sp>
@@ -10102,6 +10021,7 @@
           <a:lstStyle/>
           <a:p>
             <a:pPr algn="ctr"/>
+            <a:endParaRPr/>
           </a:p>
         </p:txBody>
       </p:sp>
@@ -10601,6 +10521,7 @@
           <a:lstStyle/>
           <a:p>
             <a:pPr algn="ctr"/>
+            <a:endParaRPr/>
           </a:p>
         </p:txBody>
       </p:sp>
@@ -10863,6 +10784,7 @@
           <a:lstStyle/>
           <a:p>
             <a:pPr algn="ctr"/>
+            <a:endParaRPr/>
           </a:p>
         </p:txBody>
       </p:sp>
@@ -11010,6 +10932,7 @@
           <a:lstStyle/>
           <a:p>
             <a:pPr algn="ctr"/>
+            <a:endParaRPr/>
           </a:p>
         </p:txBody>
       </p:sp>
@@ -11124,6 +11047,7 @@
           <a:lstStyle/>
           <a:p>
             <a:pPr algn="ctr"/>
+            <a:endParaRPr/>
           </a:p>
         </p:txBody>
       </p:sp>
@@ -11693,6 +11617,7 @@
           <a:lstStyle/>
           <a:p>
             <a:pPr algn="ctr"/>
+            <a:endParaRPr/>
           </a:p>
         </p:txBody>
       </p:sp>
@@ -11955,6 +11880,7 @@
           <a:lstStyle/>
           <a:p>
             <a:pPr algn="ctr"/>
+            <a:endParaRPr/>
           </a:p>
         </p:txBody>
       </p:sp>
@@ -12646,6 +12572,7 @@
           <a:lstStyle/>
           <a:p>
             <a:pPr algn="ctr"/>
+            <a:endParaRPr/>
           </a:p>
         </p:txBody>
       </p:sp>
@@ -12760,6 +12687,7 @@
           <a:lstStyle/>
           <a:p>
             <a:pPr algn="ctr"/>
+            <a:endParaRPr/>
           </a:p>
         </p:txBody>
       </p:sp>
@@ -13259,6 +13187,7 @@
           <a:lstStyle/>
           <a:p>
             <a:pPr algn="ctr"/>
+            <a:endParaRPr/>
           </a:p>
         </p:txBody>
       </p:sp>
@@ -13585,6 +13514,7 @@
           <a:lstStyle/>
           <a:p>
             <a:pPr algn="ctr"/>
+            <a:endParaRPr/>
           </a:p>
         </p:txBody>
       </p:sp>
@@ -13732,6 +13662,7 @@
           <a:lstStyle/>
           <a:p>
             <a:pPr algn="ctr"/>
+            <a:endParaRPr/>
           </a:p>
         </p:txBody>
       </p:sp>
@@ -13846,6 +13777,7 @@
           <a:lstStyle/>
           <a:p>
             <a:pPr algn="ctr"/>
+            <a:endParaRPr/>
           </a:p>
         </p:txBody>
       </p:sp>
@@ -14415,6 +14347,7 @@
           <a:lstStyle/>
           <a:p>
             <a:pPr algn="ctr"/>
+            <a:endParaRPr/>
           </a:p>
         </p:txBody>
       </p:sp>
@@ -14677,6 +14610,7 @@
           <a:lstStyle/>
           <a:p>
             <a:pPr algn="ctr"/>
+            <a:endParaRPr/>
           </a:p>
         </p:txBody>
       </p:sp>
@@ -14824,6 +14758,7 @@
           <a:lstStyle/>
           <a:p>
             <a:pPr algn="ctr"/>
+            <a:endParaRPr/>
           </a:p>
         </p:txBody>
       </p:sp>
@@ -14938,6 +14873,7 @@
           <a:lstStyle/>
           <a:p>
             <a:pPr algn="ctr"/>
+            <a:endParaRPr/>
           </a:p>
         </p:txBody>
       </p:sp>
@@ -15507,6 +15443,7 @@
           <a:lstStyle/>
           <a:p>
             <a:pPr algn="ctr"/>
+            <a:endParaRPr/>
           </a:p>
         </p:txBody>
       </p:sp>
@@ -15785,6 +15722,7 @@
           <a:lstStyle/>
           <a:p>
             <a:pPr algn="ctr"/>
+            <a:endParaRPr/>
           </a:p>
         </p:txBody>
       </p:sp>
@@ -15932,6 +15870,7 @@
           <a:lstStyle/>
           <a:p>
             <a:pPr algn="ctr"/>
+            <a:endParaRPr/>
           </a:p>
         </p:txBody>
       </p:sp>
@@ -16046,6 +15985,7 @@
           <a:lstStyle/>
           <a:p>
             <a:pPr algn="ctr"/>
+            <a:endParaRPr/>
           </a:p>
         </p:txBody>
       </p:sp>
@@ -16457,15 +16397,7 @@
           <a:lstStyle/>
           <a:p>
             <a:pPr algn="l"/>
-            <a:r>
-              <a:rPr sz="1600" b="1">
-                <a:solidFill>
-                  <a:srgbClr val="7CDA6A"/>
-                </a:solidFill>
-                <a:latin typeface="Consolas"/>
-              </a:rPr>
-              <a:t/>
-            </a:r>
+            <a:endParaRPr/>
           </a:p>
         </p:txBody>
       </p:sp>
@@ -16492,15 +16424,7 @@
           <a:lstStyle/>
           <a:p>
             <a:pPr algn="l"/>
-            <a:r>
-              <a:rPr sz="1500" b="0">
-                <a:solidFill>
-                  <a:srgbClr val="F2F2F2"/>
-                </a:solidFill>
-                <a:latin typeface="Consolas"/>
-              </a:rPr>
-              <a:t/>
-            </a:r>
+            <a:endParaRPr/>
           </a:p>
         </p:txBody>
       </p:sp>
@@ -16615,6 +16539,7 @@
           <a:lstStyle/>
           <a:p>
             <a:pPr algn="ctr"/>
+            <a:endParaRPr/>
           </a:p>
         </p:txBody>
       </p:sp>
@@ -16813,6 +16738,7 @@
           <a:lstStyle/>
           <a:p>
             <a:pPr algn="ctr"/>
+            <a:endParaRPr/>
           </a:p>
         </p:txBody>
       </p:sp>
@@ -17483,13 +17409,49 @@
           <a:p>
             <a:pPr algn="l"/>
             <a:r>
-              <a:rPr sz="1800" b="0">
+              <a:rPr sz="1800" b="0" dirty="0">
                 <a:solidFill>
                   <a:srgbClr val="F2F2F2"/>
                 </a:solidFill>
                 <a:latin typeface="Calibri"/>
               </a:rPr>
-              <a:t>Symbol Tree -&gt; Functions -&gt; main / add_one / is_ok.</a:t>
+              <a:t>Symbol Tree -&gt; Functions -&gt; main / </a:t>
+            </a:r>
+            <a:r>
+              <a:rPr sz="1800" b="0" dirty="0" err="1">
+                <a:solidFill>
+                  <a:srgbClr val="F2F2F2"/>
+                </a:solidFill>
+                <a:latin typeface="Calibri"/>
+              </a:rPr>
+              <a:t>add_one</a:t>
+            </a:r>
+            <a:r>
+              <a:rPr sz="1800" b="0" dirty="0">
+                <a:solidFill>
+                  <a:srgbClr val="F2F2F2"/>
+                </a:solidFill>
+                <a:latin typeface="Calibri"/>
+              </a:rPr>
+              <a:t> / </a:t>
+            </a:r>
+            <a:r>
+              <a:rPr sz="1800" b="0" dirty="0" err="1">
+                <a:solidFill>
+                  <a:srgbClr val="F2F2F2"/>
+                </a:solidFill>
+                <a:latin typeface="Calibri"/>
+              </a:rPr>
+              <a:t>is_ok</a:t>
+            </a:r>
+            <a:r>
+              <a:rPr sz="1800" b="0" dirty="0">
+                <a:solidFill>
+                  <a:srgbClr val="F2F2F2"/>
+                </a:solidFill>
+                <a:latin typeface="Calibri"/>
+              </a:rPr>
+              <a:t>.</a:t>
             </a:r>
           </a:p>
         </p:txBody>
@@ -18101,13 +18063,22 @@
           <a:p>
             <a:pPr algn="l"/>
             <a:r>
-              <a:rPr sz="2200" b="0">
+              <a:rPr sz="2200" b="0" dirty="0" err="1">
                 <a:solidFill>
                   <a:srgbClr val="F2F2F2"/>
                 </a:solidFill>
                 <a:latin typeface="Calibri"/>
               </a:rPr>
-              <a:t>gdb: break main, run, find the compare</a:t>
+              <a:t>gdb</a:t>
+            </a:r>
+            <a:r>
+              <a:rPr sz="2200" b="0" dirty="0">
+                <a:solidFill>
+                  <a:srgbClr val="F2F2F2"/>
+                </a:solidFill>
+                <a:latin typeface="Calibri"/>
+              </a:rPr>
+              <a:t>: break main, run, find the compare</a:t>
             </a:r>
           </a:p>
         </p:txBody>
@@ -18181,7 +18152,7 @@
           <a:p>
             <a:pPr algn="l"/>
             <a:r>
-              <a:rPr sz="2200" b="0">
+              <a:rPr sz="2200" b="0" dirty="0">
                 <a:solidFill>
                   <a:srgbClr val="F2F2F2"/>
                 </a:solidFill>
@@ -18976,135 +18947,54 @@
         </p:nvSpPr>
         <p:spPr>
           <a:xfrm>
-            <a:off x="640080" y="1920240"/>
-            <a:ext cx="10972800" cy="731520"/>
-          </a:xfrm>
-          <a:prstGeom prst="rect">
-            <a:avLst/>
-          </a:prstGeom>
-          <a:noFill/>
-        </p:spPr>
-        <p:txBody>
-          <a:bodyPr wrap="square">
-            <a:spAutoFit/>
-          </a:bodyPr>
-          <a:lstStyle/>
-          <a:p>
-            <a:pPr algn="l"/>
-            <a:r>
-              <a:rPr sz="3600" b="1">
+            <a:off x="788273" y="3094842"/>
+            <a:ext cx="10972800" cy="646331"/>
+          </a:xfrm>
+          <a:prstGeom prst="rect">
+            <a:avLst/>
+          </a:prstGeom>
+          <a:noFill/>
+        </p:spPr>
+        <p:txBody>
+          <a:bodyPr wrap="square">
+            <a:spAutoFit/>
+          </a:bodyPr>
+          <a:lstStyle/>
+          <a:p>
+            <a:pPr algn="l"/>
+            <a:r>
+              <a:rPr lang="en-IN" sz="3600" b="1" dirty="0">
                 <a:solidFill>
                   <a:srgbClr val="F2F2F2"/>
                 </a:solidFill>
                 <a:latin typeface="Calibri"/>
               </a:rPr>
-              <a:t>Done.</a:t>
-            </a:r>
-          </a:p>
-        </p:txBody>
-      </p:sp>
-      <p:sp>
-        <p:nvSpPr>
-          <p:cNvPr id="4" name="TextBox 3"/>
-          <p:cNvSpPr txBox="1"/>
-          <p:nvPr/>
-        </p:nvSpPr>
-        <p:spPr>
-          <a:xfrm>
-            <a:off x="640080" y="2834640"/>
-            <a:ext cx="10972800" cy="548640"/>
-          </a:xfrm>
-          <a:prstGeom prst="rect">
-            <a:avLst/>
-          </a:prstGeom>
-          <a:noFill/>
-        </p:spPr>
-        <p:txBody>
-          <a:bodyPr wrap="square">
-            <a:spAutoFit/>
-          </a:bodyPr>
-          <a:lstStyle/>
-          <a:p>
-            <a:pPr algn="l"/>
-            <a:r>
-              <a:rPr sz="2000" b="0">
-                <a:solidFill>
-                  <a:srgbClr val="B0B0B0"/>
-                </a:solidFill>
-                <a:latin typeface="Calibri"/>
-              </a:rPr>
-              <a:t>Rebuild the examples, step them again, then redo both crackmes without notes.</a:t>
-            </a:r>
-          </a:p>
-        </p:txBody>
-      </p:sp>
-      <p:sp>
-        <p:nvSpPr>
-          <p:cNvPr id="5" name="TextBox 4"/>
-          <p:cNvSpPr txBox="1"/>
-          <p:nvPr/>
-        </p:nvSpPr>
-        <p:spPr>
-          <a:xfrm>
-            <a:off x="640080" y="4023360"/>
-            <a:ext cx="10972800" cy="365760"/>
-          </a:xfrm>
-          <a:prstGeom prst="rect">
-            <a:avLst/>
-          </a:prstGeom>
-          <a:noFill/>
-        </p:spPr>
-        <p:txBody>
-          <a:bodyPr wrap="square">
-            <a:spAutoFit/>
-          </a:bodyPr>
-          <a:lstStyle/>
-          <a:p>
-            <a:pPr algn="l"/>
-            <a:r>
-              <a:rPr sz="2200" b="1">
+              <a:t>Any questions ? Or </a:t>
+            </a:r>
+            <a:r>
+              <a:rPr lang="en-IN" sz="3600" b="1" dirty="0" err="1">
                 <a:solidFill>
                   <a:srgbClr val="F2F2F2"/>
                 </a:solidFill>
                 <a:latin typeface="Calibri"/>
               </a:rPr>
-              <a:t>Ajin Deepak</a:t>
-            </a:r>
-          </a:p>
-        </p:txBody>
-      </p:sp>
-      <p:sp>
-        <p:nvSpPr>
-          <p:cNvPr id="6" name="TextBox 5"/>
-          <p:cNvSpPr txBox="1"/>
-          <p:nvPr/>
-        </p:nvSpPr>
-        <p:spPr>
-          <a:xfrm>
-            <a:off x="640080" y="4480560"/>
-            <a:ext cx="10972800" cy="365760"/>
-          </a:xfrm>
-          <a:prstGeom prst="rect">
-            <a:avLst/>
-          </a:prstGeom>
-          <a:noFill/>
-        </p:spPr>
-        <p:txBody>
-          <a:bodyPr wrap="square">
-            <a:spAutoFit/>
-          </a:bodyPr>
-          <a:lstStyle/>
-          <a:p>
-            <a:pPr algn="l"/>
-            <a:r>
-              <a:rPr sz="1800" b="0">
-                <a:solidFill>
-                  <a:srgbClr val="E8A23A"/>
-                </a:solidFill>
-                <a:latin typeface="Calibri"/>
-              </a:rPr>
-              <a:t>AntiBot Engineer  @  NielsenIQ</a:t>
-            </a:r>
+              <a:t>yall</a:t>
+            </a:r>
+            <a:r>
+              <a:rPr lang="en-IN" sz="3600" b="1" dirty="0">
+                <a:solidFill>
+                  <a:srgbClr val="F2F2F2"/>
+                </a:solidFill>
+                <a:latin typeface="Calibri"/>
+              </a:rPr>
+              <a:t> just wanted to get the hell out ?</a:t>
+            </a:r>
+            <a:endParaRPr sz="3600" b="1" dirty="0">
+              <a:solidFill>
+                <a:srgbClr val="F2F2F2"/>
+              </a:solidFill>
+              <a:latin typeface="Calibri"/>
+            </a:endParaRPr>
           </a:p>
         </p:txBody>
       </p:sp>

--- a/Reverse Engineering 101.pptx
+++ b/Reverse Engineering 101.pptx
@@ -19,6 +19,7 @@
     <p:sldId id="267" r:id="rId13"/>
     <p:sldId id="268" r:id="rId14"/>
     <p:sldId id="269" r:id="rId15"/>
+    <p:sldId id="283" r:id="rId33"/>
     <p:sldId id="270" r:id="rId16"/>
     <p:sldId id="271" r:id="rId17"/>
     <p:sldId id="272" r:id="rId18"/>
@@ -33,7 +34,7 @@
     <p:sldId id="281" r:id="rId27"/>
     <p:sldId id="282" r:id="rId28"/>
   </p:sldIdLst>
-  <p:sldSz cx="12192000" cy="6858000"/>
+  <p:sldSz cx="12191695" cy="6858000"/>
   <p:notesSz cx="6858000" cy="9144000"/>
   <p:defaultTextStyle>
     <a:defPPr>
@@ -3801,7 +3802,7 @@
                 </a:solidFill>
                 <a:latin typeface="Calibri"/>
               </a:rPr>
-              <a:t>10 / 27</a:t>
+              <a:t>10 / 28</a:t>
             </a:r>
           </a:p>
         </p:txBody>
@@ -4331,7 +4332,7 @@
                 </a:solidFill>
                 <a:latin typeface="Calibri"/>
               </a:rPr>
-              <a:t>11 / 27</a:t>
+              <a:t>11 / 28</a:t>
             </a:r>
           </a:p>
         </p:txBody>
@@ -4940,7 +4941,7 @@
                 </a:solidFill>
                 <a:latin typeface="Calibri"/>
               </a:rPr>
-              <a:t>12 / 27</a:t>
+              <a:t>12 / 28</a:t>
             </a:r>
           </a:p>
         </p:txBody>
@@ -5581,7 +5582,7 @@
                 </a:solidFill>
                 <a:latin typeface="Calibri"/>
               </a:rPr>
-              <a:t>13 / 27</a:t>
+              <a:t>13 / 28</a:t>
             </a:r>
           </a:p>
         </p:txBody>
@@ -6393,7 +6394,7 @@
                 </a:solidFill>
                 <a:latin typeface="Calibri"/>
               </a:rPr>
-              <a:t>14 / 27</a:t>
+              <a:t>14 / 28</a:t>
             </a:r>
           </a:p>
         </p:txBody>
@@ -7151,7 +7152,7 @@
                 </a:solidFill>
                 <a:latin typeface="Calibri"/>
               </a:rPr>
-              <a:t>15 / 27</a:t>
+              <a:t>16 / 28</a:t>
             </a:r>
           </a:p>
         </p:txBody>
@@ -8909,7 +8910,7 @@
                 </a:solidFill>
                 <a:latin typeface="Calibri"/>
               </a:rPr>
-              <a:t>16 / 27</a:t>
+              <a:t>17 / 28</a:t>
             </a:r>
           </a:p>
         </p:txBody>
@@ -9827,7 +9828,7 @@
                 </a:solidFill>
                 <a:latin typeface="Calibri"/>
               </a:rPr>
-              <a:t>17 / 27</a:t>
+              <a:t>18 / 28</a:t>
             </a:r>
           </a:p>
         </p:txBody>
@@ -10853,7 +10854,7 @@
                 </a:solidFill>
                 <a:latin typeface="Calibri"/>
               </a:rPr>
-              <a:t>18 / 27</a:t>
+              <a:t>19 / 28</a:t>
             </a:r>
           </a:p>
         </p:txBody>
@@ -11949,7 +11950,7 @@
                 </a:solidFill>
                 <a:latin typeface="Calibri"/>
               </a:rPr>
-              <a:t>19 / 27</a:t>
+              <a:t>20 / 28</a:t>
             </a:r>
           </a:p>
         </p:txBody>
@@ -12493,7 +12494,7 @@
                 </a:solidFill>
                 <a:latin typeface="Calibri"/>
               </a:rPr>
-              <a:t>2 / 27</a:t>
+              <a:t>2 / 28</a:t>
             </a:r>
           </a:p>
         </p:txBody>
@@ -13583,7 +13584,7 @@
                 </a:solidFill>
                 <a:latin typeface="Calibri"/>
               </a:rPr>
-              <a:t>20 / 27</a:t>
+              <a:t>21 / 28</a:t>
             </a:r>
           </a:p>
         </p:txBody>
@@ -14679,7 +14680,7 @@
                 </a:solidFill>
                 <a:latin typeface="Calibri"/>
               </a:rPr>
-              <a:t>21 / 27</a:t>
+              <a:t>22 / 28</a:t>
             </a:r>
           </a:p>
         </p:txBody>
@@ -15791,7 +15792,7 @@
                 </a:solidFill>
                 <a:latin typeface="Calibri"/>
               </a:rPr>
-              <a:t>22 / 27</a:t>
+              <a:t>23 / 28</a:t>
             </a:r>
           </a:p>
         </p:txBody>
@@ -16807,7 +16808,7 @@
                 </a:solidFill>
                 <a:latin typeface="Calibri"/>
               </a:rPr>
-              <a:t>23 / 27</a:t>
+              <a:t>24 / 28</a:t>
             </a:r>
           </a:p>
         </p:txBody>
@@ -17681,7 +17682,7 @@
                 </a:solidFill>
                 <a:latin typeface="Calibri"/>
               </a:rPr>
-              <a:t>24 / 27</a:t>
+              <a:t>25 / 28</a:t>
             </a:r>
           </a:p>
         </p:txBody>
@@ -18273,7 +18274,7 @@
                 </a:solidFill>
                 <a:latin typeface="Calibri"/>
               </a:rPr>
-              <a:t>25 / 27</a:t>
+              <a:t>26 / 28</a:t>
             </a:r>
           </a:p>
         </p:txBody>
@@ -18856,7 +18857,7 @@
                 </a:solidFill>
                 <a:latin typeface="Calibri"/>
               </a:rPr>
-              <a:t>26 / 27</a:t>
+              <a:t>27 / 28</a:t>
             </a:r>
           </a:p>
         </p:txBody>
@@ -19006,6 +19007,891 @@
 </p:sld>
 </file>
 
+<file path=ppt/slides/slide28.xml><?xml version="1.0" encoding="utf-8"?>
+<p:sld xmlns:a="http://schemas.openxmlformats.org/drawingml/2006/main" xmlns:p="http://schemas.openxmlformats.org/presentationml/2006/main" xmlns:r="http://schemas.openxmlformats.org/officeDocument/2006/relationships">
+  <p:cSld>
+    <p:bg>
+      <p:bgPr>
+        <a:solidFill>
+          <a:srgbClr val="1A1A1A"/>
+        </a:solidFill>
+        <a:effectLst/>
+      </p:bgPr>
+    </p:bg>
+    <p:spTree>
+      <p:nvGrpSpPr>
+        <p:cNvPr id="1" name=""/>
+        <p:cNvGrpSpPr/>
+        <p:nvPr/>
+      </p:nvGrpSpPr>
+      <p:grpSpPr/>
+      <p:sp>
+        <p:nvSpPr>
+          <p:cNvPr id="2" name="Rectangle 1"/>
+          <p:cNvSpPr/>
+          <p:nvPr/>
+        </p:nvSpPr>
+        <p:spPr>
+          <a:xfrm>
+            <a:off x="0" y="0"/>
+            <a:ext cx="109728" cy="6858000"/>
+          </a:xfrm>
+          <a:prstGeom prst="rect">
+            <a:avLst/>
+          </a:prstGeom>
+          <a:solidFill>
+            <a:srgbClr val="E8A23A"/>
+          </a:solidFill>
+          <a:ln>
+            <a:noFill/>
+          </a:ln>
+          <a:effectLst/>
+        </p:spPr>
+        <p:style>
+          <a:lnRef idx="1">
+            <a:schemeClr val="accent1"/>
+          </a:lnRef>
+          <a:fillRef idx="3">
+            <a:schemeClr val="accent1"/>
+          </a:fillRef>
+          <a:effectRef idx="2">
+            <a:schemeClr val="accent1"/>
+          </a:effectRef>
+          <a:fontRef idx="minor">
+            <a:schemeClr val="lt1"/>
+          </a:fontRef>
+        </p:style>
+        <p:txBody>
+          <a:bodyPr rtlCol="0" anchor="ctr"/>
+          <a:lstStyle/>
+          <a:p>
+            <a:pPr algn="ctr"/>
+          </a:p>
+        </p:txBody>
+      </p:sp>
+      <p:sp>
+        <p:nvSpPr>
+          <p:cNvPr id="3" name="TextBox 2"/>
+          <p:cNvSpPr txBox="1"/>
+          <p:nvPr/>
+        </p:nvSpPr>
+        <p:spPr>
+          <a:xfrm>
+            <a:off x="411480" y="256032"/>
+            <a:ext cx="11338560" cy="502920"/>
+          </a:xfrm>
+          <a:prstGeom prst="rect">
+            <a:avLst/>
+          </a:prstGeom>
+          <a:noFill/>
+        </p:spPr>
+        <p:txBody>
+          <a:bodyPr wrap="square">
+            <a:spAutoFit/>
+          </a:bodyPr>
+          <a:lstStyle/>
+          <a:p>
+            <a:pPr algn="l"/>
+            <a:r>
+              <a:rPr sz="3200" b="1">
+                <a:solidFill>
+                  <a:srgbClr val="F2F2F2"/>
+                </a:solidFill>
+                <a:latin typeface="Calibri"/>
+              </a:rPr>
+              <a:t>Flags</a:t>
+            </a:r>
+          </a:p>
+        </p:txBody>
+      </p:sp>
+      <p:sp>
+        <p:nvSpPr>
+          <p:cNvPr id="4" name="TextBox 3"/>
+          <p:cNvSpPr txBox="1"/>
+          <p:nvPr/>
+        </p:nvSpPr>
+        <p:spPr>
+          <a:xfrm>
+            <a:off x="457200" y="868680"/>
+            <a:ext cx="11247120" cy="502920"/>
+          </a:xfrm>
+          <a:prstGeom prst="rect">
+            <a:avLst/>
+          </a:prstGeom>
+          <a:noFill/>
+        </p:spPr>
+        <p:txBody>
+          <a:bodyPr wrap="square">
+            <a:spAutoFit/>
+          </a:bodyPr>
+          <a:lstStyle/>
+          <a:p>
+            <a:pPr algn="l"/>
+            <a:r>
+              <a:rPr sz="1800" b="0">
+                <a:solidFill>
+                  <a:srgbClr val="B0B0B0"/>
+                </a:solidFill>
+                <a:latin typeface="Calibri"/>
+              </a:rPr>
+              <a:t>Bits in EFLAGS. Math and cmp write them. je / jne read them. Not a general-purpose register.</a:t>
+            </a:r>
+          </a:p>
+        </p:txBody>
+      </p:sp>
+      <p:sp>
+        <p:nvSpPr>
+          <p:cNvPr id="5" name="Rectangle 4"/>
+          <p:cNvSpPr/>
+          <p:nvPr/>
+        </p:nvSpPr>
+        <p:spPr>
+          <a:xfrm>
+            <a:off x="457200" y="1508760"/>
+            <a:ext cx="11247120" cy="868680"/>
+          </a:xfrm>
+          <a:prstGeom prst="rect">
+            <a:avLst/>
+          </a:prstGeom>
+          <a:solidFill>
+            <a:srgbClr val="242424"/>
+          </a:solidFill>
+          <a:ln>
+            <a:noFill/>
+          </a:ln>
+          <a:effectLst/>
+        </p:spPr>
+        <p:style>
+          <a:lnRef idx="1">
+            <a:schemeClr val="accent1"/>
+          </a:lnRef>
+          <a:fillRef idx="3">
+            <a:schemeClr val="accent1"/>
+          </a:fillRef>
+          <a:effectRef idx="2">
+            <a:schemeClr val="accent1"/>
+          </a:effectRef>
+          <a:fontRef idx="minor">
+            <a:schemeClr val="lt1"/>
+          </a:fontRef>
+        </p:style>
+        <p:txBody>
+          <a:bodyPr rtlCol="0" anchor="ctr"/>
+          <a:lstStyle/>
+          <a:p>
+            <a:pPr algn="ctr"/>
+          </a:p>
+        </p:txBody>
+      </p:sp>
+      <p:sp>
+        <p:nvSpPr>
+          <p:cNvPr id="6" name="TextBox 5"/>
+          <p:cNvSpPr txBox="1"/>
+          <p:nvPr/>
+        </p:nvSpPr>
+        <p:spPr>
+          <a:xfrm>
+            <a:off x="640080" y="1709928"/>
+            <a:ext cx="1005840" cy="457200"/>
+          </a:xfrm>
+          <a:prstGeom prst="rect">
+            <a:avLst/>
+          </a:prstGeom>
+          <a:noFill/>
+        </p:spPr>
+        <p:txBody>
+          <a:bodyPr wrap="square">
+            <a:spAutoFit/>
+          </a:bodyPr>
+          <a:lstStyle/>
+          <a:p>
+            <a:pPr algn="l"/>
+            <a:r>
+              <a:rPr sz="2200" b="1">
+                <a:solidFill>
+                  <a:srgbClr val="E8A23A"/>
+                </a:solidFill>
+                <a:latin typeface="Consolas"/>
+              </a:rPr>
+              <a:t>ZF</a:t>
+            </a:r>
+          </a:p>
+        </p:txBody>
+      </p:sp>
+      <p:sp>
+        <p:nvSpPr>
+          <p:cNvPr id="7" name="TextBox 6"/>
+          <p:cNvSpPr txBox="1"/>
+          <p:nvPr/>
+        </p:nvSpPr>
+        <p:spPr>
+          <a:xfrm>
+            <a:off x="1783080" y="1709928"/>
+            <a:ext cx="2286000" cy="457200"/>
+          </a:xfrm>
+          <a:prstGeom prst="rect">
+            <a:avLst/>
+          </a:prstGeom>
+          <a:noFill/>
+        </p:spPr>
+        <p:txBody>
+          <a:bodyPr wrap="square">
+            <a:spAutoFit/>
+          </a:bodyPr>
+          <a:lstStyle/>
+          <a:p>
+            <a:pPr algn="l"/>
+            <a:r>
+              <a:rPr sz="1800" b="1">
+                <a:solidFill>
+                  <a:srgbClr val="F2F2F2"/>
+                </a:solidFill>
+                <a:latin typeface="Calibri"/>
+              </a:rPr>
+              <a:t>zero flag</a:t>
+            </a:r>
+          </a:p>
+        </p:txBody>
+      </p:sp>
+      <p:sp>
+        <p:nvSpPr>
+          <p:cNvPr id="8" name="TextBox 7"/>
+          <p:cNvSpPr txBox="1"/>
+          <p:nvPr/>
+        </p:nvSpPr>
+        <p:spPr>
+          <a:xfrm>
+            <a:off x="4206240" y="1673351"/>
+            <a:ext cx="7223760" cy="548640"/>
+          </a:xfrm>
+          <a:prstGeom prst="rect">
+            <a:avLst/>
+          </a:prstGeom>
+          <a:noFill/>
+        </p:spPr>
+        <p:txBody>
+          <a:bodyPr wrap="square">
+            <a:spAutoFit/>
+          </a:bodyPr>
+          <a:lstStyle/>
+          <a:p>
+            <a:pPr algn="l"/>
+            <a:r>
+              <a:rPr sz="1600" b="0">
+                <a:solidFill>
+                  <a:srgbClr val="F2F2F2"/>
+                </a:solidFill>
+                <a:latin typeface="Calibri"/>
+              </a:rPr>
+              <a:t>Result was 0. xor eax, eax sets this. je / jz jump if ZF=1.</a:t>
+            </a:r>
+          </a:p>
+        </p:txBody>
+      </p:sp>
+      <p:sp>
+        <p:nvSpPr>
+          <p:cNvPr id="9" name="Rectangle 8"/>
+          <p:cNvSpPr/>
+          <p:nvPr/>
+        </p:nvSpPr>
+        <p:spPr>
+          <a:xfrm>
+            <a:off x="457200" y="2468880"/>
+            <a:ext cx="11247120" cy="868680"/>
+          </a:xfrm>
+          <a:prstGeom prst="rect">
+            <a:avLst/>
+          </a:prstGeom>
+          <a:solidFill>
+            <a:srgbClr val="242424"/>
+          </a:solidFill>
+          <a:ln>
+            <a:noFill/>
+          </a:ln>
+          <a:effectLst/>
+        </p:spPr>
+        <p:style>
+          <a:lnRef idx="1">
+            <a:schemeClr val="accent1"/>
+          </a:lnRef>
+          <a:fillRef idx="3">
+            <a:schemeClr val="accent1"/>
+          </a:fillRef>
+          <a:effectRef idx="2">
+            <a:schemeClr val="accent1"/>
+          </a:effectRef>
+          <a:fontRef idx="minor">
+            <a:schemeClr val="lt1"/>
+          </a:fontRef>
+        </p:style>
+        <p:txBody>
+          <a:bodyPr rtlCol="0" anchor="ctr"/>
+          <a:lstStyle/>
+          <a:p>
+            <a:pPr algn="ctr"/>
+          </a:p>
+        </p:txBody>
+      </p:sp>
+      <p:sp>
+        <p:nvSpPr>
+          <p:cNvPr id="10" name="TextBox 9"/>
+          <p:cNvSpPr txBox="1"/>
+          <p:nvPr/>
+        </p:nvSpPr>
+        <p:spPr>
+          <a:xfrm>
+            <a:off x="640080" y="2670048"/>
+            <a:ext cx="1005840" cy="457200"/>
+          </a:xfrm>
+          <a:prstGeom prst="rect">
+            <a:avLst/>
+          </a:prstGeom>
+          <a:noFill/>
+        </p:spPr>
+        <p:txBody>
+          <a:bodyPr wrap="square">
+            <a:spAutoFit/>
+          </a:bodyPr>
+          <a:lstStyle/>
+          <a:p>
+            <a:pPr algn="l"/>
+            <a:r>
+              <a:rPr sz="2200" b="1">
+                <a:solidFill>
+                  <a:srgbClr val="E8A23A"/>
+                </a:solidFill>
+                <a:latin typeface="Consolas"/>
+              </a:rPr>
+              <a:t>CF</a:t>
+            </a:r>
+          </a:p>
+        </p:txBody>
+      </p:sp>
+      <p:sp>
+        <p:nvSpPr>
+          <p:cNvPr id="11" name="TextBox 10"/>
+          <p:cNvSpPr txBox="1"/>
+          <p:nvPr/>
+        </p:nvSpPr>
+        <p:spPr>
+          <a:xfrm>
+            <a:off x="1783080" y="2670048"/>
+            <a:ext cx="2286000" cy="457200"/>
+          </a:xfrm>
+          <a:prstGeom prst="rect">
+            <a:avLst/>
+          </a:prstGeom>
+          <a:noFill/>
+        </p:spPr>
+        <p:txBody>
+          <a:bodyPr wrap="square">
+            <a:spAutoFit/>
+          </a:bodyPr>
+          <a:lstStyle/>
+          <a:p>
+            <a:pPr algn="l"/>
+            <a:r>
+              <a:rPr sz="1800" b="1">
+                <a:solidFill>
+                  <a:srgbClr val="F2F2F2"/>
+                </a:solidFill>
+                <a:latin typeface="Calibri"/>
+              </a:rPr>
+              <a:t>carry flag</a:t>
+            </a:r>
+          </a:p>
+        </p:txBody>
+      </p:sp>
+      <p:sp>
+        <p:nvSpPr>
+          <p:cNvPr id="12" name="TextBox 11"/>
+          <p:cNvSpPr txBox="1"/>
+          <p:nvPr/>
+        </p:nvSpPr>
+        <p:spPr>
+          <a:xfrm>
+            <a:off x="4206240" y="2633472"/>
+            <a:ext cx="7223760" cy="548640"/>
+          </a:xfrm>
+          <a:prstGeom prst="rect">
+            <a:avLst/>
+          </a:prstGeom>
+          <a:noFill/>
+        </p:spPr>
+        <p:txBody>
+          <a:bodyPr wrap="square">
+            <a:spAutoFit/>
+          </a:bodyPr>
+          <a:lstStyle/>
+          <a:p>
+            <a:pPr algn="l"/>
+            <a:r>
+              <a:rPr sz="1600" b="0">
+                <a:solidFill>
+                  <a:srgbClr val="F2F2F2"/>
+                </a:solidFill>
+                <a:latin typeface="Calibri"/>
+              </a:rPr>
+              <a:t>Unsigned carry / borrow from add / sub. inc / dec do not change CF.</a:t>
+            </a:r>
+          </a:p>
+        </p:txBody>
+      </p:sp>
+      <p:sp>
+        <p:nvSpPr>
+          <p:cNvPr id="13" name="Rectangle 12"/>
+          <p:cNvSpPr/>
+          <p:nvPr/>
+        </p:nvSpPr>
+        <p:spPr>
+          <a:xfrm>
+            <a:off x="457200" y="3429000"/>
+            <a:ext cx="11247120" cy="868680"/>
+          </a:xfrm>
+          <a:prstGeom prst="rect">
+            <a:avLst/>
+          </a:prstGeom>
+          <a:solidFill>
+            <a:srgbClr val="242424"/>
+          </a:solidFill>
+          <a:ln>
+            <a:noFill/>
+          </a:ln>
+          <a:effectLst/>
+        </p:spPr>
+        <p:style>
+          <a:lnRef idx="1">
+            <a:schemeClr val="accent1"/>
+          </a:lnRef>
+          <a:fillRef idx="3">
+            <a:schemeClr val="accent1"/>
+          </a:fillRef>
+          <a:effectRef idx="2">
+            <a:schemeClr val="accent1"/>
+          </a:effectRef>
+          <a:fontRef idx="minor">
+            <a:schemeClr val="lt1"/>
+          </a:fontRef>
+        </p:style>
+        <p:txBody>
+          <a:bodyPr rtlCol="0" anchor="ctr"/>
+          <a:lstStyle/>
+          <a:p>
+            <a:pPr algn="ctr"/>
+          </a:p>
+        </p:txBody>
+      </p:sp>
+      <p:sp>
+        <p:nvSpPr>
+          <p:cNvPr id="14" name="TextBox 13"/>
+          <p:cNvSpPr txBox="1"/>
+          <p:nvPr/>
+        </p:nvSpPr>
+        <p:spPr>
+          <a:xfrm>
+            <a:off x="640080" y="3630168"/>
+            <a:ext cx="1005840" cy="457200"/>
+          </a:xfrm>
+          <a:prstGeom prst="rect">
+            <a:avLst/>
+          </a:prstGeom>
+          <a:noFill/>
+        </p:spPr>
+        <p:txBody>
+          <a:bodyPr wrap="square">
+            <a:spAutoFit/>
+          </a:bodyPr>
+          <a:lstStyle/>
+          <a:p>
+            <a:pPr algn="l"/>
+            <a:r>
+              <a:rPr sz="2200" b="1">
+                <a:solidFill>
+                  <a:srgbClr val="E8A23A"/>
+                </a:solidFill>
+                <a:latin typeface="Consolas"/>
+              </a:rPr>
+              <a:t>SF</a:t>
+            </a:r>
+          </a:p>
+        </p:txBody>
+      </p:sp>
+      <p:sp>
+        <p:nvSpPr>
+          <p:cNvPr id="15" name="TextBox 14"/>
+          <p:cNvSpPr txBox="1"/>
+          <p:nvPr/>
+        </p:nvSpPr>
+        <p:spPr>
+          <a:xfrm>
+            <a:off x="1783080" y="3630168"/>
+            <a:ext cx="2286000" cy="457200"/>
+          </a:xfrm>
+          <a:prstGeom prst="rect">
+            <a:avLst/>
+          </a:prstGeom>
+          <a:noFill/>
+        </p:spPr>
+        <p:txBody>
+          <a:bodyPr wrap="square">
+            <a:spAutoFit/>
+          </a:bodyPr>
+          <a:lstStyle/>
+          <a:p>
+            <a:pPr algn="l"/>
+            <a:r>
+              <a:rPr sz="1800" b="1">
+                <a:solidFill>
+                  <a:srgbClr val="F2F2F2"/>
+                </a:solidFill>
+                <a:latin typeface="Calibri"/>
+              </a:rPr>
+              <a:t>sign flag</a:t>
+            </a:r>
+          </a:p>
+        </p:txBody>
+      </p:sp>
+      <p:sp>
+        <p:nvSpPr>
+          <p:cNvPr id="16" name="TextBox 15"/>
+          <p:cNvSpPr txBox="1"/>
+          <p:nvPr/>
+        </p:nvSpPr>
+        <p:spPr>
+          <a:xfrm>
+            <a:off x="4206240" y="3593592"/>
+            <a:ext cx="7223760" cy="548640"/>
+          </a:xfrm>
+          <a:prstGeom prst="rect">
+            <a:avLst/>
+          </a:prstGeom>
+          <a:noFill/>
+        </p:spPr>
+        <p:txBody>
+          <a:bodyPr wrap="square">
+            <a:spAutoFit/>
+          </a:bodyPr>
+          <a:lstStyle/>
+          <a:p>
+            <a:pPr algn="l"/>
+            <a:r>
+              <a:rPr sz="1600" b="0">
+                <a:solidFill>
+                  <a:srgbClr val="F2F2F2"/>
+                </a:solidFill>
+                <a:latin typeface="Calibri"/>
+              </a:rPr>
+              <a:t>Top bit of the result. 1 means negative if you treat it as signed.</a:t>
+            </a:r>
+          </a:p>
+        </p:txBody>
+      </p:sp>
+      <p:sp>
+        <p:nvSpPr>
+          <p:cNvPr id="17" name="Rectangle 16"/>
+          <p:cNvSpPr/>
+          <p:nvPr/>
+        </p:nvSpPr>
+        <p:spPr>
+          <a:xfrm>
+            <a:off x="457200" y="4389120"/>
+            <a:ext cx="11247120" cy="868680"/>
+          </a:xfrm>
+          <a:prstGeom prst="rect">
+            <a:avLst/>
+          </a:prstGeom>
+          <a:solidFill>
+            <a:srgbClr val="242424"/>
+          </a:solidFill>
+          <a:ln>
+            <a:noFill/>
+          </a:ln>
+          <a:effectLst/>
+        </p:spPr>
+        <p:style>
+          <a:lnRef idx="1">
+            <a:schemeClr val="accent1"/>
+          </a:lnRef>
+          <a:fillRef idx="3">
+            <a:schemeClr val="accent1"/>
+          </a:fillRef>
+          <a:effectRef idx="2">
+            <a:schemeClr val="accent1"/>
+          </a:effectRef>
+          <a:fontRef idx="minor">
+            <a:schemeClr val="lt1"/>
+          </a:fontRef>
+        </p:style>
+        <p:txBody>
+          <a:bodyPr rtlCol="0" anchor="ctr"/>
+          <a:lstStyle/>
+          <a:p>
+            <a:pPr algn="ctr"/>
+          </a:p>
+        </p:txBody>
+      </p:sp>
+      <p:sp>
+        <p:nvSpPr>
+          <p:cNvPr id="18" name="TextBox 17"/>
+          <p:cNvSpPr txBox="1"/>
+          <p:nvPr/>
+        </p:nvSpPr>
+        <p:spPr>
+          <a:xfrm>
+            <a:off x="640080" y="4590288"/>
+            <a:ext cx="1005840" cy="457200"/>
+          </a:xfrm>
+          <a:prstGeom prst="rect">
+            <a:avLst/>
+          </a:prstGeom>
+          <a:noFill/>
+        </p:spPr>
+        <p:txBody>
+          <a:bodyPr wrap="square">
+            <a:spAutoFit/>
+          </a:bodyPr>
+          <a:lstStyle/>
+          <a:p>
+            <a:pPr algn="l"/>
+            <a:r>
+              <a:rPr sz="2200" b="1">
+                <a:solidFill>
+                  <a:srgbClr val="E8A23A"/>
+                </a:solidFill>
+                <a:latin typeface="Consolas"/>
+              </a:rPr>
+              <a:t>OF</a:t>
+            </a:r>
+          </a:p>
+        </p:txBody>
+      </p:sp>
+      <p:sp>
+        <p:nvSpPr>
+          <p:cNvPr id="19" name="TextBox 18"/>
+          <p:cNvSpPr txBox="1"/>
+          <p:nvPr/>
+        </p:nvSpPr>
+        <p:spPr>
+          <a:xfrm>
+            <a:off x="1783080" y="4590288"/>
+            <a:ext cx="2286000" cy="457200"/>
+          </a:xfrm>
+          <a:prstGeom prst="rect">
+            <a:avLst/>
+          </a:prstGeom>
+          <a:noFill/>
+        </p:spPr>
+        <p:txBody>
+          <a:bodyPr wrap="square">
+            <a:spAutoFit/>
+          </a:bodyPr>
+          <a:lstStyle/>
+          <a:p>
+            <a:pPr algn="l"/>
+            <a:r>
+              <a:rPr sz="1800" b="1">
+                <a:solidFill>
+                  <a:srgbClr val="F2F2F2"/>
+                </a:solidFill>
+                <a:latin typeface="Calibri"/>
+              </a:rPr>
+              <a:t>overflow flag</a:t>
+            </a:r>
+          </a:p>
+        </p:txBody>
+      </p:sp>
+      <p:sp>
+        <p:nvSpPr>
+          <p:cNvPr id="20" name="TextBox 19"/>
+          <p:cNvSpPr txBox="1"/>
+          <p:nvPr/>
+        </p:nvSpPr>
+        <p:spPr>
+          <a:xfrm>
+            <a:off x="4206240" y="4553712"/>
+            <a:ext cx="7223760" cy="548640"/>
+          </a:xfrm>
+          <a:prstGeom prst="rect">
+            <a:avLst/>
+          </a:prstGeom>
+          <a:noFill/>
+        </p:spPr>
+        <p:txBody>
+          <a:bodyPr wrap="square">
+            <a:spAutoFit/>
+          </a:bodyPr>
+          <a:lstStyle/>
+          <a:p>
+            <a:pPr algn="l"/>
+            <a:r>
+              <a:rPr sz="1600" b="0">
+                <a:solidFill>
+                  <a:srgbClr val="F2F2F2"/>
+                </a:solidFill>
+                <a:latin typeface="Calibri"/>
+              </a:rPr>
+              <a:t>Signed overflow. The result does not fit in a signed value of that size.</a:t>
+            </a:r>
+          </a:p>
+        </p:txBody>
+      </p:sp>
+      <p:sp>
+        <p:nvSpPr>
+          <p:cNvPr id="21" name="TextBox 20"/>
+          <p:cNvSpPr txBox="1"/>
+          <p:nvPr/>
+        </p:nvSpPr>
+        <p:spPr>
+          <a:xfrm>
+            <a:off x="457200" y="5486400"/>
+            <a:ext cx="11247120" cy="777240"/>
+          </a:xfrm>
+          <a:prstGeom prst="rect">
+            <a:avLst/>
+          </a:prstGeom>
+          <a:noFill/>
+        </p:spPr>
+        <p:txBody>
+          <a:bodyPr wrap="square">
+            <a:spAutoFit/>
+          </a:bodyPr>
+          <a:lstStyle/>
+          <a:p>
+            <a:pPr algn="l"/>
+            <a:r>
+              <a:rPr sz="1600" b="0">
+                <a:solidFill>
+                  <a:srgbClr val="7CDA6A"/>
+                </a:solidFill>
+                <a:latin typeface="Consolas"/>
+              </a:rPr>
+              <a:t>gdb:  info registers eflags     print ($eflags &amp; 0x40)   non-zero means ZF is set</a:t>
+            </a:r>
+          </a:p>
+        </p:txBody>
+      </p:sp>
+      <p:sp>
+        <p:nvSpPr>
+          <p:cNvPr id="22" name="Rectangle 21"/>
+          <p:cNvSpPr/>
+          <p:nvPr/>
+        </p:nvSpPr>
+        <p:spPr>
+          <a:xfrm>
+            <a:off x="0" y="6601968"/>
+            <a:ext cx="12191695" cy="256032"/>
+          </a:xfrm>
+          <a:prstGeom prst="rect">
+            <a:avLst/>
+          </a:prstGeom>
+          <a:solidFill>
+            <a:srgbClr val="121212"/>
+          </a:solidFill>
+          <a:ln>
+            <a:noFill/>
+          </a:ln>
+          <a:effectLst/>
+        </p:spPr>
+        <p:style>
+          <a:lnRef idx="1">
+            <a:schemeClr val="accent1"/>
+          </a:lnRef>
+          <a:fillRef idx="3">
+            <a:schemeClr val="accent1"/>
+          </a:fillRef>
+          <a:effectRef idx="2">
+            <a:schemeClr val="accent1"/>
+          </a:effectRef>
+          <a:fontRef idx="minor">
+            <a:schemeClr val="lt1"/>
+          </a:fontRef>
+        </p:style>
+        <p:txBody>
+          <a:bodyPr rtlCol="0" anchor="ctr"/>
+          <a:lstStyle/>
+          <a:p>
+            <a:pPr algn="ctr"/>
+          </a:p>
+        </p:txBody>
+      </p:sp>
+      <p:sp>
+        <p:nvSpPr>
+          <p:cNvPr id="23" name="TextBox 22"/>
+          <p:cNvSpPr txBox="1"/>
+          <p:nvPr/>
+        </p:nvSpPr>
+        <p:spPr>
+          <a:xfrm>
+            <a:off x="365760" y="6601968"/>
+            <a:ext cx="7315200" cy="237744"/>
+          </a:xfrm>
+          <a:prstGeom prst="rect">
+            <a:avLst/>
+          </a:prstGeom>
+          <a:noFill/>
+        </p:spPr>
+        <p:txBody>
+          <a:bodyPr wrap="square">
+            <a:spAutoFit/>
+          </a:bodyPr>
+          <a:lstStyle/>
+          <a:p>
+            <a:pPr algn="l"/>
+            <a:r>
+              <a:rPr sz="1100" b="0">
+                <a:solidFill>
+                  <a:srgbClr val="B0B0B0"/>
+                </a:solidFill>
+                <a:latin typeface="Calibri"/>
+              </a:rPr>
+              <a:t>Reverse Engineering 101   |   Ajin Deepak</a:t>
+            </a:r>
+          </a:p>
+        </p:txBody>
+      </p:sp>
+      <p:sp>
+        <p:nvSpPr>
+          <p:cNvPr id="24" name="TextBox 23"/>
+          <p:cNvSpPr txBox="1"/>
+          <p:nvPr/>
+        </p:nvSpPr>
+        <p:spPr>
+          <a:xfrm>
+            <a:off x="9601200" y="6601968"/>
+            <a:ext cx="2194560" cy="237744"/>
+          </a:xfrm>
+          <a:prstGeom prst="rect">
+            <a:avLst/>
+          </a:prstGeom>
+          <a:noFill/>
+        </p:spPr>
+        <p:txBody>
+          <a:bodyPr wrap="square">
+            <a:spAutoFit/>
+          </a:bodyPr>
+          <a:lstStyle/>
+          <a:p>
+            <a:pPr algn="r"/>
+            <a:r>
+              <a:rPr sz="1100" b="0">
+                <a:solidFill>
+                  <a:srgbClr val="B0B0B0"/>
+                </a:solidFill>
+                <a:latin typeface="Calibri"/>
+              </a:rPr>
+              <a:t>15 / 28</a:t>
+            </a:r>
+          </a:p>
+        </p:txBody>
+      </p:sp>
+    </p:spTree>
+  </p:cSld>
+  <p:clrMapOvr>
+    <a:masterClrMapping/>
+  </p:clrMapOvr>
+</p:sld>
+</file>
+
 <file path=ppt/slides/slide3.xml><?xml version="1.0" encoding="utf-8"?>
 <p:sld xmlns:a="http://schemas.openxmlformats.org/drawingml/2006/main" xmlns:r="http://schemas.openxmlformats.org/officeDocument/2006/relationships" xmlns:p="http://schemas.openxmlformats.org/presentationml/2006/main">
   <p:cSld>
@@ -19429,7 +20315,7 @@
                 </a:solidFill>
                 <a:latin typeface="Calibri"/>
               </a:rPr>
-              <a:t>3 / 27</a:t>
+              <a:t>3 / 28</a:t>
             </a:r>
           </a:p>
         </p:txBody>
@@ -19859,7 +20745,7 @@
                 </a:solidFill>
                 <a:latin typeface="Calibri"/>
               </a:rPr>
-              <a:t>4 / 27</a:t>
+              <a:t>4 / 28</a:t>
             </a:r>
           </a:p>
         </p:txBody>
@@ -20549,7 +21435,7 @@
                 </a:solidFill>
                 <a:latin typeface="Calibri"/>
               </a:rPr>
-              <a:t>5 / 27</a:t>
+              <a:t>5 / 28</a:t>
             </a:r>
           </a:p>
         </p:txBody>
@@ -21268,7 +22154,7 @@
                 </a:solidFill>
                 <a:latin typeface="Calibri"/>
               </a:rPr>
-              <a:t>6 / 27</a:t>
+              <a:t>6 / 28</a:t>
             </a:r>
           </a:p>
         </p:txBody>
@@ -22131,7 +23017,7 @@
                 </a:solidFill>
                 <a:latin typeface="Calibri"/>
               </a:rPr>
-              <a:t>7 / 27</a:t>
+              <a:t>7 / 28</a:t>
             </a:r>
           </a:p>
         </p:txBody>
@@ -23011,7 +23897,7 @@
                 </a:solidFill>
                 <a:latin typeface="Calibri"/>
               </a:rPr>
-              <a:t>8 / 27</a:t>
+              <a:t>8 / 28</a:t>
             </a:r>
           </a:p>
         </p:txBody>
@@ -24044,7 +24930,7 @@
                 </a:solidFill>
                 <a:latin typeface="Calibri"/>
               </a:rPr>
-              <a:t>9 / 27</a:t>
+              <a:t>9 / 28</a:t>
             </a:r>
           </a:p>
         </p:txBody>
